--- a/output/wordlabs-clos-3day.pptx
+++ b/output/wordlabs-clos-3day.pptx
@@ -6040,7 +6040,7 @@
                 <a:ea typeface="Calibri" pitchFamily="34" charset="-122"/>
                 <a:cs typeface="Calibri" pitchFamily="34" charset="-120"/>
               </a:rPr>
-              <a:t>The sign on the gate announced the </a:t>
+              <a:t>The manager had to </a:t>
             </a:r>
             <a:pPr algn="l" indent="0" marL="0">
               <a:buNone/>
@@ -6057,7 +6057,7 @@
                 <a:ea typeface="Calibri" pitchFamily="34" charset="-122"/>
                 <a:cs typeface="Calibri" pitchFamily="34" charset="-120"/>
               </a:rPr>
-              <a:t>closure</a:t>
+              <a:t>disclose</a:t>
             </a:r>
             <a:pPr algn="l" indent="0" marL="0">
               <a:buNone/>
@@ -6071,7 +6071,7 @@
                 <a:ea typeface="Calibri" pitchFamily="34" charset="-122"/>
                 <a:cs typeface="Calibri" pitchFamily="34" charset="-120"/>
               </a:rPr>
-              <a:t> of the </a:t>
+              <a:t> the reasons for the </a:t>
             </a:r>
             <a:pPr algn="l" indent="0" marL="0">
               <a:buNone/>
@@ -6088,7 +6088,7 @@
                 <a:ea typeface="Calibri" pitchFamily="34" charset="-122"/>
                 <a:cs typeface="Calibri" pitchFamily="34" charset="-120"/>
               </a:rPr>
-              <a:t>enclosure</a:t>
+              <a:t>closure</a:t>
             </a:r>
             <a:pPr algn="l" indent="0" marL="0">
               <a:buNone/>
@@ -6102,7 +6102,7 @@
                 <a:ea typeface="Calibri" pitchFamily="34" charset="-122"/>
                 <a:cs typeface="Calibri" pitchFamily="34" charset="-120"/>
               </a:rPr>
-              <a:t> for repairs.</a:t>
+              <a:t> of the old swimming pool.</a:t>
             </a:r>
             <a:endParaRPr lang="en-US" sz="1800" dirty="0"/>
           </a:p>
@@ -6257,7 +6257,7 @@
                 <a:ea typeface="Trebuchet MS" pitchFamily="34" charset="-122"/>
                 <a:cs typeface="Trebuchet MS" pitchFamily="34" charset="-120"/>
               </a:rPr>
-              <a:t>closure</a:t>
+              <a:t>disclose</a:t>
             </a:r>
             <a:endParaRPr lang="en-US" sz="1400" dirty="0"/>
           </a:p>
@@ -6385,7 +6385,7 @@
                 <a:ea typeface="Trebuchet MS" pitchFamily="34" charset="-122"/>
                 <a:cs typeface="Trebuchet MS" pitchFamily="34" charset="-120"/>
               </a:rPr>
-              <a:t>enclosure</a:t>
+              <a:t>closure</a:t>
             </a:r>
             <a:endParaRPr lang="en-US" sz="1400" dirty="0"/>
           </a:p>
@@ -6855,7 +6855,7 @@
                 <a:ea typeface="Trebuchet MS" pitchFamily="34" charset="-122"/>
                 <a:cs typeface="Trebuchet MS" pitchFamily="34" charset="-120"/>
               </a:rPr>
-              <a:t>closure</a:t>
+              <a:t>disclose</a:t>
             </a:r>
             <a:endParaRPr lang="en-US" sz="2800" dirty="0"/>
           </a:p>
@@ -7682,7 +7682,7 @@
                 <a:ea typeface="Trebuchet MS" pitchFamily="34" charset="-122"/>
                 <a:cs typeface="Trebuchet MS" pitchFamily="34" charset="-120"/>
               </a:rPr>
-              <a:t>closure</a:t>
+              <a:t>disclose</a:t>
             </a:r>
             <a:endParaRPr lang="en-US" sz="2800" dirty="0"/>
           </a:p>
@@ -7762,7 +7762,7 @@
         </p:nvSpPr>
         <p:spPr>
           <a:xfrm>
-            <a:off x="2938272" y="2258568"/>
+            <a:off x="2221992" y="2258568"/>
             <a:ext cx="1828800" cy="292608"/>
           </a:xfrm>
           <a:prstGeom prst="rect">
@@ -7771,11 +7771,11 @@
             </a:avLst>
           </a:prstGeom>
           <a:solidFill>
-            <a:srgbClr val="CCFBF1"/>
+            <a:srgbClr val="DDD6FE"/>
           </a:solidFill>
           <a:ln w="19050">
             <a:solidFill>
-              <a:srgbClr val="0D9488"/>
+              <a:srgbClr val="7C3AED"/>
             </a:solidFill>
             <a:prstDash val="solid"/>
           </a:ln>
@@ -7796,7 +7796,7 @@
         </p:nvSpPr>
         <p:spPr>
           <a:xfrm>
-            <a:off x="2938272" y="2258568"/>
+            <a:off x="2221992" y="2258568"/>
             <a:ext cx="1828800" cy="292608"/>
           </a:xfrm>
           <a:prstGeom prst="rect">
@@ -7815,13 +7815,13 @@
             <a:r>
               <a:rPr lang="en-US" sz="1300" b="1" dirty="0">
                 <a:solidFill>
-                  <a:srgbClr val="0F766E"/>
+                  <a:srgbClr val="4C1D95"/>
                 </a:solidFill>
                 <a:latin typeface="Trebuchet MS" pitchFamily="34" charset="0"/>
                 <a:ea typeface="Trebuchet MS" pitchFamily="34" charset="-122"/>
                 <a:cs typeface="Trebuchet MS" pitchFamily="34" charset="-120"/>
               </a:rPr>
-              <a:t>clos</a:t>
+              <a:t>dis</a:t>
             </a:r>
             <a:endParaRPr lang="en-US" sz="1300" dirty="0"/>
           </a:p>
@@ -7835,7 +7835,7 @@
         </p:nvSpPr>
         <p:spPr>
           <a:xfrm>
-            <a:off x="2938272" y="2569464"/>
+            <a:off x="2221992" y="2569464"/>
             <a:ext cx="1828800" cy="201168"/>
           </a:xfrm>
           <a:prstGeom prst="rect">
@@ -7860,7 +7860,7 @@
                 <a:ea typeface="Calibri" pitchFamily="34" charset="-122"/>
                 <a:cs typeface="Calibri" pitchFamily="34" charset="-120"/>
               </a:rPr>
-              <a:t>shut, close</a:t>
+              <a:t>apart, not</a:t>
             </a:r>
             <a:endParaRPr lang="en-US" sz="850" dirty="0"/>
           </a:p>
@@ -7874,7 +7874,7 @@
         </p:nvSpPr>
         <p:spPr>
           <a:xfrm>
-            <a:off x="5803392" y="2258568"/>
+            <a:off x="4370832" y="2258568"/>
             <a:ext cx="1828800" cy="292608"/>
           </a:xfrm>
           <a:prstGeom prst="rect">
@@ -7883,11 +7883,11 @@
             </a:avLst>
           </a:prstGeom>
           <a:solidFill>
-            <a:srgbClr val="FCE7F3"/>
+            <a:srgbClr val="CCFBF1"/>
           </a:solidFill>
           <a:ln w="19050">
             <a:solidFill>
-              <a:srgbClr val="DB2777"/>
+              <a:srgbClr val="0D9488"/>
             </a:solidFill>
             <a:prstDash val="solid"/>
           </a:ln>
@@ -7908,7 +7908,7 @@
         </p:nvSpPr>
         <p:spPr>
           <a:xfrm>
-            <a:off x="5803392" y="2258568"/>
+            <a:off x="4370832" y="2258568"/>
             <a:ext cx="1828800" cy="292608"/>
           </a:xfrm>
           <a:prstGeom prst="rect">
@@ -7927,13 +7927,13 @@
             <a:r>
               <a:rPr lang="en-US" sz="1300" b="1" dirty="0">
                 <a:solidFill>
-                  <a:srgbClr val="9D174D"/>
+                  <a:srgbClr val="0F766E"/>
                 </a:solidFill>
                 <a:latin typeface="Trebuchet MS" pitchFamily="34" charset="0"/>
                 <a:ea typeface="Trebuchet MS" pitchFamily="34" charset="-122"/>
                 <a:cs typeface="Trebuchet MS" pitchFamily="34" charset="-120"/>
               </a:rPr>
-              <a:t>ure</a:t>
+              <a:t>clos</a:t>
             </a:r>
             <a:endParaRPr lang="en-US" sz="1300" dirty="0"/>
           </a:p>
@@ -7947,7 +7947,7 @@
         </p:nvSpPr>
         <p:spPr>
           <a:xfrm>
-            <a:off x="5803392" y="2569464"/>
+            <a:off x="4370832" y="2569464"/>
             <a:ext cx="1828800" cy="201168"/>
           </a:xfrm>
           <a:prstGeom prst="rect">
@@ -7972,7 +7972,7 @@
                 <a:ea typeface="Calibri" pitchFamily="34" charset="-122"/>
                 <a:cs typeface="Calibri" pitchFamily="34" charset="-120"/>
               </a:rPr>
-              <a:t>result or process of</a:t>
+              <a:t>shut, close</a:t>
             </a:r>
             <a:endParaRPr lang="en-US" sz="850" dirty="0"/>
           </a:p>
@@ -7981,6 +7981,118 @@
       <p:sp>
         <p:nvSpPr>
           <p:cNvPr id="22" name="Shape 20"/>
+          <p:cNvSpPr/>
+          <p:nvPr/>
+        </p:nvSpPr>
+        <p:spPr>
+          <a:xfrm>
+            <a:off x="6519672" y="2258568"/>
+            <a:ext cx="1828800" cy="292608"/>
+          </a:xfrm>
+          <a:prstGeom prst="rect">
+            <a:avLst>
+              <a:gd name="adj" fmla="val 25000"/>
+            </a:avLst>
+          </a:prstGeom>
+          <a:solidFill>
+            <a:srgbClr val="FCE7F3"/>
+          </a:solidFill>
+          <a:ln w="19050">
+            <a:solidFill>
+              <a:srgbClr val="DB2777"/>
+            </a:solidFill>
+            <a:prstDash val="solid"/>
+          </a:ln>
+          <a:effectLst>
+            <a:outerShdw sx="100000" sy="100000" kx="0" ky="0" algn="bl" rotWithShape="0" blurRad="101600" dist="38100" dir="8100000">
+              <a:srgbClr val="000000">
+                <a:alpha val="12000"/>
+              </a:srgbClr>
+            </a:outerShdw>
+          </a:effectLst>
+        </p:spPr>
+      </p:sp>
+      <p:sp>
+        <p:nvSpPr>
+          <p:cNvPr id="23" name="Text 21"/>
+          <p:cNvSpPr/>
+          <p:nvPr/>
+        </p:nvSpPr>
+        <p:spPr>
+          <a:xfrm>
+            <a:off x="6519672" y="2258568"/>
+            <a:ext cx="1828800" cy="292608"/>
+          </a:xfrm>
+          <a:prstGeom prst="rect">
+            <a:avLst/>
+          </a:prstGeom>
+          <a:noFill/>
+          <a:ln/>
+        </p:spPr>
+        <p:txBody>
+          <a:bodyPr wrap="square" lIns="0" tIns="0" rIns="0" bIns="0" rtlCol="0" anchor="ctr"/>
+          <a:lstStyle/>
+          <a:p>
+            <a:pPr algn="ctr" indent="0" marL="0">
+              <a:buNone/>
+            </a:pPr>
+            <a:r>
+              <a:rPr lang="en-US" sz="1300" b="1" dirty="0">
+                <a:solidFill>
+                  <a:srgbClr val="9D174D"/>
+                </a:solidFill>
+                <a:latin typeface="Trebuchet MS" pitchFamily="34" charset="0"/>
+                <a:ea typeface="Trebuchet MS" pitchFamily="34" charset="-122"/>
+                <a:cs typeface="Trebuchet MS" pitchFamily="34" charset="-120"/>
+              </a:rPr>
+              <a:t>e</a:t>
+            </a:r>
+            <a:endParaRPr lang="en-US" sz="1300" dirty="0"/>
+          </a:p>
+        </p:txBody>
+      </p:sp>
+      <p:sp>
+        <p:nvSpPr>
+          <p:cNvPr id="24" name="Text 22"/>
+          <p:cNvSpPr/>
+          <p:nvPr/>
+        </p:nvSpPr>
+        <p:spPr>
+          <a:xfrm>
+            <a:off x="6519672" y="2569464"/>
+            <a:ext cx="1828800" cy="201168"/>
+          </a:xfrm>
+          <a:prstGeom prst="rect">
+            <a:avLst/>
+          </a:prstGeom>
+          <a:noFill/>
+          <a:ln/>
+        </p:spPr>
+        <p:txBody>
+          <a:bodyPr wrap="square" lIns="0" tIns="0" rIns="0" bIns="0" rtlCol="0" anchor="t"/>
+          <a:lstStyle/>
+          <a:p>
+            <a:pPr algn="ctr" indent="0" marL="0">
+              <a:buNone/>
+            </a:pPr>
+            <a:r>
+              <a:rPr lang="en-US" sz="850" dirty="0">
+                <a:solidFill>
+                  <a:srgbClr val="475569"/>
+                </a:solidFill>
+                <a:latin typeface="Calibri" pitchFamily="34" charset="0"/>
+                <a:ea typeface="Calibri" pitchFamily="34" charset="-122"/>
+                <a:cs typeface="Calibri" pitchFamily="34" charset="-120"/>
+              </a:rPr>
+              <a:t>verb-forming ending</a:t>
+            </a:r>
+            <a:endParaRPr lang="en-US" sz="850" dirty="0"/>
+          </a:p>
+        </p:txBody>
+      </p:sp>
+      <p:sp>
+        <p:nvSpPr>
+          <p:cNvPr id="25" name="Shape 23"/>
           <p:cNvSpPr/>
           <p:nvPr/>
         </p:nvSpPr>
@@ -8007,7 +8119,7 @@
       </p:sp>
       <p:sp>
         <p:nvSpPr>
-          <p:cNvPr id="23" name="Text 21"/>
+          <p:cNvPr id="26" name="Text 24"/>
           <p:cNvSpPr/>
           <p:nvPr/>
         </p:nvSpPr>
@@ -8046,7 +8158,7 @@
       </p:sp>
       <p:sp>
         <p:nvSpPr>
-          <p:cNvPr id="24" name="Shape 22"/>
+          <p:cNvPr id="27" name="Shape 25"/>
           <p:cNvSpPr/>
           <p:nvPr/>
         </p:nvSpPr>
@@ -8073,7 +8185,7 @@
       </p:sp>
       <p:sp>
         <p:nvSpPr>
-          <p:cNvPr id="25" name="Text 23"/>
+          <p:cNvPr id="28" name="Text 26"/>
           <p:cNvSpPr/>
           <p:nvPr/>
         </p:nvSpPr>
@@ -8112,7 +8224,7 @@
       </p:sp>
       <p:sp>
         <p:nvSpPr>
-          <p:cNvPr id="26" name="Shape 24"/>
+          <p:cNvPr id="29" name="Shape 27"/>
           <p:cNvSpPr/>
           <p:nvPr/>
         </p:nvSpPr>
@@ -8139,7 +8251,7 @@
       </p:sp>
       <p:sp>
         <p:nvSpPr>
-          <p:cNvPr id="27" name="Text 25"/>
+          <p:cNvPr id="30" name="Text 28"/>
           <p:cNvSpPr/>
           <p:nvPr/>
         </p:nvSpPr>
@@ -8178,7 +8290,7 @@
       </p:sp>
       <p:sp>
         <p:nvSpPr>
-          <p:cNvPr id="28" name="Shape 26"/>
+          <p:cNvPr id="31" name="Shape 29"/>
           <p:cNvSpPr/>
           <p:nvPr/>
         </p:nvSpPr>
@@ -8205,7 +8317,7 @@
       </p:sp>
       <p:sp>
         <p:nvSpPr>
-          <p:cNvPr id="29" name="Text 27"/>
+          <p:cNvPr id="32" name="Text 30"/>
           <p:cNvSpPr/>
           <p:nvPr/>
         </p:nvSpPr>
@@ -8667,7 +8779,7 @@
                 <a:ea typeface="Trebuchet MS" pitchFamily="34" charset="-122"/>
                 <a:cs typeface="Trebuchet MS" pitchFamily="34" charset="-120"/>
               </a:rPr>
-              <a:t>closure</a:t>
+              <a:t>disclose</a:t>
             </a:r>
             <a:endParaRPr lang="en-US" sz="2800" dirty="0"/>
           </a:p>
@@ -8747,7 +8859,7 @@
         </p:nvSpPr>
         <p:spPr>
           <a:xfrm>
-            <a:off x="2938272" y="2258568"/>
+            <a:off x="2221992" y="2258568"/>
             <a:ext cx="1828800" cy="292608"/>
           </a:xfrm>
           <a:prstGeom prst="rect">
@@ -8756,11 +8868,11 @@
             </a:avLst>
           </a:prstGeom>
           <a:solidFill>
-            <a:srgbClr val="CCFBF1"/>
+            <a:srgbClr val="DDD6FE"/>
           </a:solidFill>
           <a:ln w="19050">
             <a:solidFill>
-              <a:srgbClr val="0D9488"/>
+              <a:srgbClr val="7C3AED"/>
             </a:solidFill>
             <a:prstDash val="solid"/>
           </a:ln>
@@ -8781,7 +8893,7 @@
         </p:nvSpPr>
         <p:spPr>
           <a:xfrm>
-            <a:off x="2938272" y="2258568"/>
+            <a:off x="2221992" y="2258568"/>
             <a:ext cx="1828800" cy="292608"/>
           </a:xfrm>
           <a:prstGeom prst="rect">
@@ -8800,13 +8912,13 @@
             <a:r>
               <a:rPr lang="en-US" sz="1300" b="1" dirty="0">
                 <a:solidFill>
-                  <a:srgbClr val="0F766E"/>
+                  <a:srgbClr val="4C1D95"/>
                 </a:solidFill>
                 <a:latin typeface="Trebuchet MS" pitchFamily="34" charset="0"/>
                 <a:ea typeface="Trebuchet MS" pitchFamily="34" charset="-122"/>
                 <a:cs typeface="Trebuchet MS" pitchFamily="34" charset="-120"/>
               </a:rPr>
-              <a:t>clos</a:t>
+              <a:t>dis</a:t>
             </a:r>
             <a:endParaRPr lang="en-US" sz="1300" dirty="0"/>
           </a:p>
@@ -8820,7 +8932,7 @@
         </p:nvSpPr>
         <p:spPr>
           <a:xfrm>
-            <a:off x="2938272" y="2569464"/>
+            <a:off x="2221992" y="2569464"/>
             <a:ext cx="1828800" cy="201168"/>
           </a:xfrm>
           <a:prstGeom prst="rect">
@@ -8845,7 +8957,7 @@
                 <a:ea typeface="Calibri" pitchFamily="34" charset="-122"/>
                 <a:cs typeface="Calibri" pitchFamily="34" charset="-120"/>
               </a:rPr>
-              <a:t>shut, close</a:t>
+              <a:t>apart, not</a:t>
             </a:r>
             <a:endParaRPr lang="en-US" sz="850" dirty="0"/>
           </a:p>
@@ -8859,7 +8971,7 @@
         </p:nvSpPr>
         <p:spPr>
           <a:xfrm>
-            <a:off x="5803392" y="2258568"/>
+            <a:off x="4370832" y="2258568"/>
             <a:ext cx="1828800" cy="292608"/>
           </a:xfrm>
           <a:prstGeom prst="rect">
@@ -8868,11 +8980,11 @@
             </a:avLst>
           </a:prstGeom>
           <a:solidFill>
-            <a:srgbClr val="FCE7F3"/>
+            <a:srgbClr val="CCFBF1"/>
           </a:solidFill>
           <a:ln w="19050">
             <a:solidFill>
-              <a:srgbClr val="DB2777"/>
+              <a:srgbClr val="0D9488"/>
             </a:solidFill>
             <a:prstDash val="solid"/>
           </a:ln>
@@ -8893,7 +9005,7 @@
         </p:nvSpPr>
         <p:spPr>
           <a:xfrm>
-            <a:off x="5803392" y="2258568"/>
+            <a:off x="4370832" y="2258568"/>
             <a:ext cx="1828800" cy="292608"/>
           </a:xfrm>
           <a:prstGeom prst="rect">
@@ -8912,13 +9024,13 @@
             <a:r>
               <a:rPr lang="en-US" sz="1300" b="1" dirty="0">
                 <a:solidFill>
-                  <a:srgbClr val="9D174D"/>
+                  <a:srgbClr val="0F766E"/>
                 </a:solidFill>
                 <a:latin typeface="Trebuchet MS" pitchFamily="34" charset="0"/>
                 <a:ea typeface="Trebuchet MS" pitchFamily="34" charset="-122"/>
                 <a:cs typeface="Trebuchet MS" pitchFamily="34" charset="-120"/>
               </a:rPr>
-              <a:t>ure</a:t>
+              <a:t>clos</a:t>
             </a:r>
             <a:endParaRPr lang="en-US" sz="1300" dirty="0"/>
           </a:p>
@@ -8932,7 +9044,7 @@
         </p:nvSpPr>
         <p:spPr>
           <a:xfrm>
-            <a:off x="5803392" y="2569464"/>
+            <a:off x="4370832" y="2569464"/>
             <a:ext cx="1828800" cy="201168"/>
           </a:xfrm>
           <a:prstGeom prst="rect">
@@ -8957,7 +9069,7 @@
                 <a:ea typeface="Calibri" pitchFamily="34" charset="-122"/>
                 <a:cs typeface="Calibri" pitchFamily="34" charset="-120"/>
               </a:rPr>
-              <a:t>result or process of</a:t>
+              <a:t>shut, close</a:t>
             </a:r>
             <a:endParaRPr lang="en-US" sz="850" dirty="0"/>
           </a:p>
@@ -8966,6 +9078,118 @@
       <p:sp>
         <p:nvSpPr>
           <p:cNvPr id="22" name="Shape 20"/>
+          <p:cNvSpPr/>
+          <p:nvPr/>
+        </p:nvSpPr>
+        <p:spPr>
+          <a:xfrm>
+            <a:off x="6519672" y="2258568"/>
+            <a:ext cx="1828800" cy="292608"/>
+          </a:xfrm>
+          <a:prstGeom prst="rect">
+            <a:avLst>
+              <a:gd name="adj" fmla="val 25000"/>
+            </a:avLst>
+          </a:prstGeom>
+          <a:solidFill>
+            <a:srgbClr val="FCE7F3"/>
+          </a:solidFill>
+          <a:ln w="19050">
+            <a:solidFill>
+              <a:srgbClr val="DB2777"/>
+            </a:solidFill>
+            <a:prstDash val="solid"/>
+          </a:ln>
+          <a:effectLst>
+            <a:outerShdw sx="100000" sy="100000" kx="0" ky="0" algn="bl" rotWithShape="0" blurRad="101600" dist="38100" dir="8100000">
+              <a:srgbClr val="000000">
+                <a:alpha val="12000"/>
+              </a:srgbClr>
+            </a:outerShdw>
+          </a:effectLst>
+        </p:spPr>
+      </p:sp>
+      <p:sp>
+        <p:nvSpPr>
+          <p:cNvPr id="23" name="Text 21"/>
+          <p:cNvSpPr/>
+          <p:nvPr/>
+        </p:nvSpPr>
+        <p:spPr>
+          <a:xfrm>
+            <a:off x="6519672" y="2258568"/>
+            <a:ext cx="1828800" cy="292608"/>
+          </a:xfrm>
+          <a:prstGeom prst="rect">
+            <a:avLst/>
+          </a:prstGeom>
+          <a:noFill/>
+          <a:ln/>
+        </p:spPr>
+        <p:txBody>
+          <a:bodyPr wrap="square" lIns="0" tIns="0" rIns="0" bIns="0" rtlCol="0" anchor="ctr"/>
+          <a:lstStyle/>
+          <a:p>
+            <a:pPr algn="ctr" indent="0" marL="0">
+              <a:buNone/>
+            </a:pPr>
+            <a:r>
+              <a:rPr lang="en-US" sz="1300" b="1" dirty="0">
+                <a:solidFill>
+                  <a:srgbClr val="9D174D"/>
+                </a:solidFill>
+                <a:latin typeface="Trebuchet MS" pitchFamily="34" charset="0"/>
+                <a:ea typeface="Trebuchet MS" pitchFamily="34" charset="-122"/>
+                <a:cs typeface="Trebuchet MS" pitchFamily="34" charset="-120"/>
+              </a:rPr>
+              <a:t>e</a:t>
+            </a:r>
+            <a:endParaRPr lang="en-US" sz="1300" dirty="0"/>
+          </a:p>
+        </p:txBody>
+      </p:sp>
+      <p:sp>
+        <p:nvSpPr>
+          <p:cNvPr id="24" name="Text 22"/>
+          <p:cNvSpPr/>
+          <p:nvPr/>
+        </p:nvSpPr>
+        <p:spPr>
+          <a:xfrm>
+            <a:off x="6519672" y="2569464"/>
+            <a:ext cx="1828800" cy="201168"/>
+          </a:xfrm>
+          <a:prstGeom prst="rect">
+            <a:avLst/>
+          </a:prstGeom>
+          <a:noFill/>
+          <a:ln/>
+        </p:spPr>
+        <p:txBody>
+          <a:bodyPr wrap="square" lIns="0" tIns="0" rIns="0" bIns="0" rtlCol="0" anchor="t"/>
+          <a:lstStyle/>
+          <a:p>
+            <a:pPr algn="ctr" indent="0" marL="0">
+              <a:buNone/>
+            </a:pPr>
+            <a:r>
+              <a:rPr lang="en-US" sz="850" dirty="0">
+                <a:solidFill>
+                  <a:srgbClr val="475569"/>
+                </a:solidFill>
+                <a:latin typeface="Calibri" pitchFamily="34" charset="0"/>
+                <a:ea typeface="Calibri" pitchFamily="34" charset="-122"/>
+                <a:cs typeface="Calibri" pitchFamily="34" charset="-120"/>
+              </a:rPr>
+              <a:t>verb-forming ending</a:t>
+            </a:r>
+            <a:endParaRPr lang="en-US" sz="850" dirty="0"/>
+          </a:p>
+        </p:txBody>
+      </p:sp>
+      <p:sp>
+        <p:nvSpPr>
+          <p:cNvPr id="25" name="Shape 23"/>
           <p:cNvSpPr/>
           <p:nvPr/>
         </p:nvSpPr>
@@ -8992,7 +9216,7 @@
       </p:sp>
       <p:sp>
         <p:nvSpPr>
-          <p:cNvPr id="23" name="Text 21"/>
+          <p:cNvPr id="26" name="Text 24"/>
           <p:cNvSpPr/>
           <p:nvPr/>
         </p:nvSpPr>
@@ -9031,7 +9255,7 @@
       </p:sp>
       <p:sp>
         <p:nvSpPr>
-          <p:cNvPr id="24" name="Shape 22"/>
+          <p:cNvPr id="27" name="Shape 25"/>
           <p:cNvSpPr/>
           <p:nvPr/>
         </p:nvSpPr>
@@ -9058,7 +9282,7 @@
       </p:sp>
       <p:sp>
         <p:nvSpPr>
-          <p:cNvPr id="25" name="Shape 23"/>
+          <p:cNvPr id="28" name="Shape 26"/>
           <p:cNvSpPr/>
           <p:nvPr/>
         </p:nvSpPr>
@@ -9085,7 +9309,7 @@
       </p:sp>
       <p:sp>
         <p:nvSpPr>
-          <p:cNvPr id="26" name="Text 24"/>
+          <p:cNvPr id="29" name="Text 27"/>
           <p:cNvSpPr/>
           <p:nvPr/>
         </p:nvSpPr>
@@ -9116,7 +9340,7 @@
                 <a:ea typeface="Trebuchet MS" pitchFamily="34" charset="-122"/>
                 <a:cs typeface="Trebuchet MS" pitchFamily="34" charset="-120"/>
               </a:rPr>
-              <a:t>clo</a:t>
+              <a:t>dis</a:t>
             </a:r>
             <a:endParaRPr lang="en-US" sz="1400" dirty="0"/>
           </a:p>
@@ -9124,7 +9348,7 @@
       </p:sp>
       <p:sp>
         <p:nvSpPr>
-          <p:cNvPr id="27" name="Text 25"/>
+          <p:cNvPr id="30" name="Text 28"/>
           <p:cNvSpPr/>
           <p:nvPr/>
         </p:nvSpPr>
@@ -9163,7 +9387,7 @@
       </p:sp>
       <p:sp>
         <p:nvSpPr>
-          <p:cNvPr id="28" name="Shape 26"/>
+          <p:cNvPr id="31" name="Shape 29"/>
           <p:cNvSpPr/>
           <p:nvPr/>
         </p:nvSpPr>
@@ -9190,7 +9414,7 @@
       </p:sp>
       <p:sp>
         <p:nvSpPr>
-          <p:cNvPr id="29" name="Text 27"/>
+          <p:cNvPr id="32" name="Text 30"/>
           <p:cNvSpPr/>
           <p:nvPr/>
         </p:nvSpPr>
@@ -9221,7 +9445,7 @@
                 <a:ea typeface="Trebuchet MS" pitchFamily="34" charset="-122"/>
                 <a:cs typeface="Trebuchet MS" pitchFamily="34" charset="-120"/>
               </a:rPr>
-              <a:t>sure</a:t>
+              <a:t>close</a:t>
             </a:r>
             <a:endParaRPr lang="en-US" sz="1400" dirty="0"/>
           </a:p>
@@ -9229,7 +9453,7 @@
       </p:sp>
       <p:sp>
         <p:nvSpPr>
-          <p:cNvPr id="30" name="Shape 28"/>
+          <p:cNvPr id="33" name="Shape 31"/>
           <p:cNvSpPr/>
           <p:nvPr/>
         </p:nvSpPr>
@@ -9256,7 +9480,7 @@
       </p:sp>
       <p:sp>
         <p:nvSpPr>
-          <p:cNvPr id="31" name="Text 29"/>
+          <p:cNvPr id="34" name="Text 32"/>
           <p:cNvSpPr/>
           <p:nvPr/>
         </p:nvSpPr>
@@ -9295,7 +9519,7 @@
       </p:sp>
       <p:sp>
         <p:nvSpPr>
-          <p:cNvPr id="32" name="Shape 30"/>
+          <p:cNvPr id="35" name="Shape 33"/>
           <p:cNvSpPr/>
           <p:nvPr/>
         </p:nvSpPr>
@@ -9322,7 +9546,7 @@
       </p:sp>
       <p:sp>
         <p:nvSpPr>
-          <p:cNvPr id="33" name="Text 31"/>
+          <p:cNvPr id="36" name="Text 34"/>
           <p:cNvSpPr/>
           <p:nvPr/>
         </p:nvSpPr>
@@ -9784,7 +10008,7 @@
                 <a:ea typeface="Trebuchet MS" pitchFamily="34" charset="-122"/>
                 <a:cs typeface="Trebuchet MS" pitchFamily="34" charset="-120"/>
               </a:rPr>
-              <a:t>closure</a:t>
+              <a:t>disclose</a:t>
             </a:r>
             <a:endParaRPr lang="en-US" sz="2800" dirty="0"/>
           </a:p>
@@ -9864,7 +10088,7 @@
         </p:nvSpPr>
         <p:spPr>
           <a:xfrm>
-            <a:off x="2938272" y="2258568"/>
+            <a:off x="2221992" y="2258568"/>
             <a:ext cx="1828800" cy="292608"/>
           </a:xfrm>
           <a:prstGeom prst="rect">
@@ -9873,11 +10097,11 @@
             </a:avLst>
           </a:prstGeom>
           <a:solidFill>
-            <a:srgbClr val="CCFBF1"/>
+            <a:srgbClr val="DDD6FE"/>
           </a:solidFill>
           <a:ln w="19050">
             <a:solidFill>
-              <a:srgbClr val="0D9488"/>
+              <a:srgbClr val="7C3AED"/>
             </a:solidFill>
             <a:prstDash val="solid"/>
           </a:ln>
@@ -9898,7 +10122,7 @@
         </p:nvSpPr>
         <p:spPr>
           <a:xfrm>
-            <a:off x="2938272" y="2258568"/>
+            <a:off x="2221992" y="2258568"/>
             <a:ext cx="1828800" cy="292608"/>
           </a:xfrm>
           <a:prstGeom prst="rect">
@@ -9917,13 +10141,13 @@
             <a:r>
               <a:rPr lang="en-US" sz="1300" b="1" dirty="0">
                 <a:solidFill>
-                  <a:srgbClr val="0F766E"/>
+                  <a:srgbClr val="4C1D95"/>
                 </a:solidFill>
                 <a:latin typeface="Trebuchet MS" pitchFamily="34" charset="0"/>
                 <a:ea typeface="Trebuchet MS" pitchFamily="34" charset="-122"/>
                 <a:cs typeface="Trebuchet MS" pitchFamily="34" charset="-120"/>
               </a:rPr>
-              <a:t>clos</a:t>
+              <a:t>dis</a:t>
             </a:r>
             <a:endParaRPr lang="en-US" sz="1300" dirty="0"/>
           </a:p>
@@ -9937,7 +10161,7 @@
         </p:nvSpPr>
         <p:spPr>
           <a:xfrm>
-            <a:off x="2938272" y="2569464"/>
+            <a:off x="2221992" y="2569464"/>
             <a:ext cx="1828800" cy="201168"/>
           </a:xfrm>
           <a:prstGeom prst="rect">
@@ -9962,7 +10186,7 @@
                 <a:ea typeface="Calibri" pitchFamily="34" charset="-122"/>
                 <a:cs typeface="Calibri" pitchFamily="34" charset="-120"/>
               </a:rPr>
-              <a:t>shut, close</a:t>
+              <a:t>apart, not</a:t>
             </a:r>
             <a:endParaRPr lang="en-US" sz="850" dirty="0"/>
           </a:p>
@@ -9976,7 +10200,7 @@
         </p:nvSpPr>
         <p:spPr>
           <a:xfrm>
-            <a:off x="5803392" y="2258568"/>
+            <a:off x="4370832" y="2258568"/>
             <a:ext cx="1828800" cy="292608"/>
           </a:xfrm>
           <a:prstGeom prst="rect">
@@ -9985,11 +10209,11 @@
             </a:avLst>
           </a:prstGeom>
           <a:solidFill>
-            <a:srgbClr val="FCE7F3"/>
+            <a:srgbClr val="CCFBF1"/>
           </a:solidFill>
           <a:ln w="19050">
             <a:solidFill>
-              <a:srgbClr val="DB2777"/>
+              <a:srgbClr val="0D9488"/>
             </a:solidFill>
             <a:prstDash val="solid"/>
           </a:ln>
@@ -10010,7 +10234,7 @@
         </p:nvSpPr>
         <p:spPr>
           <a:xfrm>
-            <a:off x="5803392" y="2258568"/>
+            <a:off x="4370832" y="2258568"/>
             <a:ext cx="1828800" cy="292608"/>
           </a:xfrm>
           <a:prstGeom prst="rect">
@@ -10029,13 +10253,13 @@
             <a:r>
               <a:rPr lang="en-US" sz="1300" b="1" dirty="0">
                 <a:solidFill>
-                  <a:srgbClr val="9D174D"/>
+                  <a:srgbClr val="0F766E"/>
                 </a:solidFill>
                 <a:latin typeface="Trebuchet MS" pitchFamily="34" charset="0"/>
                 <a:ea typeface="Trebuchet MS" pitchFamily="34" charset="-122"/>
                 <a:cs typeface="Trebuchet MS" pitchFamily="34" charset="-120"/>
               </a:rPr>
-              <a:t>ure</a:t>
+              <a:t>clos</a:t>
             </a:r>
             <a:endParaRPr lang="en-US" sz="1300" dirty="0"/>
           </a:p>
@@ -10049,7 +10273,7 @@
         </p:nvSpPr>
         <p:spPr>
           <a:xfrm>
-            <a:off x="5803392" y="2569464"/>
+            <a:off x="4370832" y="2569464"/>
             <a:ext cx="1828800" cy="201168"/>
           </a:xfrm>
           <a:prstGeom prst="rect">
@@ -10074,7 +10298,7 @@
                 <a:ea typeface="Calibri" pitchFamily="34" charset="-122"/>
                 <a:cs typeface="Calibri" pitchFamily="34" charset="-120"/>
               </a:rPr>
-              <a:t>result or process of</a:t>
+              <a:t>shut, close</a:t>
             </a:r>
             <a:endParaRPr lang="en-US" sz="850" dirty="0"/>
           </a:p>
@@ -10083,6 +10307,118 @@
       <p:sp>
         <p:nvSpPr>
           <p:cNvPr id="22" name="Shape 20"/>
+          <p:cNvSpPr/>
+          <p:nvPr/>
+        </p:nvSpPr>
+        <p:spPr>
+          <a:xfrm>
+            <a:off x="6519672" y="2258568"/>
+            <a:ext cx="1828800" cy="292608"/>
+          </a:xfrm>
+          <a:prstGeom prst="rect">
+            <a:avLst>
+              <a:gd name="adj" fmla="val 25000"/>
+            </a:avLst>
+          </a:prstGeom>
+          <a:solidFill>
+            <a:srgbClr val="FCE7F3"/>
+          </a:solidFill>
+          <a:ln w="19050">
+            <a:solidFill>
+              <a:srgbClr val="DB2777"/>
+            </a:solidFill>
+            <a:prstDash val="solid"/>
+          </a:ln>
+          <a:effectLst>
+            <a:outerShdw sx="100000" sy="100000" kx="0" ky="0" algn="bl" rotWithShape="0" blurRad="101600" dist="38100" dir="8100000">
+              <a:srgbClr val="000000">
+                <a:alpha val="12000"/>
+              </a:srgbClr>
+            </a:outerShdw>
+          </a:effectLst>
+        </p:spPr>
+      </p:sp>
+      <p:sp>
+        <p:nvSpPr>
+          <p:cNvPr id="23" name="Text 21"/>
+          <p:cNvSpPr/>
+          <p:nvPr/>
+        </p:nvSpPr>
+        <p:spPr>
+          <a:xfrm>
+            <a:off x="6519672" y="2258568"/>
+            <a:ext cx="1828800" cy="292608"/>
+          </a:xfrm>
+          <a:prstGeom prst="rect">
+            <a:avLst/>
+          </a:prstGeom>
+          <a:noFill/>
+          <a:ln/>
+        </p:spPr>
+        <p:txBody>
+          <a:bodyPr wrap="square" lIns="0" tIns="0" rIns="0" bIns="0" rtlCol="0" anchor="ctr"/>
+          <a:lstStyle/>
+          <a:p>
+            <a:pPr algn="ctr" indent="0" marL="0">
+              <a:buNone/>
+            </a:pPr>
+            <a:r>
+              <a:rPr lang="en-US" sz="1300" b="1" dirty="0">
+                <a:solidFill>
+                  <a:srgbClr val="9D174D"/>
+                </a:solidFill>
+                <a:latin typeface="Trebuchet MS" pitchFamily="34" charset="0"/>
+                <a:ea typeface="Trebuchet MS" pitchFamily="34" charset="-122"/>
+                <a:cs typeface="Trebuchet MS" pitchFamily="34" charset="-120"/>
+              </a:rPr>
+              <a:t>e</a:t>
+            </a:r>
+            <a:endParaRPr lang="en-US" sz="1300" dirty="0"/>
+          </a:p>
+        </p:txBody>
+      </p:sp>
+      <p:sp>
+        <p:nvSpPr>
+          <p:cNvPr id="24" name="Text 22"/>
+          <p:cNvSpPr/>
+          <p:nvPr/>
+        </p:nvSpPr>
+        <p:spPr>
+          <a:xfrm>
+            <a:off x="6519672" y="2569464"/>
+            <a:ext cx="1828800" cy="201168"/>
+          </a:xfrm>
+          <a:prstGeom prst="rect">
+            <a:avLst/>
+          </a:prstGeom>
+          <a:noFill/>
+          <a:ln/>
+        </p:spPr>
+        <p:txBody>
+          <a:bodyPr wrap="square" lIns="0" tIns="0" rIns="0" bIns="0" rtlCol="0" anchor="t"/>
+          <a:lstStyle/>
+          <a:p>
+            <a:pPr algn="ctr" indent="0" marL="0">
+              <a:buNone/>
+            </a:pPr>
+            <a:r>
+              <a:rPr lang="en-US" sz="850" dirty="0">
+                <a:solidFill>
+                  <a:srgbClr val="475569"/>
+                </a:solidFill>
+                <a:latin typeface="Calibri" pitchFamily="34" charset="0"/>
+                <a:ea typeface="Calibri" pitchFamily="34" charset="-122"/>
+                <a:cs typeface="Calibri" pitchFamily="34" charset="-120"/>
+              </a:rPr>
+              <a:t>verb-forming ending</a:t>
+            </a:r>
+            <a:endParaRPr lang="en-US" sz="850" dirty="0"/>
+          </a:p>
+        </p:txBody>
+      </p:sp>
+      <p:sp>
+        <p:nvSpPr>
+          <p:cNvPr id="25" name="Shape 23"/>
           <p:cNvSpPr/>
           <p:nvPr/>
         </p:nvSpPr>
@@ -10109,7 +10445,7 @@
       </p:sp>
       <p:sp>
         <p:nvSpPr>
-          <p:cNvPr id="23" name="Text 21"/>
+          <p:cNvPr id="26" name="Text 24"/>
           <p:cNvSpPr/>
           <p:nvPr/>
         </p:nvSpPr>
@@ -10148,7 +10484,7 @@
       </p:sp>
       <p:sp>
         <p:nvSpPr>
-          <p:cNvPr id="24" name="Shape 22"/>
+          <p:cNvPr id="27" name="Shape 25"/>
           <p:cNvSpPr/>
           <p:nvPr/>
         </p:nvSpPr>
@@ -10175,7 +10511,7 @@
       </p:sp>
       <p:sp>
         <p:nvSpPr>
-          <p:cNvPr id="25" name="Shape 23"/>
+          <p:cNvPr id="28" name="Shape 26"/>
           <p:cNvSpPr/>
           <p:nvPr/>
         </p:nvSpPr>
@@ -10202,7 +10538,7 @@
       </p:sp>
       <p:sp>
         <p:nvSpPr>
-          <p:cNvPr id="26" name="Text 24"/>
+          <p:cNvPr id="29" name="Text 27"/>
           <p:cNvSpPr/>
           <p:nvPr/>
         </p:nvSpPr>
@@ -10233,7 +10569,7 @@
                 <a:ea typeface="Trebuchet MS" pitchFamily="34" charset="-122"/>
                 <a:cs typeface="Trebuchet MS" pitchFamily="34" charset="-120"/>
               </a:rPr>
-              <a:t>clo</a:t>
+              <a:t>dis</a:t>
             </a:r>
             <a:endParaRPr lang="en-US" sz="1400" dirty="0"/>
           </a:p>
@@ -10241,7 +10577,7 @@
       </p:sp>
       <p:sp>
         <p:nvSpPr>
-          <p:cNvPr id="27" name="Text 25"/>
+          <p:cNvPr id="30" name="Text 28"/>
           <p:cNvSpPr/>
           <p:nvPr/>
         </p:nvSpPr>
@@ -10280,7 +10616,7 @@
       </p:sp>
       <p:sp>
         <p:nvSpPr>
-          <p:cNvPr id="28" name="Shape 26"/>
+          <p:cNvPr id="31" name="Shape 29"/>
           <p:cNvSpPr/>
           <p:nvPr/>
         </p:nvSpPr>
@@ -10307,7 +10643,7 @@
       </p:sp>
       <p:sp>
         <p:nvSpPr>
-          <p:cNvPr id="29" name="Text 27"/>
+          <p:cNvPr id="32" name="Text 30"/>
           <p:cNvSpPr/>
           <p:nvPr/>
         </p:nvSpPr>
@@ -10338,7 +10674,7 @@
                 <a:ea typeface="Trebuchet MS" pitchFamily="34" charset="-122"/>
                 <a:cs typeface="Trebuchet MS" pitchFamily="34" charset="-120"/>
               </a:rPr>
-              <a:t>sure</a:t>
+              <a:t>close</a:t>
             </a:r>
             <a:endParaRPr lang="en-US" sz="1400" dirty="0"/>
           </a:p>
@@ -10346,7 +10682,7 @@
       </p:sp>
       <p:sp>
         <p:nvSpPr>
-          <p:cNvPr id="30" name="Shape 28"/>
+          <p:cNvPr id="33" name="Shape 31"/>
           <p:cNvSpPr/>
           <p:nvPr/>
         </p:nvSpPr>
@@ -10373,7 +10709,7 @@
       </p:sp>
       <p:sp>
         <p:nvSpPr>
-          <p:cNvPr id="31" name="Text 29"/>
+          <p:cNvPr id="34" name="Text 32"/>
           <p:cNvSpPr/>
           <p:nvPr/>
         </p:nvSpPr>
@@ -10412,7 +10748,7 @@
       </p:sp>
       <p:sp>
         <p:nvSpPr>
-          <p:cNvPr id="32" name="Shape 30"/>
+          <p:cNvPr id="35" name="Shape 33"/>
           <p:cNvSpPr/>
           <p:nvPr/>
         </p:nvSpPr>
@@ -10439,13 +10775,13 @@
       </p:sp>
       <p:sp>
         <p:nvSpPr>
-          <p:cNvPr id="33" name="Shape 31"/>
-          <p:cNvSpPr/>
-          <p:nvPr/>
-        </p:nvSpPr>
-        <p:spPr>
-          <a:xfrm>
-            <a:off x="2670048" y="4169664"/>
+          <p:cNvPr id="36" name="Shape 34"/>
+          <p:cNvSpPr/>
+          <p:nvPr/>
+        </p:nvSpPr>
+        <p:spPr>
+          <a:xfrm>
+            <a:off x="2254649" y="4169664"/>
             <a:ext cx="685800" cy="384048"/>
           </a:xfrm>
           <a:prstGeom prst="rect">
@@ -10466,13 +10802,13 @@
       </p:sp>
       <p:sp>
         <p:nvSpPr>
-          <p:cNvPr id="34" name="Text 32"/>
-          <p:cNvSpPr/>
-          <p:nvPr/>
-        </p:nvSpPr>
-        <p:spPr>
-          <a:xfrm>
-            <a:off x="2670048" y="4169664"/>
+          <p:cNvPr id="37" name="Text 35"/>
+          <p:cNvSpPr/>
+          <p:nvPr/>
+        </p:nvSpPr>
+        <p:spPr>
+          <a:xfrm>
+            <a:off x="2254649" y="4169664"/>
             <a:ext cx="685800" cy="384048"/>
           </a:xfrm>
           <a:prstGeom prst="rect">
@@ -10497,7 +10833,7 @@
                 <a:ea typeface="Trebuchet MS" pitchFamily="34" charset="-122"/>
                 <a:cs typeface="Trebuchet MS" pitchFamily="34" charset="-120"/>
               </a:rPr>
-              <a:t>cl</a:t>
+              <a:t>d</a:t>
             </a:r>
             <a:endParaRPr lang="en-US" sz="900" dirty="0"/>
           </a:p>
@@ -10505,13 +10841,13 @@
       </p:sp>
       <p:sp>
         <p:nvSpPr>
-          <p:cNvPr id="35" name="Shape 33"/>
-          <p:cNvSpPr/>
-          <p:nvPr/>
-        </p:nvSpPr>
-        <p:spPr>
-          <a:xfrm>
-            <a:off x="4123944" y="4169664"/>
+          <p:cNvPr id="38" name="Shape 36"/>
+          <p:cNvSpPr/>
+          <p:nvPr/>
+        </p:nvSpPr>
+        <p:spPr>
+          <a:xfrm>
+            <a:off x="3293146" y="4169664"/>
             <a:ext cx="685800" cy="384048"/>
           </a:xfrm>
           <a:prstGeom prst="rect">
@@ -10532,13 +10868,13 @@
       </p:sp>
       <p:sp>
         <p:nvSpPr>
-          <p:cNvPr id="36" name="Text 34"/>
-          <p:cNvSpPr/>
-          <p:nvPr/>
-        </p:nvSpPr>
-        <p:spPr>
-          <a:xfrm>
-            <a:off x="4123944" y="4169664"/>
+          <p:cNvPr id="39" name="Text 37"/>
+          <p:cNvSpPr/>
+          <p:nvPr/>
+        </p:nvSpPr>
+        <p:spPr>
+          <a:xfrm>
+            <a:off x="3293146" y="4169664"/>
             <a:ext cx="685800" cy="384048"/>
           </a:xfrm>
           <a:prstGeom prst="rect">
@@ -10563,7 +10899,7 @@
                 <a:ea typeface="Trebuchet MS" pitchFamily="34" charset="-122"/>
                 <a:cs typeface="Trebuchet MS" pitchFamily="34" charset="-120"/>
               </a:rPr>
-              <a:t>o</a:t>
+              <a:t>i</a:t>
             </a:r>
             <a:endParaRPr lang="en-US" sz="900" dirty="0"/>
           </a:p>
@@ -10571,13 +10907,13 @@
       </p:sp>
       <p:sp>
         <p:nvSpPr>
-          <p:cNvPr id="37" name="Shape 35"/>
-          <p:cNvSpPr/>
-          <p:nvPr/>
-        </p:nvSpPr>
-        <p:spPr>
-          <a:xfrm>
-            <a:off x="5577840" y="4169664"/>
+          <p:cNvPr id="40" name="Shape 38"/>
+          <p:cNvSpPr/>
+          <p:nvPr/>
+        </p:nvSpPr>
+        <p:spPr>
+          <a:xfrm>
+            <a:off x="4331643" y="4169664"/>
             <a:ext cx="685800" cy="384048"/>
           </a:xfrm>
           <a:prstGeom prst="rect">
@@ -10598,13 +10934,13 @@
       </p:sp>
       <p:sp>
         <p:nvSpPr>
-          <p:cNvPr id="38" name="Text 36"/>
-          <p:cNvSpPr/>
-          <p:nvPr/>
-        </p:nvSpPr>
-        <p:spPr>
-          <a:xfrm>
-            <a:off x="5577840" y="4169664"/>
+          <p:cNvPr id="41" name="Text 39"/>
+          <p:cNvSpPr/>
+          <p:nvPr/>
+        </p:nvSpPr>
+        <p:spPr>
+          <a:xfrm>
+            <a:off x="4331643" y="4169664"/>
             <a:ext cx="685800" cy="384048"/>
           </a:xfrm>
           <a:prstGeom prst="rect">
@@ -10637,13 +10973,211 @@
       </p:sp>
       <p:sp>
         <p:nvSpPr>
-          <p:cNvPr id="39" name="Text 37"/>
-          <p:cNvSpPr/>
-          <p:nvPr/>
-        </p:nvSpPr>
-        <p:spPr>
-          <a:xfrm>
-            <a:off x="5577840" y="4572000"/>
+          <p:cNvPr id="42" name="Shape 40"/>
+          <p:cNvSpPr/>
+          <p:nvPr/>
+        </p:nvSpPr>
+        <p:spPr>
+          <a:xfrm>
+            <a:off x="5370141" y="4169664"/>
+            <a:ext cx="685800" cy="384048"/>
+          </a:xfrm>
+          <a:prstGeom prst="rect">
+            <a:avLst>
+              <a:gd name="adj" fmla="val 9524"/>
+            </a:avLst>
+          </a:prstGeom>
+          <a:solidFill>
+            <a:srgbClr val="FFFFFF"/>
+          </a:solidFill>
+          <a:ln w="12700">
+            <a:solidFill>
+              <a:srgbClr val="DB2777"/>
+            </a:solidFill>
+            <a:prstDash val="solid"/>
+          </a:ln>
+        </p:spPr>
+      </p:sp>
+      <p:sp>
+        <p:nvSpPr>
+          <p:cNvPr id="43" name="Text 41"/>
+          <p:cNvSpPr/>
+          <p:nvPr/>
+        </p:nvSpPr>
+        <p:spPr>
+          <a:xfrm>
+            <a:off x="5370141" y="4169664"/>
+            <a:ext cx="685800" cy="384048"/>
+          </a:xfrm>
+          <a:prstGeom prst="rect">
+            <a:avLst/>
+          </a:prstGeom>
+          <a:noFill/>
+          <a:ln/>
+        </p:spPr>
+        <p:txBody>
+          <a:bodyPr wrap="square" lIns="0" tIns="0" rIns="0" bIns="0" rtlCol="0" anchor="ctr"/>
+          <a:lstStyle/>
+          <a:p>
+            <a:pPr algn="ctr" indent="0" marL="0">
+              <a:buNone/>
+            </a:pPr>
+            <a:r>
+              <a:rPr lang="en-US" sz="900" b="1" dirty="0">
+                <a:solidFill>
+                  <a:srgbClr val="9D174D"/>
+                </a:solidFill>
+                <a:latin typeface="Trebuchet MS" pitchFamily="34" charset="0"/>
+                <a:ea typeface="Trebuchet MS" pitchFamily="34" charset="-122"/>
+                <a:cs typeface="Trebuchet MS" pitchFamily="34" charset="-120"/>
+              </a:rPr>
+              <a:t>cl</a:t>
+            </a:r>
+            <a:endParaRPr lang="en-US" sz="900" dirty="0"/>
+          </a:p>
+        </p:txBody>
+      </p:sp>
+      <p:sp>
+        <p:nvSpPr>
+          <p:cNvPr id="44" name="Shape 42"/>
+          <p:cNvSpPr/>
+          <p:nvPr/>
+        </p:nvSpPr>
+        <p:spPr>
+          <a:xfrm>
+            <a:off x="6408638" y="4169664"/>
+            <a:ext cx="685800" cy="384048"/>
+          </a:xfrm>
+          <a:prstGeom prst="rect">
+            <a:avLst>
+              <a:gd name="adj" fmla="val 9524"/>
+            </a:avLst>
+          </a:prstGeom>
+          <a:solidFill>
+            <a:srgbClr val="FFFFFF"/>
+          </a:solidFill>
+          <a:ln w="12700">
+            <a:solidFill>
+              <a:srgbClr val="DB2777"/>
+            </a:solidFill>
+            <a:prstDash val="solid"/>
+          </a:ln>
+        </p:spPr>
+      </p:sp>
+      <p:sp>
+        <p:nvSpPr>
+          <p:cNvPr id="45" name="Text 43"/>
+          <p:cNvSpPr/>
+          <p:nvPr/>
+        </p:nvSpPr>
+        <p:spPr>
+          <a:xfrm>
+            <a:off x="6408638" y="4169664"/>
+            <a:ext cx="685800" cy="384048"/>
+          </a:xfrm>
+          <a:prstGeom prst="rect">
+            <a:avLst/>
+          </a:prstGeom>
+          <a:noFill/>
+          <a:ln/>
+        </p:spPr>
+        <p:txBody>
+          <a:bodyPr wrap="square" lIns="0" tIns="0" rIns="0" bIns="0" rtlCol="0" anchor="ctr"/>
+          <a:lstStyle/>
+          <a:p>
+            <a:pPr algn="ctr" indent="0" marL="0">
+              <a:buNone/>
+            </a:pPr>
+            <a:r>
+              <a:rPr lang="en-US" sz="900" b="1" dirty="0">
+                <a:solidFill>
+                  <a:srgbClr val="9D174D"/>
+                </a:solidFill>
+                <a:latin typeface="Trebuchet MS" pitchFamily="34" charset="0"/>
+                <a:ea typeface="Trebuchet MS" pitchFamily="34" charset="-122"/>
+                <a:cs typeface="Trebuchet MS" pitchFamily="34" charset="-120"/>
+              </a:rPr>
+              <a:t>o</a:t>
+            </a:r>
+            <a:endParaRPr lang="en-US" sz="900" dirty="0"/>
+          </a:p>
+        </p:txBody>
+      </p:sp>
+      <p:sp>
+        <p:nvSpPr>
+          <p:cNvPr id="46" name="Shape 44"/>
+          <p:cNvSpPr/>
+          <p:nvPr/>
+        </p:nvSpPr>
+        <p:spPr>
+          <a:xfrm>
+            <a:off x="7447135" y="4169664"/>
+            <a:ext cx="685800" cy="384048"/>
+          </a:xfrm>
+          <a:prstGeom prst="rect">
+            <a:avLst>
+              <a:gd name="adj" fmla="val 9524"/>
+            </a:avLst>
+          </a:prstGeom>
+          <a:solidFill>
+            <a:srgbClr val="FFFFFF"/>
+          </a:solidFill>
+          <a:ln w="12700">
+            <a:solidFill>
+              <a:srgbClr val="DB2777"/>
+            </a:solidFill>
+            <a:prstDash val="solid"/>
+          </a:ln>
+        </p:spPr>
+      </p:sp>
+      <p:sp>
+        <p:nvSpPr>
+          <p:cNvPr id="47" name="Text 45"/>
+          <p:cNvSpPr/>
+          <p:nvPr/>
+        </p:nvSpPr>
+        <p:spPr>
+          <a:xfrm>
+            <a:off x="7447135" y="4169664"/>
+            <a:ext cx="685800" cy="384048"/>
+          </a:xfrm>
+          <a:prstGeom prst="rect">
+            <a:avLst/>
+          </a:prstGeom>
+          <a:noFill/>
+          <a:ln/>
+        </p:spPr>
+        <p:txBody>
+          <a:bodyPr wrap="square" lIns="0" tIns="0" rIns="0" bIns="0" rtlCol="0" anchor="ctr"/>
+          <a:lstStyle/>
+          <a:p>
+            <a:pPr algn="ctr" indent="0" marL="0">
+              <a:buNone/>
+            </a:pPr>
+            <a:r>
+              <a:rPr lang="en-US" sz="900" b="1" dirty="0">
+                <a:solidFill>
+                  <a:srgbClr val="9D174D"/>
+                </a:solidFill>
+                <a:latin typeface="Trebuchet MS" pitchFamily="34" charset="0"/>
+                <a:ea typeface="Trebuchet MS" pitchFamily="34" charset="-122"/>
+                <a:cs typeface="Trebuchet MS" pitchFamily="34" charset="-120"/>
+              </a:rPr>
+              <a:t>se</a:t>
+            </a:r>
+            <a:endParaRPr lang="en-US" sz="900" dirty="0"/>
+          </a:p>
+        </p:txBody>
+      </p:sp>
+      <p:sp>
+        <p:nvSpPr>
+          <p:cNvPr id="48" name="Text 46"/>
+          <p:cNvSpPr/>
+          <p:nvPr/>
+        </p:nvSpPr>
+        <p:spPr>
+          <a:xfrm>
+            <a:off x="7447135" y="4572000"/>
             <a:ext cx="685800" cy="219456"/>
           </a:xfrm>
           <a:prstGeom prst="rect">
@@ -10668,75 +11202,9 @@
                 <a:ea typeface="Calibri" pitchFamily="34" charset="-122"/>
                 <a:cs typeface="Calibri" pitchFamily="34" charset="-120"/>
               </a:rPr>
-              <a:t>/zh/</a:t>
+              <a:t>/z/</a:t>
             </a:r>
             <a:endParaRPr lang="en-US" sz="750" dirty="0"/>
-          </a:p>
-        </p:txBody>
-      </p:sp>
-      <p:sp>
-        <p:nvSpPr>
-          <p:cNvPr id="40" name="Shape 38"/>
-          <p:cNvSpPr/>
-          <p:nvPr/>
-        </p:nvSpPr>
-        <p:spPr>
-          <a:xfrm>
-            <a:off x="7031736" y="4169664"/>
-            <a:ext cx="685800" cy="384048"/>
-          </a:xfrm>
-          <a:prstGeom prst="rect">
-            <a:avLst>
-              <a:gd name="adj" fmla="val 9524"/>
-            </a:avLst>
-          </a:prstGeom>
-          <a:solidFill>
-            <a:srgbClr val="FFFFFF"/>
-          </a:solidFill>
-          <a:ln w="12700">
-            <a:solidFill>
-              <a:srgbClr val="DB2777"/>
-            </a:solidFill>
-            <a:prstDash val="solid"/>
-          </a:ln>
-        </p:spPr>
-      </p:sp>
-      <p:sp>
-        <p:nvSpPr>
-          <p:cNvPr id="41" name="Text 39"/>
-          <p:cNvSpPr/>
-          <p:nvPr/>
-        </p:nvSpPr>
-        <p:spPr>
-          <a:xfrm>
-            <a:off x="7031736" y="4169664"/>
-            <a:ext cx="685800" cy="384048"/>
-          </a:xfrm>
-          <a:prstGeom prst="rect">
-            <a:avLst/>
-          </a:prstGeom>
-          <a:noFill/>
-          <a:ln/>
-        </p:spPr>
-        <p:txBody>
-          <a:bodyPr wrap="square" lIns="0" tIns="0" rIns="0" bIns="0" rtlCol="0" anchor="ctr"/>
-          <a:lstStyle/>
-          <a:p>
-            <a:pPr algn="ctr" indent="0" marL="0">
-              <a:buNone/>
-            </a:pPr>
-            <a:r>
-              <a:rPr lang="en-US" sz="900" b="1" dirty="0">
-                <a:solidFill>
-                  <a:srgbClr val="9D174D"/>
-                </a:solidFill>
-                <a:latin typeface="Trebuchet MS" pitchFamily="34" charset="0"/>
-                <a:ea typeface="Trebuchet MS" pitchFamily="34" charset="-122"/>
-                <a:cs typeface="Trebuchet MS" pitchFamily="34" charset="-120"/>
-              </a:rPr>
-              <a:t>ure</a:t>
-            </a:r>
-            <a:endParaRPr lang="en-US" sz="900" dirty="0"/>
           </a:p>
         </p:txBody>
       </p:sp>
@@ -11165,7 +11633,7 @@
                 <a:ea typeface="Trebuchet MS" pitchFamily="34" charset="-122"/>
                 <a:cs typeface="Trebuchet MS" pitchFamily="34" charset="-120"/>
               </a:rPr>
-              <a:t>enclosure</a:t>
+              <a:t>closure</a:t>
             </a:r>
             <a:endParaRPr lang="en-US" sz="2800" dirty="0"/>
           </a:p>
@@ -11992,7 +12460,7 @@
                 <a:ea typeface="Trebuchet MS" pitchFamily="34" charset="-122"/>
                 <a:cs typeface="Trebuchet MS" pitchFamily="34" charset="-120"/>
               </a:rPr>
-              <a:t>enclosure</a:t>
+              <a:t>closure</a:t>
             </a:r>
             <a:endParaRPr lang="en-US" sz="2800" dirty="0"/>
           </a:p>
@@ -12072,7 +12540,7 @@
         </p:nvSpPr>
         <p:spPr>
           <a:xfrm>
-            <a:off x="2221992" y="2258568"/>
+            <a:off x="2938272" y="2258568"/>
             <a:ext cx="1828800" cy="292608"/>
           </a:xfrm>
           <a:prstGeom prst="rect">
@@ -12081,11 +12549,11 @@
             </a:avLst>
           </a:prstGeom>
           <a:solidFill>
-            <a:srgbClr val="DDD6FE"/>
+            <a:srgbClr val="CCFBF1"/>
           </a:solidFill>
           <a:ln w="19050">
             <a:solidFill>
-              <a:srgbClr val="7C3AED"/>
+              <a:srgbClr val="0D9488"/>
             </a:solidFill>
             <a:prstDash val="solid"/>
           </a:ln>
@@ -12106,7 +12574,7 @@
         </p:nvSpPr>
         <p:spPr>
           <a:xfrm>
-            <a:off x="2221992" y="2258568"/>
+            <a:off x="2938272" y="2258568"/>
             <a:ext cx="1828800" cy="292608"/>
           </a:xfrm>
           <a:prstGeom prst="rect">
@@ -12125,13 +12593,13 @@
             <a:r>
               <a:rPr lang="en-US" sz="1300" b="1" dirty="0">
                 <a:solidFill>
-                  <a:srgbClr val="4C1D95"/>
+                  <a:srgbClr val="0F766E"/>
                 </a:solidFill>
                 <a:latin typeface="Trebuchet MS" pitchFamily="34" charset="0"/>
                 <a:ea typeface="Trebuchet MS" pitchFamily="34" charset="-122"/>
                 <a:cs typeface="Trebuchet MS" pitchFamily="34" charset="-120"/>
               </a:rPr>
-              <a:t>en</a:t>
+              <a:t>clos</a:t>
             </a:r>
             <a:endParaRPr lang="en-US" sz="1300" dirty="0"/>
           </a:p>
@@ -12145,7 +12613,7 @@
         </p:nvSpPr>
         <p:spPr>
           <a:xfrm>
-            <a:off x="2221992" y="2569464"/>
+            <a:off x="2938272" y="2569464"/>
             <a:ext cx="1828800" cy="201168"/>
           </a:xfrm>
           <a:prstGeom prst="rect">
@@ -12170,7 +12638,7 @@
                 <a:ea typeface="Calibri" pitchFamily="34" charset="-122"/>
                 <a:cs typeface="Calibri" pitchFamily="34" charset="-120"/>
               </a:rPr>
-              <a:t>put into or surround</a:t>
+              <a:t>shut, close</a:t>
             </a:r>
             <a:endParaRPr lang="en-US" sz="850" dirty="0"/>
           </a:p>
@@ -12184,7 +12652,7 @@
         </p:nvSpPr>
         <p:spPr>
           <a:xfrm>
-            <a:off x="4370832" y="2258568"/>
+            <a:off x="5803392" y="2258568"/>
             <a:ext cx="1828800" cy="292608"/>
           </a:xfrm>
           <a:prstGeom prst="rect">
@@ -12193,11 +12661,11 @@
             </a:avLst>
           </a:prstGeom>
           <a:solidFill>
-            <a:srgbClr val="CCFBF1"/>
+            <a:srgbClr val="FCE7F3"/>
           </a:solidFill>
           <a:ln w="19050">
             <a:solidFill>
-              <a:srgbClr val="0D9488"/>
+              <a:srgbClr val="DB2777"/>
             </a:solidFill>
             <a:prstDash val="solid"/>
           </a:ln>
@@ -12218,7 +12686,7 @@
         </p:nvSpPr>
         <p:spPr>
           <a:xfrm>
-            <a:off x="4370832" y="2258568"/>
+            <a:off x="5803392" y="2258568"/>
             <a:ext cx="1828800" cy="292608"/>
           </a:xfrm>
           <a:prstGeom prst="rect">
@@ -12237,13 +12705,13 @@
             <a:r>
               <a:rPr lang="en-US" sz="1300" b="1" dirty="0">
                 <a:solidFill>
-                  <a:srgbClr val="0F766E"/>
+                  <a:srgbClr val="9D174D"/>
                 </a:solidFill>
                 <a:latin typeface="Trebuchet MS" pitchFamily="34" charset="0"/>
                 <a:ea typeface="Trebuchet MS" pitchFamily="34" charset="-122"/>
                 <a:cs typeface="Trebuchet MS" pitchFamily="34" charset="-120"/>
               </a:rPr>
-              <a:t>clos</a:t>
+              <a:t>ure</a:t>
             </a:r>
             <a:endParaRPr lang="en-US" sz="1300" dirty="0"/>
           </a:p>
@@ -12257,7 +12725,7 @@
         </p:nvSpPr>
         <p:spPr>
           <a:xfrm>
-            <a:off x="4370832" y="2569464"/>
+            <a:off x="5803392" y="2569464"/>
             <a:ext cx="1828800" cy="201168"/>
           </a:xfrm>
           <a:prstGeom prst="rect">
@@ -12282,7 +12750,7 @@
                 <a:ea typeface="Calibri" pitchFamily="34" charset="-122"/>
                 <a:cs typeface="Calibri" pitchFamily="34" charset="-120"/>
               </a:rPr>
-              <a:t>shut, close</a:t>
+              <a:t>act or result of</a:t>
             </a:r>
             <a:endParaRPr lang="en-US" sz="850" dirty="0"/>
           </a:p>
@@ -12290,48 +12758,80 @@
       </p:sp>
       <p:sp>
         <p:nvSpPr>
-          <p:cNvPr id="22" name="Shape 20"/>
-          <p:cNvSpPr/>
-          <p:nvPr/>
-        </p:nvSpPr>
-        <p:spPr>
-          <a:xfrm>
-            <a:off x="6519672" y="2258568"/>
-            <a:ext cx="1828800" cy="292608"/>
+          <p:cNvPr id="22" name="Text 20"/>
+          <p:cNvSpPr/>
+          <p:nvPr/>
+        </p:nvSpPr>
+        <p:spPr>
+          <a:xfrm>
+            <a:off x="5803392" y="2752344"/>
+            <a:ext cx="1828800" cy="182880"/>
+          </a:xfrm>
+          <a:prstGeom prst="rect">
+            <a:avLst/>
+          </a:prstGeom>
+          <a:noFill/>
+          <a:ln/>
+        </p:spPr>
+        <p:txBody>
+          <a:bodyPr wrap="square" lIns="0" tIns="0" rIns="0" bIns="0" rtlCol="0" anchor="t"/>
+          <a:lstStyle/>
+          <a:p>
+            <a:pPr algn="ctr" indent="0" marL="0">
+              <a:buNone/>
+            </a:pPr>
+            <a:r>
+              <a:rPr lang="en-US" sz="700" i="1" dirty="0">
+                <a:solidFill>
+                  <a:srgbClr val="94A3B8"/>
+                </a:solidFill>
+                <a:latin typeface="Calibri" pitchFamily="34" charset="0"/>
+                <a:ea typeface="Calibri" pitchFamily="34" charset="-122"/>
+                <a:cs typeface="Calibri" pitchFamily="34" charset="-120"/>
+              </a:rPr>
+              <a:t>'e' dropped before vowel suffix</a:t>
+            </a:r>
+            <a:endParaRPr lang="en-US" sz="700" dirty="0"/>
+          </a:p>
+        </p:txBody>
+      </p:sp>
+      <p:sp>
+        <p:nvSpPr>
+          <p:cNvPr id="23" name="Shape 21"/>
+          <p:cNvSpPr/>
+          <p:nvPr/>
+        </p:nvSpPr>
+        <p:spPr>
+          <a:xfrm>
+            <a:off x="365760" y="3273552"/>
+            <a:ext cx="1371600" cy="658368"/>
           </a:xfrm>
           <a:prstGeom prst="rect">
             <a:avLst>
-              <a:gd name="adj" fmla="val 25000"/>
+              <a:gd name="adj" fmla="val 8333"/>
             </a:avLst>
           </a:prstGeom>
           <a:solidFill>
-            <a:srgbClr val="FCE7F3"/>
-          </a:solidFill>
-          <a:ln w="19050">
-            <a:solidFill>
-              <a:srgbClr val="DB2777"/>
-            </a:solidFill>
-            <a:prstDash val="solid"/>
-          </a:ln>
-          <a:effectLst>
-            <a:outerShdw sx="100000" sy="100000" kx="0" ky="0" algn="bl" rotWithShape="0" blurRad="101600" dist="38100" dir="8100000">
-              <a:srgbClr val="000000">
-                <a:alpha val="12000"/>
-              </a:srgbClr>
-            </a:outerShdw>
-          </a:effectLst>
-        </p:spPr>
-      </p:sp>
-      <p:sp>
-        <p:nvSpPr>
-          <p:cNvPr id="23" name="Text 21"/>
-          <p:cNvSpPr/>
-          <p:nvPr/>
-        </p:nvSpPr>
-        <p:spPr>
-          <a:xfrm>
-            <a:off x="6519672" y="2258568"/>
-            <a:ext cx="1828800" cy="292608"/>
+            <a:srgbClr val="E2E8F0"/>
+          </a:solidFill>
+          <a:ln w="12700">
+            <a:solidFill>
+              <a:srgbClr val="E2E8F0"/>
+            </a:solidFill>
+            <a:prstDash val="solid"/>
+          </a:ln>
+        </p:spPr>
+      </p:sp>
+      <p:sp>
+        <p:nvSpPr>
+          <p:cNvPr id="24" name="Text 22"/>
+          <p:cNvSpPr/>
+          <p:nvPr/>
+        </p:nvSpPr>
+        <p:spPr>
+          <a:xfrm>
+            <a:off x="365760" y="3273552"/>
+            <a:ext cx="1371600" cy="658368"/>
           </a:xfrm>
           <a:prstGeom prst="rect">
             <a:avLst/>
@@ -12347,73 +12847,100 @@
               <a:buNone/>
             </a:pPr>
             <a:r>
-              <a:rPr lang="en-US" sz="1300" b="1" dirty="0">
-                <a:solidFill>
-                  <a:srgbClr val="9D174D"/>
+              <a:rPr lang="en-US" sz="1100" b="1" dirty="0">
+                <a:solidFill>
+                  <a:srgbClr val="475569"/>
                 </a:solidFill>
                 <a:latin typeface="Trebuchet MS" pitchFamily="34" charset="0"/>
                 <a:ea typeface="Trebuchet MS" pitchFamily="34" charset="-122"/>
                 <a:cs typeface="Trebuchet MS" pitchFamily="34" charset="-120"/>
               </a:rPr>
-              <a:t>ure</a:t>
-            </a:r>
-            <a:endParaRPr lang="en-US" sz="1300" dirty="0"/>
-          </a:p>
-        </p:txBody>
-      </p:sp>
-      <p:sp>
-        <p:nvSpPr>
-          <p:cNvPr id="24" name="Text 22"/>
-          <p:cNvSpPr/>
-          <p:nvPr/>
-        </p:nvSpPr>
-        <p:spPr>
-          <a:xfrm>
-            <a:off x="6519672" y="2569464"/>
-            <a:ext cx="1828800" cy="201168"/>
-          </a:xfrm>
-          <a:prstGeom prst="rect">
-            <a:avLst/>
-          </a:prstGeom>
-          <a:noFill/>
-          <a:ln/>
-        </p:spPr>
-        <p:txBody>
-          <a:bodyPr wrap="square" lIns="0" tIns="0" rIns="0" bIns="0" rtlCol="0" anchor="t"/>
-          <a:lstStyle/>
-          <a:p>
-            <a:pPr algn="ctr" indent="0" marL="0">
-              <a:buNone/>
-            </a:pPr>
-            <a:r>
-              <a:rPr lang="en-US" sz="850" dirty="0">
-                <a:solidFill>
-                  <a:srgbClr val="475569"/>
+              <a:t>Syllables</a:t>
+            </a:r>
+            <a:endParaRPr lang="en-US" sz="1100" dirty="0"/>
+          </a:p>
+        </p:txBody>
+      </p:sp>
+      <p:sp>
+        <p:nvSpPr>
+          <p:cNvPr id="25" name="Shape 23"/>
+          <p:cNvSpPr/>
+          <p:nvPr/>
+        </p:nvSpPr>
+        <p:spPr>
+          <a:xfrm>
+            <a:off x="1874520" y="3273552"/>
+            <a:ext cx="6903720" cy="658368"/>
+          </a:xfrm>
+          <a:prstGeom prst="rect">
+            <a:avLst>
+              <a:gd name="adj" fmla="val 8333"/>
+            </a:avLst>
+          </a:prstGeom>
+          <a:solidFill>
+            <a:srgbClr val="F8FAFC"/>
+          </a:solidFill>
+          <a:ln w="12700">
+            <a:solidFill>
+              <a:srgbClr val="E2E8F0"/>
+            </a:solidFill>
+            <a:prstDash val="dash"/>
+          </a:ln>
+        </p:spPr>
+      </p:sp>
+      <p:sp>
+        <p:nvSpPr>
+          <p:cNvPr id="26" name="Text 24"/>
+          <p:cNvSpPr/>
+          <p:nvPr/>
+        </p:nvSpPr>
+        <p:spPr>
+          <a:xfrm>
+            <a:off x="1874520" y="3273552"/>
+            <a:ext cx="6903720" cy="658368"/>
+          </a:xfrm>
+          <a:prstGeom prst="rect">
+            <a:avLst/>
+          </a:prstGeom>
+          <a:noFill/>
+          <a:ln/>
+        </p:spPr>
+        <p:txBody>
+          <a:bodyPr wrap="square" rtlCol="0" anchor="ctr"/>
+          <a:lstStyle/>
+          <a:p>
+            <a:pPr algn="ctr" indent="0" marL="0">
+              <a:buNone/>
+            </a:pPr>
+            <a:r>
+              <a:rPr lang="en-US" sz="1100" i="1" dirty="0">
+                <a:solidFill>
+                  <a:srgbClr val="CBD5E1"/>
                 </a:solidFill>
                 <a:latin typeface="Calibri" pitchFamily="34" charset="0"/>
                 <a:ea typeface="Calibri" pitchFamily="34" charset="-122"/>
                 <a:cs typeface="Calibri" pitchFamily="34" charset="-120"/>
               </a:rPr>
-              <a:t>result or process of</a:t>
-            </a:r>
-            <a:endParaRPr lang="en-US" sz="850" dirty="0"/>
-          </a:p>
-        </p:txBody>
-      </p:sp>
-      <p:sp>
-        <p:nvSpPr>
-          <p:cNvPr id="25" name="Shape 23"/>
-          <p:cNvSpPr/>
-          <p:nvPr/>
-        </p:nvSpPr>
-        <p:spPr>
-          <a:xfrm>
-            <a:off x="365760" y="3273552"/>
-            <a:ext cx="1371600" cy="658368"/>
+              <a:t>Write here...</a:t>
+            </a:r>
+            <a:endParaRPr lang="en-US" sz="1100" dirty="0"/>
+          </a:p>
+        </p:txBody>
+      </p:sp>
+      <p:sp>
+        <p:nvSpPr>
+          <p:cNvPr id="27" name="Shape 25"/>
+          <p:cNvSpPr/>
+          <p:nvPr/>
+        </p:nvSpPr>
+        <p:spPr>
+          <a:xfrm>
+            <a:off x="365760" y="4096512"/>
+            <a:ext cx="1371600" cy="804672"/>
           </a:xfrm>
           <a:prstGeom prst="rect">
             <a:avLst>
-              <a:gd name="adj" fmla="val 8333"/>
+              <a:gd name="adj" fmla="val 6818"/>
             </a:avLst>
           </a:prstGeom>
           <a:solidFill>
@@ -12429,14 +12956,14 @@
       </p:sp>
       <p:sp>
         <p:nvSpPr>
-          <p:cNvPr id="26" name="Text 24"/>
-          <p:cNvSpPr/>
-          <p:nvPr/>
-        </p:nvSpPr>
-        <p:spPr>
-          <a:xfrm>
-            <a:off x="365760" y="3273552"/>
-            <a:ext cx="1371600" cy="658368"/>
+          <p:cNvPr id="28" name="Text 26"/>
+          <p:cNvSpPr/>
+          <p:nvPr/>
+        </p:nvSpPr>
+        <p:spPr>
+          <a:xfrm>
+            <a:off x="365760" y="4096512"/>
+            <a:ext cx="1371600" cy="804672"/>
           </a:xfrm>
           <a:prstGeom prst="rect">
             <a:avLst/>
@@ -12460,7 +12987,7 @@
                 <a:ea typeface="Trebuchet MS" pitchFamily="34" charset="-122"/>
                 <a:cs typeface="Trebuchet MS" pitchFamily="34" charset="-120"/>
               </a:rPr>
-              <a:t>Syllables</a:t>
+              <a:t>Phonemes</a:t>
             </a:r>
             <a:endParaRPr lang="en-US" sz="1100" dirty="0"/>
           </a:p>
@@ -12468,80 +12995,14 @@
       </p:sp>
       <p:sp>
         <p:nvSpPr>
-          <p:cNvPr id="27" name="Shape 25"/>
-          <p:cNvSpPr/>
-          <p:nvPr/>
-        </p:nvSpPr>
-        <p:spPr>
-          <a:xfrm>
-            <a:off x="1874520" y="3273552"/>
-            <a:ext cx="6903720" cy="658368"/>
-          </a:xfrm>
-          <a:prstGeom prst="rect">
-            <a:avLst>
-              <a:gd name="adj" fmla="val 8333"/>
-            </a:avLst>
-          </a:prstGeom>
-          <a:solidFill>
-            <a:srgbClr val="F8FAFC"/>
-          </a:solidFill>
-          <a:ln w="12700">
-            <a:solidFill>
-              <a:srgbClr val="E2E8F0"/>
-            </a:solidFill>
-            <a:prstDash val="dash"/>
-          </a:ln>
-        </p:spPr>
-      </p:sp>
-      <p:sp>
-        <p:nvSpPr>
-          <p:cNvPr id="28" name="Text 26"/>
-          <p:cNvSpPr/>
-          <p:nvPr/>
-        </p:nvSpPr>
-        <p:spPr>
-          <a:xfrm>
-            <a:off x="1874520" y="3273552"/>
-            <a:ext cx="6903720" cy="658368"/>
-          </a:xfrm>
-          <a:prstGeom prst="rect">
-            <a:avLst/>
-          </a:prstGeom>
-          <a:noFill/>
-          <a:ln/>
-        </p:spPr>
-        <p:txBody>
-          <a:bodyPr wrap="square" rtlCol="0" anchor="ctr"/>
-          <a:lstStyle/>
-          <a:p>
-            <a:pPr algn="ctr" indent="0" marL="0">
-              <a:buNone/>
-            </a:pPr>
-            <a:r>
-              <a:rPr lang="en-US" sz="1100" i="1" dirty="0">
-                <a:solidFill>
-                  <a:srgbClr val="CBD5E1"/>
-                </a:solidFill>
-                <a:latin typeface="Calibri" pitchFamily="34" charset="0"/>
-                <a:ea typeface="Calibri" pitchFamily="34" charset="-122"/>
-                <a:cs typeface="Calibri" pitchFamily="34" charset="-120"/>
-              </a:rPr>
-              <a:t>Write here...</a:t>
-            </a:r>
-            <a:endParaRPr lang="en-US" sz="1100" dirty="0"/>
-          </a:p>
-        </p:txBody>
-      </p:sp>
-      <p:sp>
-        <p:nvSpPr>
           <p:cNvPr id="29" name="Shape 27"/>
           <p:cNvSpPr/>
           <p:nvPr/>
         </p:nvSpPr>
         <p:spPr>
           <a:xfrm>
-            <a:off x="365760" y="4096512"/>
-            <a:ext cx="1371600" cy="804672"/>
+            <a:off x="1874520" y="4096512"/>
+            <a:ext cx="6903720" cy="804672"/>
           </a:xfrm>
           <a:prstGeom prst="rect">
             <a:avLst>
@@ -12549,85 +13010,19 @@
             </a:avLst>
           </a:prstGeom>
           <a:solidFill>
-            <a:srgbClr val="E2E8F0"/>
+            <a:srgbClr val="F8FAFC"/>
           </a:solidFill>
           <a:ln w="12700">
             <a:solidFill>
               <a:srgbClr val="E2E8F0"/>
             </a:solidFill>
-            <a:prstDash val="solid"/>
+            <a:prstDash val="dash"/>
           </a:ln>
         </p:spPr>
       </p:sp>
       <p:sp>
         <p:nvSpPr>
           <p:cNvPr id="30" name="Text 28"/>
-          <p:cNvSpPr/>
-          <p:nvPr/>
-        </p:nvSpPr>
-        <p:spPr>
-          <a:xfrm>
-            <a:off x="365760" y="4096512"/>
-            <a:ext cx="1371600" cy="804672"/>
-          </a:xfrm>
-          <a:prstGeom prst="rect">
-            <a:avLst/>
-          </a:prstGeom>
-          <a:noFill/>
-          <a:ln/>
-        </p:spPr>
-        <p:txBody>
-          <a:bodyPr wrap="square" lIns="0" tIns="0" rIns="0" bIns="0" rtlCol="0" anchor="ctr"/>
-          <a:lstStyle/>
-          <a:p>
-            <a:pPr algn="ctr" indent="0" marL="0">
-              <a:buNone/>
-            </a:pPr>
-            <a:r>
-              <a:rPr lang="en-US" sz="1100" b="1" dirty="0">
-                <a:solidFill>
-                  <a:srgbClr val="475569"/>
-                </a:solidFill>
-                <a:latin typeface="Trebuchet MS" pitchFamily="34" charset="0"/>
-                <a:ea typeface="Trebuchet MS" pitchFamily="34" charset="-122"/>
-                <a:cs typeface="Trebuchet MS" pitchFamily="34" charset="-120"/>
-              </a:rPr>
-              <a:t>Phonemes</a:t>
-            </a:r>
-            <a:endParaRPr lang="en-US" sz="1100" dirty="0"/>
-          </a:p>
-        </p:txBody>
-      </p:sp>
-      <p:sp>
-        <p:nvSpPr>
-          <p:cNvPr id="31" name="Shape 29"/>
-          <p:cNvSpPr/>
-          <p:nvPr/>
-        </p:nvSpPr>
-        <p:spPr>
-          <a:xfrm>
-            <a:off x="1874520" y="4096512"/>
-            <a:ext cx="6903720" cy="804672"/>
-          </a:xfrm>
-          <a:prstGeom prst="rect">
-            <a:avLst>
-              <a:gd name="adj" fmla="val 6818"/>
-            </a:avLst>
-          </a:prstGeom>
-          <a:solidFill>
-            <a:srgbClr val="F8FAFC"/>
-          </a:solidFill>
-          <a:ln w="12700">
-            <a:solidFill>
-              <a:srgbClr val="E2E8F0"/>
-            </a:solidFill>
-            <a:prstDash val="dash"/>
-          </a:ln>
-        </p:spPr>
-      </p:sp>
-      <p:sp>
-        <p:nvSpPr>
-          <p:cNvPr id="32" name="Text 30"/>
           <p:cNvSpPr/>
           <p:nvPr/>
         </p:nvSpPr>
@@ -13089,7 +13484,7 @@
                 <a:ea typeface="Trebuchet MS" pitchFamily="34" charset="-122"/>
                 <a:cs typeface="Trebuchet MS" pitchFamily="34" charset="-120"/>
               </a:rPr>
-              <a:t>enclosure</a:t>
+              <a:t>closure</a:t>
             </a:r>
             <a:endParaRPr lang="en-US" sz="2800" dirty="0"/>
           </a:p>
@@ -13169,7 +13564,7 @@
         </p:nvSpPr>
         <p:spPr>
           <a:xfrm>
-            <a:off x="2221992" y="2258568"/>
+            <a:off x="2938272" y="2258568"/>
             <a:ext cx="1828800" cy="292608"/>
           </a:xfrm>
           <a:prstGeom prst="rect">
@@ -13178,11 +13573,11 @@
             </a:avLst>
           </a:prstGeom>
           <a:solidFill>
-            <a:srgbClr val="DDD6FE"/>
+            <a:srgbClr val="CCFBF1"/>
           </a:solidFill>
           <a:ln w="19050">
             <a:solidFill>
-              <a:srgbClr val="7C3AED"/>
+              <a:srgbClr val="0D9488"/>
             </a:solidFill>
             <a:prstDash val="solid"/>
           </a:ln>
@@ -13203,7 +13598,7 @@
         </p:nvSpPr>
         <p:spPr>
           <a:xfrm>
-            <a:off x="2221992" y="2258568"/>
+            <a:off x="2938272" y="2258568"/>
             <a:ext cx="1828800" cy="292608"/>
           </a:xfrm>
           <a:prstGeom prst="rect">
@@ -13222,13 +13617,13 @@
             <a:r>
               <a:rPr lang="en-US" sz="1300" b="1" dirty="0">
                 <a:solidFill>
-                  <a:srgbClr val="4C1D95"/>
+                  <a:srgbClr val="0F766E"/>
                 </a:solidFill>
                 <a:latin typeface="Trebuchet MS" pitchFamily="34" charset="0"/>
                 <a:ea typeface="Trebuchet MS" pitchFamily="34" charset="-122"/>
                 <a:cs typeface="Trebuchet MS" pitchFamily="34" charset="-120"/>
               </a:rPr>
-              <a:t>en</a:t>
+              <a:t>clos</a:t>
             </a:r>
             <a:endParaRPr lang="en-US" sz="1300" dirty="0"/>
           </a:p>
@@ -13242,7 +13637,7 @@
         </p:nvSpPr>
         <p:spPr>
           <a:xfrm>
-            <a:off x="2221992" y="2569464"/>
+            <a:off x="2938272" y="2569464"/>
             <a:ext cx="1828800" cy="201168"/>
           </a:xfrm>
           <a:prstGeom prst="rect">
@@ -13267,7 +13662,7 @@
                 <a:ea typeface="Calibri" pitchFamily="34" charset="-122"/>
                 <a:cs typeface="Calibri" pitchFamily="34" charset="-120"/>
               </a:rPr>
-              <a:t>put into or surround</a:t>
+              <a:t>shut, close</a:t>
             </a:r>
             <a:endParaRPr lang="en-US" sz="850" dirty="0"/>
           </a:p>
@@ -13281,7 +13676,7 @@
         </p:nvSpPr>
         <p:spPr>
           <a:xfrm>
-            <a:off x="4370832" y="2258568"/>
+            <a:off x="5803392" y="2258568"/>
             <a:ext cx="1828800" cy="292608"/>
           </a:xfrm>
           <a:prstGeom prst="rect">
@@ -13290,11 +13685,11 @@
             </a:avLst>
           </a:prstGeom>
           <a:solidFill>
-            <a:srgbClr val="CCFBF1"/>
+            <a:srgbClr val="FCE7F3"/>
           </a:solidFill>
           <a:ln w="19050">
             <a:solidFill>
-              <a:srgbClr val="0D9488"/>
+              <a:srgbClr val="DB2777"/>
             </a:solidFill>
             <a:prstDash val="solid"/>
           </a:ln>
@@ -13315,7 +13710,7 @@
         </p:nvSpPr>
         <p:spPr>
           <a:xfrm>
-            <a:off x="4370832" y="2258568"/>
+            <a:off x="5803392" y="2258568"/>
             <a:ext cx="1828800" cy="292608"/>
           </a:xfrm>
           <a:prstGeom prst="rect">
@@ -13334,13 +13729,13 @@
             <a:r>
               <a:rPr lang="en-US" sz="1300" b="1" dirty="0">
                 <a:solidFill>
-                  <a:srgbClr val="0F766E"/>
+                  <a:srgbClr val="9D174D"/>
                 </a:solidFill>
                 <a:latin typeface="Trebuchet MS" pitchFamily="34" charset="0"/>
                 <a:ea typeface="Trebuchet MS" pitchFamily="34" charset="-122"/>
                 <a:cs typeface="Trebuchet MS" pitchFamily="34" charset="-120"/>
               </a:rPr>
-              <a:t>clos</a:t>
+              <a:t>ure</a:t>
             </a:r>
             <a:endParaRPr lang="en-US" sz="1300" dirty="0"/>
           </a:p>
@@ -13354,7 +13749,7 @@
         </p:nvSpPr>
         <p:spPr>
           <a:xfrm>
-            <a:off x="4370832" y="2569464"/>
+            <a:off x="5803392" y="2569464"/>
             <a:ext cx="1828800" cy="201168"/>
           </a:xfrm>
           <a:prstGeom prst="rect">
@@ -13379,7 +13774,7 @@
                 <a:ea typeface="Calibri" pitchFamily="34" charset="-122"/>
                 <a:cs typeface="Calibri" pitchFamily="34" charset="-120"/>
               </a:rPr>
-              <a:t>shut, close</a:t>
+              <a:t>act or result of</a:t>
             </a:r>
             <a:endParaRPr lang="en-US" sz="850" dirty="0"/>
           </a:p>
@@ -13387,48 +13782,80 @@
       </p:sp>
       <p:sp>
         <p:nvSpPr>
-          <p:cNvPr id="22" name="Shape 20"/>
-          <p:cNvSpPr/>
-          <p:nvPr/>
-        </p:nvSpPr>
-        <p:spPr>
-          <a:xfrm>
-            <a:off x="6519672" y="2258568"/>
-            <a:ext cx="1828800" cy="292608"/>
+          <p:cNvPr id="22" name="Text 20"/>
+          <p:cNvSpPr/>
+          <p:nvPr/>
+        </p:nvSpPr>
+        <p:spPr>
+          <a:xfrm>
+            <a:off x="5803392" y="2752344"/>
+            <a:ext cx="1828800" cy="182880"/>
+          </a:xfrm>
+          <a:prstGeom prst="rect">
+            <a:avLst/>
+          </a:prstGeom>
+          <a:noFill/>
+          <a:ln/>
+        </p:spPr>
+        <p:txBody>
+          <a:bodyPr wrap="square" lIns="0" tIns="0" rIns="0" bIns="0" rtlCol="0" anchor="t"/>
+          <a:lstStyle/>
+          <a:p>
+            <a:pPr algn="ctr" indent="0" marL="0">
+              <a:buNone/>
+            </a:pPr>
+            <a:r>
+              <a:rPr lang="en-US" sz="700" i="1" dirty="0">
+                <a:solidFill>
+                  <a:srgbClr val="94A3B8"/>
+                </a:solidFill>
+                <a:latin typeface="Calibri" pitchFamily="34" charset="0"/>
+                <a:ea typeface="Calibri" pitchFamily="34" charset="-122"/>
+                <a:cs typeface="Calibri" pitchFamily="34" charset="-120"/>
+              </a:rPr>
+              <a:t>'e' dropped before vowel suffix</a:t>
+            </a:r>
+            <a:endParaRPr lang="en-US" sz="700" dirty="0"/>
+          </a:p>
+        </p:txBody>
+      </p:sp>
+      <p:sp>
+        <p:nvSpPr>
+          <p:cNvPr id="23" name="Shape 21"/>
+          <p:cNvSpPr/>
+          <p:nvPr/>
+        </p:nvSpPr>
+        <p:spPr>
+          <a:xfrm>
+            <a:off x="365760" y="3273552"/>
+            <a:ext cx="1371600" cy="658368"/>
           </a:xfrm>
           <a:prstGeom prst="rect">
             <a:avLst>
-              <a:gd name="adj" fmla="val 25000"/>
+              <a:gd name="adj" fmla="val 8333"/>
             </a:avLst>
           </a:prstGeom>
           <a:solidFill>
-            <a:srgbClr val="FCE7F3"/>
-          </a:solidFill>
-          <a:ln w="19050">
-            <a:solidFill>
-              <a:srgbClr val="DB2777"/>
-            </a:solidFill>
-            <a:prstDash val="solid"/>
-          </a:ln>
-          <a:effectLst>
-            <a:outerShdw sx="100000" sy="100000" kx="0" ky="0" algn="bl" rotWithShape="0" blurRad="101600" dist="38100" dir="8100000">
-              <a:srgbClr val="000000">
-                <a:alpha val="12000"/>
-              </a:srgbClr>
-            </a:outerShdw>
-          </a:effectLst>
-        </p:spPr>
-      </p:sp>
-      <p:sp>
-        <p:nvSpPr>
-          <p:cNvPr id="23" name="Text 21"/>
-          <p:cNvSpPr/>
-          <p:nvPr/>
-        </p:nvSpPr>
-        <p:spPr>
-          <a:xfrm>
-            <a:off x="6519672" y="2258568"/>
-            <a:ext cx="1828800" cy="292608"/>
+            <a:srgbClr val="E2E8F0"/>
+          </a:solidFill>
+          <a:ln w="12700">
+            <a:solidFill>
+              <a:srgbClr val="E2E8F0"/>
+            </a:solidFill>
+            <a:prstDash val="solid"/>
+          </a:ln>
+        </p:spPr>
+      </p:sp>
+      <p:sp>
+        <p:nvSpPr>
+          <p:cNvPr id="24" name="Text 22"/>
+          <p:cNvSpPr/>
+          <p:nvPr/>
+        </p:nvSpPr>
+        <p:spPr>
+          <a:xfrm>
+            <a:off x="365760" y="3273552"/>
+            <a:ext cx="1371600" cy="658368"/>
           </a:xfrm>
           <a:prstGeom prst="rect">
             <a:avLst/>
@@ -13444,56 +13871,17 @@
               <a:buNone/>
             </a:pPr>
             <a:r>
-              <a:rPr lang="en-US" sz="1300" b="1" dirty="0">
-                <a:solidFill>
-                  <a:srgbClr val="9D174D"/>
+              <a:rPr lang="en-US" sz="1100" b="1" dirty="0">
+                <a:solidFill>
+                  <a:srgbClr val="475569"/>
                 </a:solidFill>
                 <a:latin typeface="Trebuchet MS" pitchFamily="34" charset="0"/>
                 <a:ea typeface="Trebuchet MS" pitchFamily="34" charset="-122"/>
                 <a:cs typeface="Trebuchet MS" pitchFamily="34" charset="-120"/>
               </a:rPr>
-              <a:t>ure</a:t>
-            </a:r>
-            <a:endParaRPr lang="en-US" sz="1300" dirty="0"/>
-          </a:p>
-        </p:txBody>
-      </p:sp>
-      <p:sp>
-        <p:nvSpPr>
-          <p:cNvPr id="24" name="Text 22"/>
-          <p:cNvSpPr/>
-          <p:nvPr/>
-        </p:nvSpPr>
-        <p:spPr>
-          <a:xfrm>
-            <a:off x="6519672" y="2569464"/>
-            <a:ext cx="1828800" cy="201168"/>
-          </a:xfrm>
-          <a:prstGeom prst="rect">
-            <a:avLst/>
-          </a:prstGeom>
-          <a:noFill/>
-          <a:ln/>
-        </p:spPr>
-        <p:txBody>
-          <a:bodyPr wrap="square" lIns="0" tIns="0" rIns="0" bIns="0" rtlCol="0" anchor="t"/>
-          <a:lstStyle/>
-          <a:p>
-            <a:pPr algn="ctr" indent="0" marL="0">
-              <a:buNone/>
-            </a:pPr>
-            <a:r>
-              <a:rPr lang="en-US" sz="850" dirty="0">
-                <a:solidFill>
-                  <a:srgbClr val="475569"/>
-                </a:solidFill>
-                <a:latin typeface="Calibri" pitchFamily="34" charset="0"/>
-                <a:ea typeface="Calibri" pitchFamily="34" charset="-122"/>
-                <a:cs typeface="Calibri" pitchFamily="34" charset="-120"/>
-              </a:rPr>
-              <a:t>result or process of</a:t>
-            </a:r>
-            <a:endParaRPr lang="en-US" sz="850" dirty="0"/>
+              <a:t>Syllables</a:t>
+            </a:r>
+            <a:endParaRPr lang="en-US" sz="1100" dirty="0"/>
           </a:p>
         </p:txBody>
       </p:sp>
@@ -13505,8 +13893,8 @@
         </p:nvSpPr>
         <p:spPr>
           <a:xfrm>
-            <a:off x="365760" y="3273552"/>
-            <a:ext cx="1371600" cy="658368"/>
+            <a:off x="1874520" y="3273552"/>
+            <a:ext cx="6903720" cy="658368"/>
           </a:xfrm>
           <a:prstGeom prst="rect">
             <a:avLst>
@@ -13514,26 +13902,53 @@
             </a:avLst>
           </a:prstGeom>
           <a:solidFill>
-            <a:srgbClr val="E2E8F0"/>
-          </a:solidFill>
-          <a:ln w="12700">
-            <a:solidFill>
-              <a:srgbClr val="E2E8F0"/>
-            </a:solidFill>
-            <a:prstDash val="solid"/>
-          </a:ln>
-        </p:spPr>
-      </p:sp>
-      <p:sp>
-        <p:nvSpPr>
-          <p:cNvPr id="26" name="Text 24"/>
-          <p:cNvSpPr/>
-          <p:nvPr/>
-        </p:nvSpPr>
-        <p:spPr>
-          <a:xfrm>
-            <a:off x="365760" y="3273552"/>
-            <a:ext cx="1371600" cy="658368"/>
+            <a:srgbClr val="CCFBF1"/>
+          </a:solidFill>
+          <a:ln w="12700">
+            <a:solidFill>
+              <a:srgbClr val="0D9488"/>
+            </a:solidFill>
+            <a:prstDash val="solid"/>
+          </a:ln>
+        </p:spPr>
+      </p:sp>
+      <p:sp>
+        <p:nvSpPr>
+          <p:cNvPr id="26" name="Shape 24"/>
+          <p:cNvSpPr/>
+          <p:nvPr/>
+        </p:nvSpPr>
+        <p:spPr>
+          <a:xfrm>
+            <a:off x="2999232" y="3364992"/>
+            <a:ext cx="1645920" cy="475488"/>
+          </a:xfrm>
+          <a:prstGeom prst="rect">
+            <a:avLst>
+              <a:gd name="adj" fmla="val 9615"/>
+            </a:avLst>
+          </a:prstGeom>
+          <a:solidFill>
+            <a:srgbClr val="FFFFFF"/>
+          </a:solidFill>
+          <a:ln w="12700">
+            <a:solidFill>
+              <a:srgbClr val="0D9488"/>
+            </a:solidFill>
+            <a:prstDash val="solid"/>
+          </a:ln>
+        </p:spPr>
+      </p:sp>
+      <p:sp>
+        <p:nvSpPr>
+          <p:cNvPr id="27" name="Text 25"/>
+          <p:cNvSpPr/>
+          <p:nvPr/>
+        </p:nvSpPr>
+        <p:spPr>
+          <a:xfrm>
+            <a:off x="2999232" y="3364992"/>
+            <a:ext cx="1645920" cy="475488"/>
           </a:xfrm>
           <a:prstGeom prst="rect">
             <a:avLst/>
@@ -13549,56 +13964,68 @@
               <a:buNone/>
             </a:pPr>
             <a:r>
-              <a:rPr lang="en-US" sz="1100" b="1" dirty="0">
-                <a:solidFill>
-                  <a:srgbClr val="475569"/>
+              <a:rPr lang="en-US" sz="1400" b="1" dirty="0">
+                <a:solidFill>
+                  <a:srgbClr val="0D9488"/>
                 </a:solidFill>
                 <a:latin typeface="Trebuchet MS" pitchFamily="34" charset="0"/>
                 <a:ea typeface="Trebuchet MS" pitchFamily="34" charset="-122"/>
                 <a:cs typeface="Trebuchet MS" pitchFamily="34" charset="-120"/>
               </a:rPr>
-              <a:t>Syllables</a:t>
-            </a:r>
-            <a:endParaRPr lang="en-US" sz="1100" dirty="0"/>
-          </a:p>
-        </p:txBody>
-      </p:sp>
-      <p:sp>
-        <p:nvSpPr>
-          <p:cNvPr id="27" name="Shape 25"/>
-          <p:cNvSpPr/>
-          <p:nvPr/>
-        </p:nvSpPr>
-        <p:spPr>
-          <a:xfrm>
-            <a:off x="1874520" y="3273552"/>
-            <a:ext cx="6903720" cy="658368"/>
-          </a:xfrm>
-          <a:prstGeom prst="rect">
-            <a:avLst>
-              <a:gd name="adj" fmla="val 8333"/>
-            </a:avLst>
-          </a:prstGeom>
-          <a:solidFill>
-            <a:srgbClr val="CCFBF1"/>
-          </a:solidFill>
-          <a:ln w="12700">
-            <a:solidFill>
-              <a:srgbClr val="0D9488"/>
-            </a:solidFill>
-            <a:prstDash val="solid"/>
-          </a:ln>
-        </p:spPr>
-      </p:sp>
-      <p:sp>
-        <p:nvSpPr>
-          <p:cNvPr id="28" name="Shape 26"/>
-          <p:cNvSpPr/>
-          <p:nvPr/>
-        </p:nvSpPr>
-        <p:spPr>
-          <a:xfrm>
-            <a:off x="2313432" y="3364992"/>
+              <a:t>clo</a:t>
+            </a:r>
+            <a:endParaRPr lang="en-US" sz="1400" dirty="0"/>
+          </a:p>
+        </p:txBody>
+      </p:sp>
+      <p:sp>
+        <p:nvSpPr>
+          <p:cNvPr id="28" name="Text 26"/>
+          <p:cNvSpPr/>
+          <p:nvPr/>
+        </p:nvSpPr>
+        <p:spPr>
+          <a:xfrm>
+            <a:off x="4645152" y="3364992"/>
+            <a:ext cx="1097280" cy="475488"/>
+          </a:xfrm>
+          <a:prstGeom prst="rect">
+            <a:avLst/>
+          </a:prstGeom>
+          <a:noFill/>
+          <a:ln/>
+        </p:spPr>
+        <p:txBody>
+          <a:bodyPr wrap="square" lIns="0" tIns="0" rIns="0" bIns="0" rtlCol="0" anchor="ctr"/>
+          <a:lstStyle/>
+          <a:p>
+            <a:pPr algn="ctr" indent="0" marL="0">
+              <a:buNone/>
+            </a:pPr>
+            <a:r>
+              <a:rPr lang="en-US" sz="1600" b="1" dirty="0">
+                <a:solidFill>
+                  <a:srgbClr val="0D9488"/>
+                </a:solidFill>
+                <a:latin typeface="Trebuchet MS" pitchFamily="34" charset="0"/>
+                <a:ea typeface="Trebuchet MS" pitchFamily="34" charset="-122"/>
+                <a:cs typeface="Trebuchet MS" pitchFamily="34" charset="-120"/>
+              </a:rPr>
+              <a:t>·</a:t>
+            </a:r>
+            <a:endParaRPr lang="en-US" sz="1600" dirty="0"/>
+          </a:p>
+        </p:txBody>
+      </p:sp>
+      <p:sp>
+        <p:nvSpPr>
+          <p:cNvPr id="29" name="Shape 27"/>
+          <p:cNvSpPr/>
+          <p:nvPr/>
+        </p:nvSpPr>
+        <p:spPr>
+          <a:xfrm>
+            <a:off x="5742432" y="3364992"/>
             <a:ext cx="1645920" cy="475488"/>
           </a:xfrm>
           <a:prstGeom prst="rect">
@@ -13619,13 +14046,13 @@
       </p:sp>
       <p:sp>
         <p:nvSpPr>
-          <p:cNvPr id="29" name="Text 27"/>
-          <p:cNvSpPr/>
-          <p:nvPr/>
-        </p:nvSpPr>
-        <p:spPr>
-          <a:xfrm>
-            <a:off x="2313432" y="3364992"/>
+          <p:cNvPr id="30" name="Text 28"/>
+          <p:cNvSpPr/>
+          <p:nvPr/>
+        </p:nvSpPr>
+        <p:spPr>
+          <a:xfrm>
+            <a:off x="5742432" y="3364992"/>
             <a:ext cx="1645920" cy="475488"/>
           </a:xfrm>
           <a:prstGeom prst="rect">
@@ -13650,7 +14077,7 @@
                 <a:ea typeface="Trebuchet MS" pitchFamily="34" charset="-122"/>
                 <a:cs typeface="Trebuchet MS" pitchFamily="34" charset="-120"/>
               </a:rPr>
-              <a:t>en</a:t>
+              <a:t>sure</a:t>
             </a:r>
             <a:endParaRPr lang="en-US" sz="1400" dirty="0"/>
           </a:p>
@@ -13658,14 +14085,41 @@
       </p:sp>
       <p:sp>
         <p:nvSpPr>
-          <p:cNvPr id="30" name="Text 28"/>
-          <p:cNvSpPr/>
-          <p:nvPr/>
-        </p:nvSpPr>
-        <p:spPr>
-          <a:xfrm>
-            <a:off x="3959352" y="3364992"/>
-            <a:ext cx="411480" cy="475488"/>
+          <p:cNvPr id="31" name="Shape 29"/>
+          <p:cNvSpPr/>
+          <p:nvPr/>
+        </p:nvSpPr>
+        <p:spPr>
+          <a:xfrm>
+            <a:off x="365760" y="4096512"/>
+            <a:ext cx="1371600" cy="804672"/>
+          </a:xfrm>
+          <a:prstGeom prst="rect">
+            <a:avLst>
+              <a:gd name="adj" fmla="val 6818"/>
+            </a:avLst>
+          </a:prstGeom>
+          <a:solidFill>
+            <a:srgbClr val="E2E8F0"/>
+          </a:solidFill>
+          <a:ln w="12700">
+            <a:solidFill>
+              <a:srgbClr val="E2E8F0"/>
+            </a:solidFill>
+            <a:prstDash val="solid"/>
+          </a:ln>
+        </p:spPr>
+      </p:sp>
+      <p:sp>
+        <p:nvSpPr>
+          <p:cNvPr id="32" name="Text 30"/>
+          <p:cNvSpPr/>
+          <p:nvPr/>
+        </p:nvSpPr>
+        <p:spPr>
+          <a:xfrm>
+            <a:off x="365760" y="4096512"/>
+            <a:ext cx="1371600" cy="804672"/>
           </a:xfrm>
           <a:prstGeom prst="rect">
             <a:avLst/>
@@ -13681,201 +14135,30 @@
               <a:buNone/>
             </a:pPr>
             <a:r>
-              <a:rPr lang="en-US" sz="1600" b="1" dirty="0">
-                <a:solidFill>
-                  <a:srgbClr val="0D9488"/>
+              <a:rPr lang="en-US" sz="1100" b="1" dirty="0">
+                <a:solidFill>
+                  <a:srgbClr val="475569"/>
                 </a:solidFill>
                 <a:latin typeface="Trebuchet MS" pitchFamily="34" charset="0"/>
                 <a:ea typeface="Trebuchet MS" pitchFamily="34" charset="-122"/>
                 <a:cs typeface="Trebuchet MS" pitchFamily="34" charset="-120"/>
               </a:rPr>
-              <a:t>·</a:t>
-            </a:r>
-            <a:endParaRPr lang="en-US" sz="1600" dirty="0"/>
-          </a:p>
-        </p:txBody>
-      </p:sp>
-      <p:sp>
-        <p:nvSpPr>
-          <p:cNvPr id="31" name="Shape 29"/>
-          <p:cNvSpPr/>
-          <p:nvPr/>
-        </p:nvSpPr>
-        <p:spPr>
-          <a:xfrm>
-            <a:off x="4370832" y="3364992"/>
-            <a:ext cx="1645920" cy="475488"/>
-          </a:xfrm>
-          <a:prstGeom prst="rect">
-            <a:avLst>
-              <a:gd name="adj" fmla="val 9615"/>
-            </a:avLst>
-          </a:prstGeom>
-          <a:solidFill>
-            <a:srgbClr val="FFFFFF"/>
-          </a:solidFill>
-          <a:ln w="12700">
-            <a:solidFill>
-              <a:srgbClr val="0D9488"/>
-            </a:solidFill>
-            <a:prstDash val="solid"/>
-          </a:ln>
-        </p:spPr>
-      </p:sp>
-      <p:sp>
-        <p:nvSpPr>
-          <p:cNvPr id="32" name="Text 30"/>
-          <p:cNvSpPr/>
-          <p:nvPr/>
-        </p:nvSpPr>
-        <p:spPr>
-          <a:xfrm>
-            <a:off x="4370832" y="3364992"/>
-            <a:ext cx="1645920" cy="475488"/>
-          </a:xfrm>
-          <a:prstGeom prst="rect">
-            <a:avLst/>
-          </a:prstGeom>
-          <a:noFill/>
-          <a:ln/>
-        </p:spPr>
-        <p:txBody>
-          <a:bodyPr wrap="square" lIns="0" tIns="0" rIns="0" bIns="0" rtlCol="0" anchor="ctr"/>
-          <a:lstStyle/>
-          <a:p>
-            <a:pPr algn="ctr" indent="0" marL="0">
-              <a:buNone/>
-            </a:pPr>
-            <a:r>
-              <a:rPr lang="en-US" sz="1400" b="1" dirty="0">
-                <a:solidFill>
-                  <a:srgbClr val="0D9488"/>
-                </a:solidFill>
-                <a:latin typeface="Trebuchet MS" pitchFamily="34" charset="0"/>
-                <a:ea typeface="Trebuchet MS" pitchFamily="34" charset="-122"/>
-                <a:cs typeface="Trebuchet MS" pitchFamily="34" charset="-120"/>
-              </a:rPr>
-              <a:t>clo</a:t>
-            </a:r>
-            <a:endParaRPr lang="en-US" sz="1400" dirty="0"/>
-          </a:p>
-        </p:txBody>
-      </p:sp>
-      <p:sp>
-        <p:nvSpPr>
-          <p:cNvPr id="33" name="Text 31"/>
-          <p:cNvSpPr/>
-          <p:nvPr/>
-        </p:nvSpPr>
-        <p:spPr>
-          <a:xfrm>
-            <a:off x="6016752" y="3364992"/>
-            <a:ext cx="411480" cy="475488"/>
-          </a:xfrm>
-          <a:prstGeom prst="rect">
-            <a:avLst/>
-          </a:prstGeom>
-          <a:noFill/>
-          <a:ln/>
-        </p:spPr>
-        <p:txBody>
-          <a:bodyPr wrap="square" lIns="0" tIns="0" rIns="0" bIns="0" rtlCol="0" anchor="ctr"/>
-          <a:lstStyle/>
-          <a:p>
-            <a:pPr algn="ctr" indent="0" marL="0">
-              <a:buNone/>
-            </a:pPr>
-            <a:r>
-              <a:rPr lang="en-US" sz="1600" b="1" dirty="0">
-                <a:solidFill>
-                  <a:srgbClr val="0D9488"/>
-                </a:solidFill>
-                <a:latin typeface="Trebuchet MS" pitchFamily="34" charset="0"/>
-                <a:ea typeface="Trebuchet MS" pitchFamily="34" charset="-122"/>
-                <a:cs typeface="Trebuchet MS" pitchFamily="34" charset="-120"/>
-              </a:rPr>
-              <a:t>·</a:t>
-            </a:r>
-            <a:endParaRPr lang="en-US" sz="1600" dirty="0"/>
-          </a:p>
-        </p:txBody>
-      </p:sp>
-      <p:sp>
-        <p:nvSpPr>
-          <p:cNvPr id="34" name="Shape 32"/>
-          <p:cNvSpPr/>
-          <p:nvPr/>
-        </p:nvSpPr>
-        <p:spPr>
-          <a:xfrm>
-            <a:off x="6428232" y="3364992"/>
-            <a:ext cx="1645920" cy="475488"/>
-          </a:xfrm>
-          <a:prstGeom prst="rect">
-            <a:avLst>
-              <a:gd name="adj" fmla="val 9615"/>
-            </a:avLst>
-          </a:prstGeom>
-          <a:solidFill>
-            <a:srgbClr val="FFFFFF"/>
-          </a:solidFill>
-          <a:ln w="12700">
-            <a:solidFill>
-              <a:srgbClr val="0D9488"/>
-            </a:solidFill>
-            <a:prstDash val="solid"/>
-          </a:ln>
-        </p:spPr>
-      </p:sp>
-      <p:sp>
-        <p:nvSpPr>
-          <p:cNvPr id="35" name="Text 33"/>
-          <p:cNvSpPr/>
-          <p:nvPr/>
-        </p:nvSpPr>
-        <p:spPr>
-          <a:xfrm>
-            <a:off x="6428232" y="3364992"/>
-            <a:ext cx="1645920" cy="475488"/>
-          </a:xfrm>
-          <a:prstGeom prst="rect">
-            <a:avLst/>
-          </a:prstGeom>
-          <a:noFill/>
-          <a:ln/>
-        </p:spPr>
-        <p:txBody>
-          <a:bodyPr wrap="square" lIns="0" tIns="0" rIns="0" bIns="0" rtlCol="0" anchor="ctr"/>
-          <a:lstStyle/>
-          <a:p>
-            <a:pPr algn="ctr" indent="0" marL="0">
-              <a:buNone/>
-            </a:pPr>
-            <a:r>
-              <a:rPr lang="en-US" sz="1400" b="1" dirty="0">
-                <a:solidFill>
-                  <a:srgbClr val="0D9488"/>
-                </a:solidFill>
-                <a:latin typeface="Trebuchet MS" pitchFamily="34" charset="0"/>
-                <a:ea typeface="Trebuchet MS" pitchFamily="34" charset="-122"/>
-                <a:cs typeface="Trebuchet MS" pitchFamily="34" charset="-120"/>
-              </a:rPr>
-              <a:t>sure</a:t>
-            </a:r>
-            <a:endParaRPr lang="en-US" sz="1400" dirty="0"/>
-          </a:p>
-        </p:txBody>
-      </p:sp>
-      <p:sp>
-        <p:nvSpPr>
-          <p:cNvPr id="36" name="Shape 34"/>
-          <p:cNvSpPr/>
-          <p:nvPr/>
-        </p:nvSpPr>
-        <p:spPr>
-          <a:xfrm>
-            <a:off x="365760" y="4096512"/>
-            <a:ext cx="1371600" cy="804672"/>
+              <a:t>Phonemes</a:t>
+            </a:r>
+            <a:endParaRPr lang="en-US" sz="1100" dirty="0"/>
+          </a:p>
+        </p:txBody>
+      </p:sp>
+      <p:sp>
+        <p:nvSpPr>
+          <p:cNvPr id="33" name="Shape 31"/>
+          <p:cNvSpPr/>
+          <p:nvPr/>
+        </p:nvSpPr>
+        <p:spPr>
+          <a:xfrm>
+            <a:off x="1874520" y="4096512"/>
+            <a:ext cx="6903720" cy="804672"/>
           </a:xfrm>
           <a:prstGeom prst="rect">
             <a:avLst>
@@ -13883,85 +14166,19 @@
             </a:avLst>
           </a:prstGeom>
           <a:solidFill>
-            <a:srgbClr val="E2E8F0"/>
+            <a:srgbClr val="F8FAFC"/>
           </a:solidFill>
           <a:ln w="12700">
             <a:solidFill>
               <a:srgbClr val="E2E8F0"/>
             </a:solidFill>
-            <a:prstDash val="solid"/>
-          </a:ln>
-        </p:spPr>
-      </p:sp>
-      <p:sp>
-        <p:nvSpPr>
-          <p:cNvPr id="37" name="Text 35"/>
-          <p:cNvSpPr/>
-          <p:nvPr/>
-        </p:nvSpPr>
-        <p:spPr>
-          <a:xfrm>
-            <a:off x="365760" y="4096512"/>
-            <a:ext cx="1371600" cy="804672"/>
-          </a:xfrm>
-          <a:prstGeom prst="rect">
-            <a:avLst/>
-          </a:prstGeom>
-          <a:noFill/>
-          <a:ln/>
-        </p:spPr>
-        <p:txBody>
-          <a:bodyPr wrap="square" lIns="0" tIns="0" rIns="0" bIns="0" rtlCol="0" anchor="ctr"/>
-          <a:lstStyle/>
-          <a:p>
-            <a:pPr algn="ctr" indent="0" marL="0">
-              <a:buNone/>
-            </a:pPr>
-            <a:r>
-              <a:rPr lang="en-US" sz="1100" b="1" dirty="0">
-                <a:solidFill>
-                  <a:srgbClr val="475569"/>
-                </a:solidFill>
-                <a:latin typeface="Trebuchet MS" pitchFamily="34" charset="0"/>
-                <a:ea typeface="Trebuchet MS" pitchFamily="34" charset="-122"/>
-                <a:cs typeface="Trebuchet MS" pitchFamily="34" charset="-120"/>
-              </a:rPr>
-              <a:t>Phonemes</a:t>
-            </a:r>
-            <a:endParaRPr lang="en-US" sz="1100" dirty="0"/>
-          </a:p>
-        </p:txBody>
-      </p:sp>
-      <p:sp>
-        <p:nvSpPr>
-          <p:cNvPr id="38" name="Shape 36"/>
-          <p:cNvSpPr/>
-          <p:nvPr/>
-        </p:nvSpPr>
-        <p:spPr>
-          <a:xfrm>
-            <a:off x="1874520" y="4096512"/>
-            <a:ext cx="6903720" cy="804672"/>
-          </a:xfrm>
-          <a:prstGeom prst="rect">
-            <a:avLst>
-              <a:gd name="adj" fmla="val 6818"/>
-            </a:avLst>
-          </a:prstGeom>
-          <a:solidFill>
-            <a:srgbClr val="F8FAFC"/>
-          </a:solidFill>
-          <a:ln w="12700">
-            <a:solidFill>
-              <a:srgbClr val="E2E8F0"/>
-            </a:solidFill>
             <a:prstDash val="dash"/>
           </a:ln>
         </p:spPr>
       </p:sp>
       <p:sp>
         <p:nvSpPr>
-          <p:cNvPr id="39" name="Text 37"/>
+          <p:cNvPr id="34" name="Text 32"/>
           <p:cNvSpPr/>
           <p:nvPr/>
         </p:nvSpPr>
@@ -14688,7 +14905,7 @@
                 <a:ea typeface="Trebuchet MS" pitchFamily="34" charset="-122"/>
                 <a:cs typeface="Trebuchet MS" pitchFamily="34" charset="-120"/>
               </a:rPr>
-              <a:t>enclosure</a:t>
+              <a:t>closure</a:t>
             </a:r>
             <a:endParaRPr lang="en-US" sz="2800" dirty="0"/>
           </a:p>
@@ -14768,7 +14985,7 @@
         </p:nvSpPr>
         <p:spPr>
           <a:xfrm>
-            <a:off x="2221992" y="2258568"/>
+            <a:off x="2938272" y="2258568"/>
             <a:ext cx="1828800" cy="292608"/>
           </a:xfrm>
           <a:prstGeom prst="rect">
@@ -14777,11 +14994,11 @@
             </a:avLst>
           </a:prstGeom>
           <a:solidFill>
-            <a:srgbClr val="DDD6FE"/>
+            <a:srgbClr val="CCFBF1"/>
           </a:solidFill>
           <a:ln w="19050">
             <a:solidFill>
-              <a:srgbClr val="7C3AED"/>
+              <a:srgbClr val="0D9488"/>
             </a:solidFill>
             <a:prstDash val="solid"/>
           </a:ln>
@@ -14802,7 +15019,7 @@
         </p:nvSpPr>
         <p:spPr>
           <a:xfrm>
-            <a:off x="2221992" y="2258568"/>
+            <a:off x="2938272" y="2258568"/>
             <a:ext cx="1828800" cy="292608"/>
           </a:xfrm>
           <a:prstGeom prst="rect">
@@ -14821,13 +15038,13 @@
             <a:r>
               <a:rPr lang="en-US" sz="1300" b="1" dirty="0">
                 <a:solidFill>
-                  <a:srgbClr val="4C1D95"/>
+                  <a:srgbClr val="0F766E"/>
                 </a:solidFill>
                 <a:latin typeface="Trebuchet MS" pitchFamily="34" charset="0"/>
                 <a:ea typeface="Trebuchet MS" pitchFamily="34" charset="-122"/>
                 <a:cs typeface="Trebuchet MS" pitchFamily="34" charset="-120"/>
               </a:rPr>
-              <a:t>en</a:t>
+              <a:t>clos</a:t>
             </a:r>
             <a:endParaRPr lang="en-US" sz="1300" dirty="0"/>
           </a:p>
@@ -14841,7 +15058,7 @@
         </p:nvSpPr>
         <p:spPr>
           <a:xfrm>
-            <a:off x="2221992" y="2569464"/>
+            <a:off x="2938272" y="2569464"/>
             <a:ext cx="1828800" cy="201168"/>
           </a:xfrm>
           <a:prstGeom prst="rect">
@@ -14866,7 +15083,7 @@
                 <a:ea typeface="Calibri" pitchFamily="34" charset="-122"/>
                 <a:cs typeface="Calibri" pitchFamily="34" charset="-120"/>
               </a:rPr>
-              <a:t>put into or surround</a:t>
+              <a:t>shut, close</a:t>
             </a:r>
             <a:endParaRPr lang="en-US" sz="850" dirty="0"/>
           </a:p>
@@ -14880,7 +15097,7 @@
         </p:nvSpPr>
         <p:spPr>
           <a:xfrm>
-            <a:off x="4370832" y="2258568"/>
+            <a:off x="5803392" y="2258568"/>
             <a:ext cx="1828800" cy="292608"/>
           </a:xfrm>
           <a:prstGeom prst="rect">
@@ -14889,11 +15106,11 @@
             </a:avLst>
           </a:prstGeom>
           <a:solidFill>
-            <a:srgbClr val="CCFBF1"/>
+            <a:srgbClr val="FCE7F3"/>
           </a:solidFill>
           <a:ln w="19050">
             <a:solidFill>
-              <a:srgbClr val="0D9488"/>
+              <a:srgbClr val="DB2777"/>
             </a:solidFill>
             <a:prstDash val="solid"/>
           </a:ln>
@@ -14914,7 +15131,7 @@
         </p:nvSpPr>
         <p:spPr>
           <a:xfrm>
-            <a:off x="4370832" y="2258568"/>
+            <a:off x="5803392" y="2258568"/>
             <a:ext cx="1828800" cy="292608"/>
           </a:xfrm>
           <a:prstGeom prst="rect">
@@ -14933,13 +15150,13 @@
             <a:r>
               <a:rPr lang="en-US" sz="1300" b="1" dirty="0">
                 <a:solidFill>
-                  <a:srgbClr val="0F766E"/>
+                  <a:srgbClr val="9D174D"/>
                 </a:solidFill>
                 <a:latin typeface="Trebuchet MS" pitchFamily="34" charset="0"/>
                 <a:ea typeface="Trebuchet MS" pitchFamily="34" charset="-122"/>
                 <a:cs typeface="Trebuchet MS" pitchFamily="34" charset="-120"/>
               </a:rPr>
-              <a:t>clos</a:t>
+              <a:t>ure</a:t>
             </a:r>
             <a:endParaRPr lang="en-US" sz="1300" dirty="0"/>
           </a:p>
@@ -14953,7 +15170,7 @@
         </p:nvSpPr>
         <p:spPr>
           <a:xfrm>
-            <a:off x="4370832" y="2569464"/>
+            <a:off x="5803392" y="2569464"/>
             <a:ext cx="1828800" cy="201168"/>
           </a:xfrm>
           <a:prstGeom prst="rect">
@@ -14978,7 +15195,7 @@
                 <a:ea typeface="Calibri" pitchFamily="34" charset="-122"/>
                 <a:cs typeface="Calibri" pitchFamily="34" charset="-120"/>
               </a:rPr>
-              <a:t>shut, close</a:t>
+              <a:t>act or result of</a:t>
             </a:r>
             <a:endParaRPr lang="en-US" sz="850" dirty="0"/>
           </a:p>
@@ -14986,48 +15203,80 @@
       </p:sp>
       <p:sp>
         <p:nvSpPr>
-          <p:cNvPr id="22" name="Shape 20"/>
-          <p:cNvSpPr/>
-          <p:nvPr/>
-        </p:nvSpPr>
-        <p:spPr>
-          <a:xfrm>
-            <a:off x="6519672" y="2258568"/>
-            <a:ext cx="1828800" cy="292608"/>
+          <p:cNvPr id="22" name="Text 20"/>
+          <p:cNvSpPr/>
+          <p:nvPr/>
+        </p:nvSpPr>
+        <p:spPr>
+          <a:xfrm>
+            <a:off x="5803392" y="2752344"/>
+            <a:ext cx="1828800" cy="182880"/>
+          </a:xfrm>
+          <a:prstGeom prst="rect">
+            <a:avLst/>
+          </a:prstGeom>
+          <a:noFill/>
+          <a:ln/>
+        </p:spPr>
+        <p:txBody>
+          <a:bodyPr wrap="square" lIns="0" tIns="0" rIns="0" bIns="0" rtlCol="0" anchor="t"/>
+          <a:lstStyle/>
+          <a:p>
+            <a:pPr algn="ctr" indent="0" marL="0">
+              <a:buNone/>
+            </a:pPr>
+            <a:r>
+              <a:rPr lang="en-US" sz="700" i="1" dirty="0">
+                <a:solidFill>
+                  <a:srgbClr val="94A3B8"/>
+                </a:solidFill>
+                <a:latin typeface="Calibri" pitchFamily="34" charset="0"/>
+                <a:ea typeface="Calibri" pitchFamily="34" charset="-122"/>
+                <a:cs typeface="Calibri" pitchFamily="34" charset="-120"/>
+              </a:rPr>
+              <a:t>'e' dropped before vowel suffix</a:t>
+            </a:r>
+            <a:endParaRPr lang="en-US" sz="700" dirty="0"/>
+          </a:p>
+        </p:txBody>
+      </p:sp>
+      <p:sp>
+        <p:nvSpPr>
+          <p:cNvPr id="23" name="Shape 21"/>
+          <p:cNvSpPr/>
+          <p:nvPr/>
+        </p:nvSpPr>
+        <p:spPr>
+          <a:xfrm>
+            <a:off x="365760" y="3273552"/>
+            <a:ext cx="1371600" cy="658368"/>
           </a:xfrm>
           <a:prstGeom prst="rect">
             <a:avLst>
-              <a:gd name="adj" fmla="val 25000"/>
+              <a:gd name="adj" fmla="val 8333"/>
             </a:avLst>
           </a:prstGeom>
           <a:solidFill>
-            <a:srgbClr val="FCE7F3"/>
-          </a:solidFill>
-          <a:ln w="19050">
-            <a:solidFill>
-              <a:srgbClr val="DB2777"/>
-            </a:solidFill>
-            <a:prstDash val="solid"/>
-          </a:ln>
-          <a:effectLst>
-            <a:outerShdw sx="100000" sy="100000" kx="0" ky="0" algn="bl" rotWithShape="0" blurRad="101600" dist="38100" dir="8100000">
-              <a:srgbClr val="000000">
-                <a:alpha val="12000"/>
-              </a:srgbClr>
-            </a:outerShdw>
-          </a:effectLst>
-        </p:spPr>
-      </p:sp>
-      <p:sp>
-        <p:nvSpPr>
-          <p:cNvPr id="23" name="Text 21"/>
-          <p:cNvSpPr/>
-          <p:nvPr/>
-        </p:nvSpPr>
-        <p:spPr>
-          <a:xfrm>
-            <a:off x="6519672" y="2258568"/>
-            <a:ext cx="1828800" cy="292608"/>
+            <a:srgbClr val="E2E8F0"/>
+          </a:solidFill>
+          <a:ln w="12700">
+            <a:solidFill>
+              <a:srgbClr val="E2E8F0"/>
+            </a:solidFill>
+            <a:prstDash val="solid"/>
+          </a:ln>
+        </p:spPr>
+      </p:sp>
+      <p:sp>
+        <p:nvSpPr>
+          <p:cNvPr id="24" name="Text 22"/>
+          <p:cNvSpPr/>
+          <p:nvPr/>
+        </p:nvSpPr>
+        <p:spPr>
+          <a:xfrm>
+            <a:off x="365760" y="3273552"/>
+            <a:ext cx="1371600" cy="658368"/>
           </a:xfrm>
           <a:prstGeom prst="rect">
             <a:avLst/>
@@ -15043,30 +15292,519 @@
               <a:buNone/>
             </a:pPr>
             <a:r>
-              <a:rPr lang="en-US" sz="1300" b="1" dirty="0">
-                <a:solidFill>
-                  <a:srgbClr val="9D174D"/>
+              <a:rPr lang="en-US" sz="1100" b="1" dirty="0">
+                <a:solidFill>
+                  <a:srgbClr val="475569"/>
                 </a:solidFill>
                 <a:latin typeface="Trebuchet MS" pitchFamily="34" charset="0"/>
                 <a:ea typeface="Trebuchet MS" pitchFamily="34" charset="-122"/>
                 <a:cs typeface="Trebuchet MS" pitchFamily="34" charset="-120"/>
               </a:rPr>
-              <a:t>ure</a:t>
-            </a:r>
-            <a:endParaRPr lang="en-US" sz="1300" dirty="0"/>
-          </a:p>
-        </p:txBody>
-      </p:sp>
-      <p:sp>
-        <p:nvSpPr>
-          <p:cNvPr id="24" name="Text 22"/>
-          <p:cNvSpPr/>
-          <p:nvPr/>
-        </p:nvSpPr>
-        <p:spPr>
-          <a:xfrm>
-            <a:off x="6519672" y="2569464"/>
-            <a:ext cx="1828800" cy="201168"/>
+              <a:t>Syllables</a:t>
+            </a:r>
+            <a:endParaRPr lang="en-US" sz="1100" dirty="0"/>
+          </a:p>
+        </p:txBody>
+      </p:sp>
+      <p:sp>
+        <p:nvSpPr>
+          <p:cNvPr id="25" name="Shape 23"/>
+          <p:cNvSpPr/>
+          <p:nvPr/>
+        </p:nvSpPr>
+        <p:spPr>
+          <a:xfrm>
+            <a:off x="1874520" y="3273552"/>
+            <a:ext cx="6903720" cy="658368"/>
+          </a:xfrm>
+          <a:prstGeom prst="rect">
+            <a:avLst>
+              <a:gd name="adj" fmla="val 8333"/>
+            </a:avLst>
+          </a:prstGeom>
+          <a:solidFill>
+            <a:srgbClr val="CCFBF1"/>
+          </a:solidFill>
+          <a:ln w="12700">
+            <a:solidFill>
+              <a:srgbClr val="0D9488"/>
+            </a:solidFill>
+            <a:prstDash val="solid"/>
+          </a:ln>
+        </p:spPr>
+      </p:sp>
+      <p:sp>
+        <p:nvSpPr>
+          <p:cNvPr id="26" name="Shape 24"/>
+          <p:cNvSpPr/>
+          <p:nvPr/>
+        </p:nvSpPr>
+        <p:spPr>
+          <a:xfrm>
+            <a:off x="2999232" y="3364992"/>
+            <a:ext cx="1645920" cy="475488"/>
+          </a:xfrm>
+          <a:prstGeom prst="rect">
+            <a:avLst>
+              <a:gd name="adj" fmla="val 9615"/>
+            </a:avLst>
+          </a:prstGeom>
+          <a:solidFill>
+            <a:srgbClr val="FFFFFF"/>
+          </a:solidFill>
+          <a:ln w="12700">
+            <a:solidFill>
+              <a:srgbClr val="0D9488"/>
+            </a:solidFill>
+            <a:prstDash val="solid"/>
+          </a:ln>
+        </p:spPr>
+      </p:sp>
+      <p:sp>
+        <p:nvSpPr>
+          <p:cNvPr id="27" name="Text 25"/>
+          <p:cNvSpPr/>
+          <p:nvPr/>
+        </p:nvSpPr>
+        <p:spPr>
+          <a:xfrm>
+            <a:off x="2999232" y="3364992"/>
+            <a:ext cx="1645920" cy="475488"/>
+          </a:xfrm>
+          <a:prstGeom prst="rect">
+            <a:avLst/>
+          </a:prstGeom>
+          <a:noFill/>
+          <a:ln/>
+        </p:spPr>
+        <p:txBody>
+          <a:bodyPr wrap="square" lIns="0" tIns="0" rIns="0" bIns="0" rtlCol="0" anchor="ctr"/>
+          <a:lstStyle/>
+          <a:p>
+            <a:pPr algn="ctr" indent="0" marL="0">
+              <a:buNone/>
+            </a:pPr>
+            <a:r>
+              <a:rPr lang="en-US" sz="1400" b="1" dirty="0">
+                <a:solidFill>
+                  <a:srgbClr val="0D9488"/>
+                </a:solidFill>
+                <a:latin typeface="Trebuchet MS" pitchFamily="34" charset="0"/>
+                <a:ea typeface="Trebuchet MS" pitchFamily="34" charset="-122"/>
+                <a:cs typeface="Trebuchet MS" pitchFamily="34" charset="-120"/>
+              </a:rPr>
+              <a:t>clo</a:t>
+            </a:r>
+            <a:endParaRPr lang="en-US" sz="1400" dirty="0"/>
+          </a:p>
+        </p:txBody>
+      </p:sp>
+      <p:sp>
+        <p:nvSpPr>
+          <p:cNvPr id="28" name="Text 26"/>
+          <p:cNvSpPr/>
+          <p:nvPr/>
+        </p:nvSpPr>
+        <p:spPr>
+          <a:xfrm>
+            <a:off x="4645152" y="3364992"/>
+            <a:ext cx="1097280" cy="475488"/>
+          </a:xfrm>
+          <a:prstGeom prst="rect">
+            <a:avLst/>
+          </a:prstGeom>
+          <a:noFill/>
+          <a:ln/>
+        </p:spPr>
+        <p:txBody>
+          <a:bodyPr wrap="square" lIns="0" tIns="0" rIns="0" bIns="0" rtlCol="0" anchor="ctr"/>
+          <a:lstStyle/>
+          <a:p>
+            <a:pPr algn="ctr" indent="0" marL="0">
+              <a:buNone/>
+            </a:pPr>
+            <a:r>
+              <a:rPr lang="en-US" sz="1600" b="1" dirty="0">
+                <a:solidFill>
+                  <a:srgbClr val="0D9488"/>
+                </a:solidFill>
+                <a:latin typeface="Trebuchet MS" pitchFamily="34" charset="0"/>
+                <a:ea typeface="Trebuchet MS" pitchFamily="34" charset="-122"/>
+                <a:cs typeface="Trebuchet MS" pitchFamily="34" charset="-120"/>
+              </a:rPr>
+              <a:t>·</a:t>
+            </a:r>
+            <a:endParaRPr lang="en-US" sz="1600" dirty="0"/>
+          </a:p>
+        </p:txBody>
+      </p:sp>
+      <p:sp>
+        <p:nvSpPr>
+          <p:cNvPr id="29" name="Shape 27"/>
+          <p:cNvSpPr/>
+          <p:nvPr/>
+        </p:nvSpPr>
+        <p:spPr>
+          <a:xfrm>
+            <a:off x="5742432" y="3364992"/>
+            <a:ext cx="1645920" cy="475488"/>
+          </a:xfrm>
+          <a:prstGeom prst="rect">
+            <a:avLst>
+              <a:gd name="adj" fmla="val 9615"/>
+            </a:avLst>
+          </a:prstGeom>
+          <a:solidFill>
+            <a:srgbClr val="FFFFFF"/>
+          </a:solidFill>
+          <a:ln w="12700">
+            <a:solidFill>
+              <a:srgbClr val="0D9488"/>
+            </a:solidFill>
+            <a:prstDash val="solid"/>
+          </a:ln>
+        </p:spPr>
+      </p:sp>
+      <p:sp>
+        <p:nvSpPr>
+          <p:cNvPr id="30" name="Text 28"/>
+          <p:cNvSpPr/>
+          <p:nvPr/>
+        </p:nvSpPr>
+        <p:spPr>
+          <a:xfrm>
+            <a:off x="5742432" y="3364992"/>
+            <a:ext cx="1645920" cy="475488"/>
+          </a:xfrm>
+          <a:prstGeom prst="rect">
+            <a:avLst/>
+          </a:prstGeom>
+          <a:noFill/>
+          <a:ln/>
+        </p:spPr>
+        <p:txBody>
+          <a:bodyPr wrap="square" lIns="0" tIns="0" rIns="0" bIns="0" rtlCol="0" anchor="ctr"/>
+          <a:lstStyle/>
+          <a:p>
+            <a:pPr algn="ctr" indent="0" marL="0">
+              <a:buNone/>
+            </a:pPr>
+            <a:r>
+              <a:rPr lang="en-US" sz="1400" b="1" dirty="0">
+                <a:solidFill>
+                  <a:srgbClr val="0D9488"/>
+                </a:solidFill>
+                <a:latin typeface="Trebuchet MS" pitchFamily="34" charset="0"/>
+                <a:ea typeface="Trebuchet MS" pitchFamily="34" charset="-122"/>
+                <a:cs typeface="Trebuchet MS" pitchFamily="34" charset="-120"/>
+              </a:rPr>
+              <a:t>sure</a:t>
+            </a:r>
+            <a:endParaRPr lang="en-US" sz="1400" dirty="0"/>
+          </a:p>
+        </p:txBody>
+      </p:sp>
+      <p:sp>
+        <p:nvSpPr>
+          <p:cNvPr id="31" name="Shape 29"/>
+          <p:cNvSpPr/>
+          <p:nvPr/>
+        </p:nvSpPr>
+        <p:spPr>
+          <a:xfrm>
+            <a:off x="365760" y="4096512"/>
+            <a:ext cx="1371600" cy="804672"/>
+          </a:xfrm>
+          <a:prstGeom prst="rect">
+            <a:avLst>
+              <a:gd name="adj" fmla="val 6818"/>
+            </a:avLst>
+          </a:prstGeom>
+          <a:solidFill>
+            <a:srgbClr val="E2E8F0"/>
+          </a:solidFill>
+          <a:ln w="12700">
+            <a:solidFill>
+              <a:srgbClr val="E2E8F0"/>
+            </a:solidFill>
+            <a:prstDash val="solid"/>
+          </a:ln>
+        </p:spPr>
+      </p:sp>
+      <p:sp>
+        <p:nvSpPr>
+          <p:cNvPr id="32" name="Text 30"/>
+          <p:cNvSpPr/>
+          <p:nvPr/>
+        </p:nvSpPr>
+        <p:spPr>
+          <a:xfrm>
+            <a:off x="365760" y="4096512"/>
+            <a:ext cx="1371600" cy="804672"/>
+          </a:xfrm>
+          <a:prstGeom prst="rect">
+            <a:avLst/>
+          </a:prstGeom>
+          <a:noFill/>
+          <a:ln/>
+        </p:spPr>
+        <p:txBody>
+          <a:bodyPr wrap="square" lIns="0" tIns="0" rIns="0" bIns="0" rtlCol="0" anchor="ctr"/>
+          <a:lstStyle/>
+          <a:p>
+            <a:pPr algn="ctr" indent="0" marL="0">
+              <a:buNone/>
+            </a:pPr>
+            <a:r>
+              <a:rPr lang="en-US" sz="1100" b="1" dirty="0">
+                <a:solidFill>
+                  <a:srgbClr val="475569"/>
+                </a:solidFill>
+                <a:latin typeface="Trebuchet MS" pitchFamily="34" charset="0"/>
+                <a:ea typeface="Trebuchet MS" pitchFamily="34" charset="-122"/>
+                <a:cs typeface="Trebuchet MS" pitchFamily="34" charset="-120"/>
+              </a:rPr>
+              <a:t>Phonemes</a:t>
+            </a:r>
+            <a:endParaRPr lang="en-US" sz="1100" dirty="0"/>
+          </a:p>
+        </p:txBody>
+      </p:sp>
+      <p:sp>
+        <p:nvSpPr>
+          <p:cNvPr id="33" name="Shape 31"/>
+          <p:cNvSpPr/>
+          <p:nvPr/>
+        </p:nvSpPr>
+        <p:spPr>
+          <a:xfrm>
+            <a:off x="1874520" y="4096512"/>
+            <a:ext cx="6903720" cy="804672"/>
+          </a:xfrm>
+          <a:prstGeom prst="rect">
+            <a:avLst>
+              <a:gd name="adj" fmla="val 6818"/>
+            </a:avLst>
+          </a:prstGeom>
+          <a:solidFill>
+            <a:srgbClr val="FCE7F3"/>
+          </a:solidFill>
+          <a:ln w="12700">
+            <a:solidFill>
+              <a:srgbClr val="DB2777"/>
+            </a:solidFill>
+            <a:prstDash val="solid"/>
+          </a:ln>
+        </p:spPr>
+      </p:sp>
+      <p:sp>
+        <p:nvSpPr>
+          <p:cNvPr id="34" name="Shape 32"/>
+          <p:cNvSpPr/>
+          <p:nvPr/>
+        </p:nvSpPr>
+        <p:spPr>
+          <a:xfrm>
+            <a:off x="2670048" y="4169664"/>
+            <a:ext cx="685800" cy="384048"/>
+          </a:xfrm>
+          <a:prstGeom prst="rect">
+            <a:avLst>
+              <a:gd name="adj" fmla="val 9524"/>
+            </a:avLst>
+          </a:prstGeom>
+          <a:solidFill>
+            <a:srgbClr val="FFFFFF"/>
+          </a:solidFill>
+          <a:ln w="12700">
+            <a:solidFill>
+              <a:srgbClr val="DB2777"/>
+            </a:solidFill>
+            <a:prstDash val="solid"/>
+          </a:ln>
+        </p:spPr>
+      </p:sp>
+      <p:sp>
+        <p:nvSpPr>
+          <p:cNvPr id="35" name="Text 33"/>
+          <p:cNvSpPr/>
+          <p:nvPr/>
+        </p:nvSpPr>
+        <p:spPr>
+          <a:xfrm>
+            <a:off x="2670048" y="4169664"/>
+            <a:ext cx="685800" cy="384048"/>
+          </a:xfrm>
+          <a:prstGeom prst="rect">
+            <a:avLst/>
+          </a:prstGeom>
+          <a:noFill/>
+          <a:ln/>
+        </p:spPr>
+        <p:txBody>
+          <a:bodyPr wrap="square" lIns="0" tIns="0" rIns="0" bIns="0" rtlCol="0" anchor="ctr"/>
+          <a:lstStyle/>
+          <a:p>
+            <a:pPr algn="ctr" indent="0" marL="0">
+              <a:buNone/>
+            </a:pPr>
+            <a:r>
+              <a:rPr lang="en-US" sz="900" b="1" dirty="0">
+                <a:solidFill>
+                  <a:srgbClr val="9D174D"/>
+                </a:solidFill>
+                <a:latin typeface="Trebuchet MS" pitchFamily="34" charset="0"/>
+                <a:ea typeface="Trebuchet MS" pitchFamily="34" charset="-122"/>
+                <a:cs typeface="Trebuchet MS" pitchFamily="34" charset="-120"/>
+              </a:rPr>
+              <a:t>cl</a:t>
+            </a:r>
+            <a:endParaRPr lang="en-US" sz="900" dirty="0"/>
+          </a:p>
+        </p:txBody>
+      </p:sp>
+      <p:sp>
+        <p:nvSpPr>
+          <p:cNvPr id="36" name="Shape 34"/>
+          <p:cNvSpPr/>
+          <p:nvPr/>
+        </p:nvSpPr>
+        <p:spPr>
+          <a:xfrm>
+            <a:off x="4123944" y="4169664"/>
+            <a:ext cx="685800" cy="384048"/>
+          </a:xfrm>
+          <a:prstGeom prst="rect">
+            <a:avLst>
+              <a:gd name="adj" fmla="val 9524"/>
+            </a:avLst>
+          </a:prstGeom>
+          <a:solidFill>
+            <a:srgbClr val="FFFFFF"/>
+          </a:solidFill>
+          <a:ln w="12700">
+            <a:solidFill>
+              <a:srgbClr val="DB2777"/>
+            </a:solidFill>
+            <a:prstDash val="solid"/>
+          </a:ln>
+        </p:spPr>
+      </p:sp>
+      <p:sp>
+        <p:nvSpPr>
+          <p:cNvPr id="37" name="Text 35"/>
+          <p:cNvSpPr/>
+          <p:nvPr/>
+        </p:nvSpPr>
+        <p:spPr>
+          <a:xfrm>
+            <a:off x="4123944" y="4169664"/>
+            <a:ext cx="685800" cy="384048"/>
+          </a:xfrm>
+          <a:prstGeom prst="rect">
+            <a:avLst/>
+          </a:prstGeom>
+          <a:noFill/>
+          <a:ln/>
+        </p:spPr>
+        <p:txBody>
+          <a:bodyPr wrap="square" lIns="0" tIns="0" rIns="0" bIns="0" rtlCol="0" anchor="ctr"/>
+          <a:lstStyle/>
+          <a:p>
+            <a:pPr algn="ctr" indent="0" marL="0">
+              <a:buNone/>
+            </a:pPr>
+            <a:r>
+              <a:rPr lang="en-US" sz="900" b="1" dirty="0">
+                <a:solidFill>
+                  <a:srgbClr val="9D174D"/>
+                </a:solidFill>
+                <a:latin typeface="Trebuchet MS" pitchFamily="34" charset="0"/>
+                <a:ea typeface="Trebuchet MS" pitchFamily="34" charset="-122"/>
+                <a:cs typeface="Trebuchet MS" pitchFamily="34" charset="-120"/>
+              </a:rPr>
+              <a:t>o</a:t>
+            </a:r>
+            <a:endParaRPr lang="en-US" sz="900" dirty="0"/>
+          </a:p>
+        </p:txBody>
+      </p:sp>
+      <p:sp>
+        <p:nvSpPr>
+          <p:cNvPr id="38" name="Shape 36"/>
+          <p:cNvSpPr/>
+          <p:nvPr/>
+        </p:nvSpPr>
+        <p:spPr>
+          <a:xfrm>
+            <a:off x="5577840" y="4169664"/>
+            <a:ext cx="685800" cy="384048"/>
+          </a:xfrm>
+          <a:prstGeom prst="rect">
+            <a:avLst>
+              <a:gd name="adj" fmla="val 9524"/>
+            </a:avLst>
+          </a:prstGeom>
+          <a:solidFill>
+            <a:srgbClr val="FFFFFF"/>
+          </a:solidFill>
+          <a:ln w="12700">
+            <a:solidFill>
+              <a:srgbClr val="DB2777"/>
+            </a:solidFill>
+            <a:prstDash val="solid"/>
+          </a:ln>
+        </p:spPr>
+      </p:sp>
+      <p:sp>
+        <p:nvSpPr>
+          <p:cNvPr id="39" name="Text 37"/>
+          <p:cNvSpPr/>
+          <p:nvPr/>
+        </p:nvSpPr>
+        <p:spPr>
+          <a:xfrm>
+            <a:off x="5577840" y="4169664"/>
+            <a:ext cx="685800" cy="384048"/>
+          </a:xfrm>
+          <a:prstGeom prst="rect">
+            <a:avLst/>
+          </a:prstGeom>
+          <a:noFill/>
+          <a:ln/>
+        </p:spPr>
+        <p:txBody>
+          <a:bodyPr wrap="square" lIns="0" tIns="0" rIns="0" bIns="0" rtlCol="0" anchor="ctr"/>
+          <a:lstStyle/>
+          <a:p>
+            <a:pPr algn="ctr" indent="0" marL="0">
+              <a:buNone/>
+            </a:pPr>
+            <a:r>
+              <a:rPr lang="en-US" sz="900" b="1" dirty="0">
+                <a:solidFill>
+                  <a:srgbClr val="9D174D"/>
+                </a:solidFill>
+                <a:latin typeface="Trebuchet MS" pitchFamily="34" charset="0"/>
+                <a:ea typeface="Trebuchet MS" pitchFamily="34" charset="-122"/>
+                <a:cs typeface="Trebuchet MS" pitchFamily="34" charset="-120"/>
+              </a:rPr>
+              <a:t>s</a:t>
+            </a:r>
+            <a:endParaRPr lang="en-US" sz="900" dirty="0"/>
+          </a:p>
+        </p:txBody>
+      </p:sp>
+      <p:sp>
+        <p:nvSpPr>
+          <p:cNvPr id="40" name="Text 38"/>
+          <p:cNvSpPr/>
+          <p:nvPr/>
+        </p:nvSpPr>
+        <p:spPr>
+          <a:xfrm>
+            <a:off x="5577840" y="4572000"/>
+            <a:ext cx="685800" cy="219456"/>
           </a:xfrm>
           <a:prstGeom prst="rect">
             <a:avLst/>
@@ -15082,491 +15820,29 @@
               <a:buNone/>
             </a:pPr>
             <a:r>
-              <a:rPr lang="en-US" sz="850" dirty="0">
-                <a:solidFill>
-                  <a:srgbClr val="475569"/>
+              <a:rPr lang="en-US" sz="750" i="1" dirty="0">
+                <a:solidFill>
+                  <a:srgbClr val="94A3B8"/>
                 </a:solidFill>
                 <a:latin typeface="Calibri" pitchFamily="34" charset="0"/>
                 <a:ea typeface="Calibri" pitchFamily="34" charset="-122"/>
                 <a:cs typeface="Calibri" pitchFamily="34" charset="-120"/>
               </a:rPr>
-              <a:t>result or process of</a:t>
-            </a:r>
-            <a:endParaRPr lang="en-US" sz="850" dirty="0"/>
-          </a:p>
-        </p:txBody>
-      </p:sp>
-      <p:sp>
-        <p:nvSpPr>
-          <p:cNvPr id="25" name="Shape 23"/>
-          <p:cNvSpPr/>
-          <p:nvPr/>
-        </p:nvSpPr>
-        <p:spPr>
-          <a:xfrm>
-            <a:off x="365760" y="3273552"/>
-            <a:ext cx="1371600" cy="658368"/>
-          </a:xfrm>
-          <a:prstGeom prst="rect">
-            <a:avLst>
-              <a:gd name="adj" fmla="val 8333"/>
-            </a:avLst>
-          </a:prstGeom>
-          <a:solidFill>
-            <a:srgbClr val="E2E8F0"/>
-          </a:solidFill>
-          <a:ln w="12700">
-            <a:solidFill>
-              <a:srgbClr val="E2E8F0"/>
-            </a:solidFill>
-            <a:prstDash val="solid"/>
-          </a:ln>
-        </p:spPr>
-      </p:sp>
-      <p:sp>
-        <p:nvSpPr>
-          <p:cNvPr id="26" name="Text 24"/>
-          <p:cNvSpPr/>
-          <p:nvPr/>
-        </p:nvSpPr>
-        <p:spPr>
-          <a:xfrm>
-            <a:off x="365760" y="3273552"/>
-            <a:ext cx="1371600" cy="658368"/>
-          </a:xfrm>
-          <a:prstGeom prst="rect">
-            <a:avLst/>
-          </a:prstGeom>
-          <a:noFill/>
-          <a:ln/>
-        </p:spPr>
-        <p:txBody>
-          <a:bodyPr wrap="square" lIns="0" tIns="0" rIns="0" bIns="0" rtlCol="0" anchor="ctr"/>
-          <a:lstStyle/>
-          <a:p>
-            <a:pPr algn="ctr" indent="0" marL="0">
-              <a:buNone/>
-            </a:pPr>
-            <a:r>
-              <a:rPr lang="en-US" sz="1100" b="1" dirty="0">
-                <a:solidFill>
-                  <a:srgbClr val="475569"/>
-                </a:solidFill>
-                <a:latin typeface="Trebuchet MS" pitchFamily="34" charset="0"/>
-                <a:ea typeface="Trebuchet MS" pitchFamily="34" charset="-122"/>
-                <a:cs typeface="Trebuchet MS" pitchFamily="34" charset="-120"/>
-              </a:rPr>
-              <a:t>Syllables</a:t>
-            </a:r>
-            <a:endParaRPr lang="en-US" sz="1100" dirty="0"/>
-          </a:p>
-        </p:txBody>
-      </p:sp>
-      <p:sp>
-        <p:nvSpPr>
-          <p:cNvPr id="27" name="Shape 25"/>
-          <p:cNvSpPr/>
-          <p:nvPr/>
-        </p:nvSpPr>
-        <p:spPr>
-          <a:xfrm>
-            <a:off x="1874520" y="3273552"/>
-            <a:ext cx="6903720" cy="658368"/>
-          </a:xfrm>
-          <a:prstGeom prst="rect">
-            <a:avLst>
-              <a:gd name="adj" fmla="val 8333"/>
-            </a:avLst>
-          </a:prstGeom>
-          <a:solidFill>
-            <a:srgbClr val="CCFBF1"/>
-          </a:solidFill>
-          <a:ln w="12700">
-            <a:solidFill>
-              <a:srgbClr val="0D9488"/>
-            </a:solidFill>
-            <a:prstDash val="solid"/>
-          </a:ln>
-        </p:spPr>
-      </p:sp>
-      <p:sp>
-        <p:nvSpPr>
-          <p:cNvPr id="28" name="Shape 26"/>
-          <p:cNvSpPr/>
-          <p:nvPr/>
-        </p:nvSpPr>
-        <p:spPr>
-          <a:xfrm>
-            <a:off x="2313432" y="3364992"/>
-            <a:ext cx="1645920" cy="475488"/>
-          </a:xfrm>
-          <a:prstGeom prst="rect">
-            <a:avLst>
-              <a:gd name="adj" fmla="val 9615"/>
-            </a:avLst>
-          </a:prstGeom>
-          <a:solidFill>
-            <a:srgbClr val="FFFFFF"/>
-          </a:solidFill>
-          <a:ln w="12700">
-            <a:solidFill>
-              <a:srgbClr val="0D9488"/>
-            </a:solidFill>
-            <a:prstDash val="solid"/>
-          </a:ln>
-        </p:spPr>
-      </p:sp>
-      <p:sp>
-        <p:nvSpPr>
-          <p:cNvPr id="29" name="Text 27"/>
-          <p:cNvSpPr/>
-          <p:nvPr/>
-        </p:nvSpPr>
-        <p:spPr>
-          <a:xfrm>
-            <a:off x="2313432" y="3364992"/>
-            <a:ext cx="1645920" cy="475488"/>
-          </a:xfrm>
-          <a:prstGeom prst="rect">
-            <a:avLst/>
-          </a:prstGeom>
-          <a:noFill/>
-          <a:ln/>
-        </p:spPr>
-        <p:txBody>
-          <a:bodyPr wrap="square" lIns="0" tIns="0" rIns="0" bIns="0" rtlCol="0" anchor="ctr"/>
-          <a:lstStyle/>
-          <a:p>
-            <a:pPr algn="ctr" indent="0" marL="0">
-              <a:buNone/>
-            </a:pPr>
-            <a:r>
-              <a:rPr lang="en-US" sz="1400" b="1" dirty="0">
-                <a:solidFill>
-                  <a:srgbClr val="0D9488"/>
-                </a:solidFill>
-                <a:latin typeface="Trebuchet MS" pitchFamily="34" charset="0"/>
-                <a:ea typeface="Trebuchet MS" pitchFamily="34" charset="-122"/>
-                <a:cs typeface="Trebuchet MS" pitchFamily="34" charset="-120"/>
-              </a:rPr>
-              <a:t>en</a:t>
-            </a:r>
-            <a:endParaRPr lang="en-US" sz="1400" dirty="0"/>
-          </a:p>
-        </p:txBody>
-      </p:sp>
-      <p:sp>
-        <p:nvSpPr>
-          <p:cNvPr id="30" name="Text 28"/>
-          <p:cNvSpPr/>
-          <p:nvPr/>
-        </p:nvSpPr>
-        <p:spPr>
-          <a:xfrm>
-            <a:off x="3959352" y="3364992"/>
-            <a:ext cx="411480" cy="475488"/>
-          </a:xfrm>
-          <a:prstGeom prst="rect">
-            <a:avLst/>
-          </a:prstGeom>
-          <a:noFill/>
-          <a:ln/>
-        </p:spPr>
-        <p:txBody>
-          <a:bodyPr wrap="square" lIns="0" tIns="0" rIns="0" bIns="0" rtlCol="0" anchor="ctr"/>
-          <a:lstStyle/>
-          <a:p>
-            <a:pPr algn="ctr" indent="0" marL="0">
-              <a:buNone/>
-            </a:pPr>
-            <a:r>
-              <a:rPr lang="en-US" sz="1600" b="1" dirty="0">
-                <a:solidFill>
-                  <a:srgbClr val="0D9488"/>
-                </a:solidFill>
-                <a:latin typeface="Trebuchet MS" pitchFamily="34" charset="0"/>
-                <a:ea typeface="Trebuchet MS" pitchFamily="34" charset="-122"/>
-                <a:cs typeface="Trebuchet MS" pitchFamily="34" charset="-120"/>
-              </a:rPr>
-              <a:t>·</a:t>
-            </a:r>
-            <a:endParaRPr lang="en-US" sz="1600" dirty="0"/>
-          </a:p>
-        </p:txBody>
-      </p:sp>
-      <p:sp>
-        <p:nvSpPr>
-          <p:cNvPr id="31" name="Shape 29"/>
-          <p:cNvSpPr/>
-          <p:nvPr/>
-        </p:nvSpPr>
-        <p:spPr>
-          <a:xfrm>
-            <a:off x="4370832" y="3364992"/>
-            <a:ext cx="1645920" cy="475488"/>
-          </a:xfrm>
-          <a:prstGeom prst="rect">
-            <a:avLst>
-              <a:gd name="adj" fmla="val 9615"/>
-            </a:avLst>
-          </a:prstGeom>
-          <a:solidFill>
-            <a:srgbClr val="FFFFFF"/>
-          </a:solidFill>
-          <a:ln w="12700">
-            <a:solidFill>
-              <a:srgbClr val="0D9488"/>
-            </a:solidFill>
-            <a:prstDash val="solid"/>
-          </a:ln>
-        </p:spPr>
-      </p:sp>
-      <p:sp>
-        <p:nvSpPr>
-          <p:cNvPr id="32" name="Text 30"/>
-          <p:cNvSpPr/>
-          <p:nvPr/>
-        </p:nvSpPr>
-        <p:spPr>
-          <a:xfrm>
-            <a:off x="4370832" y="3364992"/>
-            <a:ext cx="1645920" cy="475488"/>
-          </a:xfrm>
-          <a:prstGeom prst="rect">
-            <a:avLst/>
-          </a:prstGeom>
-          <a:noFill/>
-          <a:ln/>
-        </p:spPr>
-        <p:txBody>
-          <a:bodyPr wrap="square" lIns="0" tIns="0" rIns="0" bIns="0" rtlCol="0" anchor="ctr"/>
-          <a:lstStyle/>
-          <a:p>
-            <a:pPr algn="ctr" indent="0" marL="0">
-              <a:buNone/>
-            </a:pPr>
-            <a:r>
-              <a:rPr lang="en-US" sz="1400" b="1" dirty="0">
-                <a:solidFill>
-                  <a:srgbClr val="0D9488"/>
-                </a:solidFill>
-                <a:latin typeface="Trebuchet MS" pitchFamily="34" charset="0"/>
-                <a:ea typeface="Trebuchet MS" pitchFamily="34" charset="-122"/>
-                <a:cs typeface="Trebuchet MS" pitchFamily="34" charset="-120"/>
-              </a:rPr>
-              <a:t>clo</a:t>
-            </a:r>
-            <a:endParaRPr lang="en-US" sz="1400" dirty="0"/>
-          </a:p>
-        </p:txBody>
-      </p:sp>
-      <p:sp>
-        <p:nvSpPr>
-          <p:cNvPr id="33" name="Text 31"/>
-          <p:cNvSpPr/>
-          <p:nvPr/>
-        </p:nvSpPr>
-        <p:spPr>
-          <a:xfrm>
-            <a:off x="6016752" y="3364992"/>
-            <a:ext cx="411480" cy="475488"/>
-          </a:xfrm>
-          <a:prstGeom prst="rect">
-            <a:avLst/>
-          </a:prstGeom>
-          <a:noFill/>
-          <a:ln/>
-        </p:spPr>
-        <p:txBody>
-          <a:bodyPr wrap="square" lIns="0" tIns="0" rIns="0" bIns="0" rtlCol="0" anchor="ctr"/>
-          <a:lstStyle/>
-          <a:p>
-            <a:pPr algn="ctr" indent="0" marL="0">
-              <a:buNone/>
-            </a:pPr>
-            <a:r>
-              <a:rPr lang="en-US" sz="1600" b="1" dirty="0">
-                <a:solidFill>
-                  <a:srgbClr val="0D9488"/>
-                </a:solidFill>
-                <a:latin typeface="Trebuchet MS" pitchFamily="34" charset="0"/>
-                <a:ea typeface="Trebuchet MS" pitchFamily="34" charset="-122"/>
-                <a:cs typeface="Trebuchet MS" pitchFamily="34" charset="-120"/>
-              </a:rPr>
-              <a:t>·</a:t>
-            </a:r>
-            <a:endParaRPr lang="en-US" sz="1600" dirty="0"/>
-          </a:p>
-        </p:txBody>
-      </p:sp>
-      <p:sp>
-        <p:nvSpPr>
-          <p:cNvPr id="34" name="Shape 32"/>
-          <p:cNvSpPr/>
-          <p:nvPr/>
-        </p:nvSpPr>
-        <p:spPr>
-          <a:xfrm>
-            <a:off x="6428232" y="3364992"/>
-            <a:ext cx="1645920" cy="475488"/>
-          </a:xfrm>
-          <a:prstGeom prst="rect">
-            <a:avLst>
-              <a:gd name="adj" fmla="val 9615"/>
-            </a:avLst>
-          </a:prstGeom>
-          <a:solidFill>
-            <a:srgbClr val="FFFFFF"/>
-          </a:solidFill>
-          <a:ln w="12700">
-            <a:solidFill>
-              <a:srgbClr val="0D9488"/>
-            </a:solidFill>
-            <a:prstDash val="solid"/>
-          </a:ln>
-        </p:spPr>
-      </p:sp>
-      <p:sp>
-        <p:nvSpPr>
-          <p:cNvPr id="35" name="Text 33"/>
-          <p:cNvSpPr/>
-          <p:nvPr/>
-        </p:nvSpPr>
-        <p:spPr>
-          <a:xfrm>
-            <a:off x="6428232" y="3364992"/>
-            <a:ext cx="1645920" cy="475488"/>
-          </a:xfrm>
-          <a:prstGeom prst="rect">
-            <a:avLst/>
-          </a:prstGeom>
-          <a:noFill/>
-          <a:ln/>
-        </p:spPr>
-        <p:txBody>
-          <a:bodyPr wrap="square" lIns="0" tIns="0" rIns="0" bIns="0" rtlCol="0" anchor="ctr"/>
-          <a:lstStyle/>
-          <a:p>
-            <a:pPr algn="ctr" indent="0" marL="0">
-              <a:buNone/>
-            </a:pPr>
-            <a:r>
-              <a:rPr lang="en-US" sz="1400" b="1" dirty="0">
-                <a:solidFill>
-                  <a:srgbClr val="0D9488"/>
-                </a:solidFill>
-                <a:latin typeface="Trebuchet MS" pitchFamily="34" charset="0"/>
-                <a:ea typeface="Trebuchet MS" pitchFamily="34" charset="-122"/>
-                <a:cs typeface="Trebuchet MS" pitchFamily="34" charset="-120"/>
-              </a:rPr>
-              <a:t>sure</a:t>
-            </a:r>
-            <a:endParaRPr lang="en-US" sz="1400" dirty="0"/>
-          </a:p>
-        </p:txBody>
-      </p:sp>
-      <p:sp>
-        <p:nvSpPr>
-          <p:cNvPr id="36" name="Shape 34"/>
-          <p:cNvSpPr/>
-          <p:nvPr/>
-        </p:nvSpPr>
-        <p:spPr>
-          <a:xfrm>
-            <a:off x="365760" y="4096512"/>
-            <a:ext cx="1371600" cy="804672"/>
-          </a:xfrm>
-          <a:prstGeom prst="rect">
-            <a:avLst>
-              <a:gd name="adj" fmla="val 6818"/>
-            </a:avLst>
-          </a:prstGeom>
-          <a:solidFill>
-            <a:srgbClr val="E2E8F0"/>
-          </a:solidFill>
-          <a:ln w="12700">
-            <a:solidFill>
-              <a:srgbClr val="E2E8F0"/>
-            </a:solidFill>
-            <a:prstDash val="solid"/>
-          </a:ln>
-        </p:spPr>
-      </p:sp>
-      <p:sp>
-        <p:nvSpPr>
-          <p:cNvPr id="37" name="Text 35"/>
-          <p:cNvSpPr/>
-          <p:nvPr/>
-        </p:nvSpPr>
-        <p:spPr>
-          <a:xfrm>
-            <a:off x="365760" y="4096512"/>
-            <a:ext cx="1371600" cy="804672"/>
-          </a:xfrm>
-          <a:prstGeom prst="rect">
-            <a:avLst/>
-          </a:prstGeom>
-          <a:noFill/>
-          <a:ln/>
-        </p:spPr>
-        <p:txBody>
-          <a:bodyPr wrap="square" lIns="0" tIns="0" rIns="0" bIns="0" rtlCol="0" anchor="ctr"/>
-          <a:lstStyle/>
-          <a:p>
-            <a:pPr algn="ctr" indent="0" marL="0">
-              <a:buNone/>
-            </a:pPr>
-            <a:r>
-              <a:rPr lang="en-US" sz="1100" b="1" dirty="0">
-                <a:solidFill>
-                  <a:srgbClr val="475569"/>
-                </a:solidFill>
-                <a:latin typeface="Trebuchet MS" pitchFamily="34" charset="0"/>
-                <a:ea typeface="Trebuchet MS" pitchFamily="34" charset="-122"/>
-                <a:cs typeface="Trebuchet MS" pitchFamily="34" charset="-120"/>
-              </a:rPr>
-              <a:t>Phonemes</a:t>
-            </a:r>
-            <a:endParaRPr lang="en-US" sz="1100" dirty="0"/>
-          </a:p>
-        </p:txBody>
-      </p:sp>
-      <p:sp>
-        <p:nvSpPr>
-          <p:cNvPr id="38" name="Shape 36"/>
-          <p:cNvSpPr/>
-          <p:nvPr/>
-        </p:nvSpPr>
-        <p:spPr>
-          <a:xfrm>
-            <a:off x="1874520" y="4096512"/>
-            <a:ext cx="6903720" cy="804672"/>
-          </a:xfrm>
-          <a:prstGeom prst="rect">
-            <a:avLst>
-              <a:gd name="adj" fmla="val 6818"/>
-            </a:avLst>
-          </a:prstGeom>
-          <a:solidFill>
-            <a:srgbClr val="FCE7F3"/>
-          </a:solidFill>
-          <a:ln w="12700">
-            <a:solidFill>
-              <a:srgbClr val="DB2777"/>
-            </a:solidFill>
-            <a:prstDash val="solid"/>
-          </a:ln>
-        </p:spPr>
-      </p:sp>
-      <p:sp>
-        <p:nvSpPr>
-          <p:cNvPr id="39" name="Shape 37"/>
-          <p:cNvSpPr/>
-          <p:nvPr/>
-        </p:nvSpPr>
-        <p:spPr>
-          <a:xfrm>
-            <a:off x="2254649" y="4169664"/>
+              <a:t>/zh/</a:t>
+            </a:r>
+            <a:endParaRPr lang="en-US" sz="750" dirty="0"/>
+          </a:p>
+        </p:txBody>
+      </p:sp>
+      <p:sp>
+        <p:nvSpPr>
+          <p:cNvPr id="41" name="Shape 39"/>
+          <p:cNvSpPr/>
+          <p:nvPr/>
+        </p:nvSpPr>
+        <p:spPr>
+          <a:xfrm>
+            <a:off x="7031736" y="4169664"/>
             <a:ext cx="685800" cy="384048"/>
           </a:xfrm>
           <a:prstGeom prst="rect">
@@ -15587,382 +15863,13 @@
       </p:sp>
       <p:sp>
         <p:nvSpPr>
-          <p:cNvPr id="40" name="Text 38"/>
-          <p:cNvSpPr/>
-          <p:nvPr/>
-        </p:nvSpPr>
-        <p:spPr>
-          <a:xfrm>
-            <a:off x="2254649" y="4169664"/>
-            <a:ext cx="685800" cy="384048"/>
-          </a:xfrm>
-          <a:prstGeom prst="rect">
-            <a:avLst/>
-          </a:prstGeom>
-          <a:noFill/>
-          <a:ln/>
-        </p:spPr>
-        <p:txBody>
-          <a:bodyPr wrap="square" lIns="0" tIns="0" rIns="0" bIns="0" rtlCol="0" anchor="ctr"/>
-          <a:lstStyle/>
-          <a:p>
-            <a:pPr algn="ctr" indent="0" marL="0">
-              <a:buNone/>
-            </a:pPr>
-            <a:r>
-              <a:rPr lang="en-US" sz="900" b="1" dirty="0">
-                <a:solidFill>
-                  <a:srgbClr val="9D174D"/>
-                </a:solidFill>
-                <a:latin typeface="Trebuchet MS" pitchFamily="34" charset="0"/>
-                <a:ea typeface="Trebuchet MS" pitchFamily="34" charset="-122"/>
-                <a:cs typeface="Trebuchet MS" pitchFamily="34" charset="-120"/>
-              </a:rPr>
-              <a:t>e</a:t>
-            </a:r>
-            <a:endParaRPr lang="en-US" sz="900" dirty="0"/>
-          </a:p>
-        </p:txBody>
-      </p:sp>
-      <p:sp>
-        <p:nvSpPr>
-          <p:cNvPr id="41" name="Shape 39"/>
-          <p:cNvSpPr/>
-          <p:nvPr/>
-        </p:nvSpPr>
-        <p:spPr>
-          <a:xfrm>
-            <a:off x="3293146" y="4169664"/>
-            <a:ext cx="685800" cy="384048"/>
-          </a:xfrm>
-          <a:prstGeom prst="rect">
-            <a:avLst>
-              <a:gd name="adj" fmla="val 9524"/>
-            </a:avLst>
-          </a:prstGeom>
-          <a:solidFill>
-            <a:srgbClr val="FFFFFF"/>
-          </a:solidFill>
-          <a:ln w="12700">
-            <a:solidFill>
-              <a:srgbClr val="DB2777"/>
-            </a:solidFill>
-            <a:prstDash val="solid"/>
-          </a:ln>
-        </p:spPr>
-      </p:sp>
-      <p:sp>
-        <p:nvSpPr>
           <p:cNvPr id="42" name="Text 40"/>
           <p:cNvSpPr/>
           <p:nvPr/>
         </p:nvSpPr>
         <p:spPr>
           <a:xfrm>
-            <a:off x="3293146" y="4169664"/>
-            <a:ext cx="685800" cy="384048"/>
-          </a:xfrm>
-          <a:prstGeom prst="rect">
-            <a:avLst/>
-          </a:prstGeom>
-          <a:noFill/>
-          <a:ln/>
-        </p:spPr>
-        <p:txBody>
-          <a:bodyPr wrap="square" lIns="0" tIns="0" rIns="0" bIns="0" rtlCol="0" anchor="ctr"/>
-          <a:lstStyle/>
-          <a:p>
-            <a:pPr algn="ctr" indent="0" marL="0">
-              <a:buNone/>
-            </a:pPr>
-            <a:r>
-              <a:rPr lang="en-US" sz="900" b="1" dirty="0">
-                <a:solidFill>
-                  <a:srgbClr val="9D174D"/>
-                </a:solidFill>
-                <a:latin typeface="Trebuchet MS" pitchFamily="34" charset="0"/>
-                <a:ea typeface="Trebuchet MS" pitchFamily="34" charset="-122"/>
-                <a:cs typeface="Trebuchet MS" pitchFamily="34" charset="-120"/>
-              </a:rPr>
-              <a:t>n</a:t>
-            </a:r>
-            <a:endParaRPr lang="en-US" sz="900" dirty="0"/>
-          </a:p>
-        </p:txBody>
-      </p:sp>
-      <p:sp>
-        <p:nvSpPr>
-          <p:cNvPr id="43" name="Shape 41"/>
-          <p:cNvSpPr/>
-          <p:nvPr/>
-        </p:nvSpPr>
-        <p:spPr>
-          <a:xfrm>
-            <a:off x="4331643" y="4169664"/>
-            <a:ext cx="685800" cy="384048"/>
-          </a:xfrm>
-          <a:prstGeom prst="rect">
-            <a:avLst>
-              <a:gd name="adj" fmla="val 9524"/>
-            </a:avLst>
-          </a:prstGeom>
-          <a:solidFill>
-            <a:srgbClr val="FFFFFF"/>
-          </a:solidFill>
-          <a:ln w="12700">
-            <a:solidFill>
-              <a:srgbClr val="DB2777"/>
-            </a:solidFill>
-            <a:prstDash val="solid"/>
-          </a:ln>
-        </p:spPr>
-      </p:sp>
-      <p:sp>
-        <p:nvSpPr>
-          <p:cNvPr id="44" name="Text 42"/>
-          <p:cNvSpPr/>
-          <p:nvPr/>
-        </p:nvSpPr>
-        <p:spPr>
-          <a:xfrm>
-            <a:off x="4331643" y="4169664"/>
-            <a:ext cx="685800" cy="384048"/>
-          </a:xfrm>
-          <a:prstGeom prst="rect">
-            <a:avLst/>
-          </a:prstGeom>
-          <a:noFill/>
-          <a:ln/>
-        </p:spPr>
-        <p:txBody>
-          <a:bodyPr wrap="square" lIns="0" tIns="0" rIns="0" bIns="0" rtlCol="0" anchor="ctr"/>
-          <a:lstStyle/>
-          <a:p>
-            <a:pPr algn="ctr" indent="0" marL="0">
-              <a:buNone/>
-            </a:pPr>
-            <a:r>
-              <a:rPr lang="en-US" sz="900" b="1" dirty="0">
-                <a:solidFill>
-                  <a:srgbClr val="9D174D"/>
-                </a:solidFill>
-                <a:latin typeface="Trebuchet MS" pitchFamily="34" charset="0"/>
-                <a:ea typeface="Trebuchet MS" pitchFamily="34" charset="-122"/>
-                <a:cs typeface="Trebuchet MS" pitchFamily="34" charset="-120"/>
-              </a:rPr>
-              <a:t>cl</a:t>
-            </a:r>
-            <a:endParaRPr lang="en-US" sz="900" dirty="0"/>
-          </a:p>
-        </p:txBody>
-      </p:sp>
-      <p:sp>
-        <p:nvSpPr>
-          <p:cNvPr id="45" name="Shape 43"/>
-          <p:cNvSpPr/>
-          <p:nvPr/>
-        </p:nvSpPr>
-        <p:spPr>
-          <a:xfrm>
-            <a:off x="5370141" y="4169664"/>
-            <a:ext cx="685800" cy="384048"/>
-          </a:xfrm>
-          <a:prstGeom prst="rect">
-            <a:avLst>
-              <a:gd name="adj" fmla="val 9524"/>
-            </a:avLst>
-          </a:prstGeom>
-          <a:solidFill>
-            <a:srgbClr val="FFFFFF"/>
-          </a:solidFill>
-          <a:ln w="12700">
-            <a:solidFill>
-              <a:srgbClr val="DB2777"/>
-            </a:solidFill>
-            <a:prstDash val="solid"/>
-          </a:ln>
-        </p:spPr>
-      </p:sp>
-      <p:sp>
-        <p:nvSpPr>
-          <p:cNvPr id="46" name="Text 44"/>
-          <p:cNvSpPr/>
-          <p:nvPr/>
-        </p:nvSpPr>
-        <p:spPr>
-          <a:xfrm>
-            <a:off x="5370141" y="4169664"/>
-            <a:ext cx="685800" cy="384048"/>
-          </a:xfrm>
-          <a:prstGeom prst="rect">
-            <a:avLst/>
-          </a:prstGeom>
-          <a:noFill/>
-          <a:ln/>
-        </p:spPr>
-        <p:txBody>
-          <a:bodyPr wrap="square" lIns="0" tIns="0" rIns="0" bIns="0" rtlCol="0" anchor="ctr"/>
-          <a:lstStyle/>
-          <a:p>
-            <a:pPr algn="ctr" indent="0" marL="0">
-              <a:buNone/>
-            </a:pPr>
-            <a:r>
-              <a:rPr lang="en-US" sz="900" b="1" dirty="0">
-                <a:solidFill>
-                  <a:srgbClr val="9D174D"/>
-                </a:solidFill>
-                <a:latin typeface="Trebuchet MS" pitchFamily="34" charset="0"/>
-                <a:ea typeface="Trebuchet MS" pitchFamily="34" charset="-122"/>
-                <a:cs typeface="Trebuchet MS" pitchFamily="34" charset="-120"/>
-              </a:rPr>
-              <a:t>o</a:t>
-            </a:r>
-            <a:endParaRPr lang="en-US" sz="900" dirty="0"/>
-          </a:p>
-        </p:txBody>
-      </p:sp>
-      <p:sp>
-        <p:nvSpPr>
-          <p:cNvPr id="47" name="Shape 45"/>
-          <p:cNvSpPr/>
-          <p:nvPr/>
-        </p:nvSpPr>
-        <p:spPr>
-          <a:xfrm>
-            <a:off x="6408638" y="4169664"/>
-            <a:ext cx="685800" cy="384048"/>
-          </a:xfrm>
-          <a:prstGeom prst="rect">
-            <a:avLst>
-              <a:gd name="adj" fmla="val 9524"/>
-            </a:avLst>
-          </a:prstGeom>
-          <a:solidFill>
-            <a:srgbClr val="FFFFFF"/>
-          </a:solidFill>
-          <a:ln w="12700">
-            <a:solidFill>
-              <a:srgbClr val="DB2777"/>
-            </a:solidFill>
-            <a:prstDash val="solid"/>
-          </a:ln>
-        </p:spPr>
-      </p:sp>
-      <p:sp>
-        <p:nvSpPr>
-          <p:cNvPr id="48" name="Text 46"/>
-          <p:cNvSpPr/>
-          <p:nvPr/>
-        </p:nvSpPr>
-        <p:spPr>
-          <a:xfrm>
-            <a:off x="6408638" y="4169664"/>
-            <a:ext cx="685800" cy="384048"/>
-          </a:xfrm>
-          <a:prstGeom prst="rect">
-            <a:avLst/>
-          </a:prstGeom>
-          <a:noFill/>
-          <a:ln/>
-        </p:spPr>
-        <p:txBody>
-          <a:bodyPr wrap="square" lIns="0" tIns="0" rIns="0" bIns="0" rtlCol="0" anchor="ctr"/>
-          <a:lstStyle/>
-          <a:p>
-            <a:pPr algn="ctr" indent="0" marL="0">
-              <a:buNone/>
-            </a:pPr>
-            <a:r>
-              <a:rPr lang="en-US" sz="900" b="1" dirty="0">
-                <a:solidFill>
-                  <a:srgbClr val="9D174D"/>
-                </a:solidFill>
-                <a:latin typeface="Trebuchet MS" pitchFamily="34" charset="0"/>
-                <a:ea typeface="Trebuchet MS" pitchFamily="34" charset="-122"/>
-                <a:cs typeface="Trebuchet MS" pitchFamily="34" charset="-120"/>
-              </a:rPr>
-              <a:t>s</a:t>
-            </a:r>
-            <a:endParaRPr lang="en-US" sz="900" dirty="0"/>
-          </a:p>
-        </p:txBody>
-      </p:sp>
-      <p:sp>
-        <p:nvSpPr>
-          <p:cNvPr id="49" name="Text 47"/>
-          <p:cNvSpPr/>
-          <p:nvPr/>
-        </p:nvSpPr>
-        <p:spPr>
-          <a:xfrm>
-            <a:off x="6408638" y="4572000"/>
-            <a:ext cx="685800" cy="219456"/>
-          </a:xfrm>
-          <a:prstGeom prst="rect">
-            <a:avLst/>
-          </a:prstGeom>
-          <a:noFill/>
-          <a:ln/>
-        </p:spPr>
-        <p:txBody>
-          <a:bodyPr wrap="square" lIns="0" tIns="0" rIns="0" bIns="0" rtlCol="0" anchor="t"/>
-          <a:lstStyle/>
-          <a:p>
-            <a:pPr algn="ctr" indent="0" marL="0">
-              <a:buNone/>
-            </a:pPr>
-            <a:r>
-              <a:rPr lang="en-US" sz="750" i="1" dirty="0">
-                <a:solidFill>
-                  <a:srgbClr val="94A3B8"/>
-                </a:solidFill>
-                <a:latin typeface="Calibri" pitchFamily="34" charset="0"/>
-                <a:ea typeface="Calibri" pitchFamily="34" charset="-122"/>
-                <a:cs typeface="Calibri" pitchFamily="34" charset="-120"/>
-              </a:rPr>
-              <a:t>/zh/</a:t>
-            </a:r>
-            <a:endParaRPr lang="en-US" sz="750" dirty="0"/>
-          </a:p>
-        </p:txBody>
-      </p:sp>
-      <p:sp>
-        <p:nvSpPr>
-          <p:cNvPr id="50" name="Shape 48"/>
-          <p:cNvSpPr/>
-          <p:nvPr/>
-        </p:nvSpPr>
-        <p:spPr>
-          <a:xfrm>
-            <a:off x="7447135" y="4169664"/>
-            <a:ext cx="685800" cy="384048"/>
-          </a:xfrm>
-          <a:prstGeom prst="rect">
-            <a:avLst>
-              <a:gd name="adj" fmla="val 9524"/>
-            </a:avLst>
-          </a:prstGeom>
-          <a:solidFill>
-            <a:srgbClr val="FFFFFF"/>
-          </a:solidFill>
-          <a:ln w="12700">
-            <a:solidFill>
-              <a:srgbClr val="DB2777"/>
-            </a:solidFill>
-            <a:prstDash val="solid"/>
-          </a:ln>
-        </p:spPr>
-      </p:sp>
-      <p:sp>
-        <p:nvSpPr>
-          <p:cNvPr id="51" name="Text 49"/>
-          <p:cNvSpPr/>
-          <p:nvPr/>
-        </p:nvSpPr>
-        <p:spPr>
-          <a:xfrm>
-            <a:off x="7447135" y="4169664"/>
+            <a:off x="7031736" y="4169664"/>
             <a:ext cx="685800" cy="384048"/>
           </a:xfrm>
           <a:prstGeom prst="rect">
@@ -17313,7 +17220,7 @@
                 <a:ea typeface="Calibri" pitchFamily="34" charset="-122"/>
                 <a:cs typeface="Calibri" pitchFamily="34" charset="-120"/>
               </a:rPr>
-              <a:t>After the </a:t>
+              <a:t>The </a:t>
             </a:r>
             <a:pPr algn="l" indent="0" marL="0">
               <a:buNone/>
@@ -17330,7 +17237,7 @@
                 <a:ea typeface="Calibri" pitchFamily="34" charset="-122"/>
                 <a:cs typeface="Calibri" pitchFamily="34" charset="-120"/>
               </a:rPr>
-              <a:t>disclosure</a:t>
+              <a:t>enclosure</a:t>
             </a:r>
             <a:pPr algn="l" indent="0" marL="0">
               <a:buNone/>
@@ -17344,7 +17251,7 @@
                 <a:ea typeface="Calibri" pitchFamily="34" charset="-122"/>
                 <a:cs typeface="Calibri" pitchFamily="34" charset="-120"/>
               </a:rPr>
-              <a:t> of the report, the </a:t>
+              <a:t> was carefully </a:t>
             </a:r>
             <a:pPr algn="l" indent="0" marL="0">
               <a:buNone/>
@@ -17361,7 +17268,7 @@
                 <a:ea typeface="Calibri" pitchFamily="34" charset="-122"/>
                 <a:cs typeface="Calibri" pitchFamily="34" charset="-120"/>
               </a:rPr>
-              <a:t>closure</a:t>
+              <a:t>enclosed</a:t>
             </a:r>
             <a:pPr algn="l" indent="0" marL="0">
               <a:buNone/>
@@ -17375,7 +17282,7 @@
                 <a:ea typeface="Calibri" pitchFamily="34" charset="-122"/>
                 <a:cs typeface="Calibri" pitchFamily="34" charset="-120"/>
               </a:rPr>
-              <a:t> of the old </a:t>
+              <a:t> with a new fence, but the </a:t>
             </a:r>
             <a:pPr algn="l" indent="0" marL="0">
               <a:buNone/>
@@ -17392,7 +17299,7 @@
                 <a:ea typeface="Calibri" pitchFamily="34" charset="-122"/>
                 <a:cs typeface="Calibri" pitchFamily="34" charset="-120"/>
               </a:rPr>
-              <a:t>enclosure</a:t>
+              <a:t>foreclosure</a:t>
             </a:r>
             <a:pPr algn="l" indent="0" marL="0">
               <a:buNone/>
@@ -17406,7 +17313,7 @@
                 <a:ea typeface="Calibri" pitchFamily="34" charset="-122"/>
                 <a:cs typeface="Calibri" pitchFamily="34" charset="-120"/>
               </a:rPr>
-              <a:t> was finally approved.</a:t>
+              <a:t> of the farm made everyone sad.</a:t>
             </a:r>
             <a:endParaRPr lang="en-US" sz="1800" dirty="0"/>
           </a:p>
@@ -17561,7 +17468,7 @@
                 <a:ea typeface="Trebuchet MS" pitchFamily="34" charset="-122"/>
                 <a:cs typeface="Trebuchet MS" pitchFamily="34" charset="-120"/>
               </a:rPr>
-              <a:t>disclosure</a:t>
+              <a:t>enclosure</a:t>
             </a:r>
             <a:endParaRPr lang="en-US" sz="1400" dirty="0"/>
           </a:p>
@@ -17689,7 +17596,7 @@
                 <a:ea typeface="Trebuchet MS" pitchFamily="34" charset="-122"/>
                 <a:cs typeface="Trebuchet MS" pitchFamily="34" charset="-120"/>
               </a:rPr>
-              <a:t>closure</a:t>
+              <a:t>enclosed</a:t>
             </a:r>
             <a:endParaRPr lang="en-US" sz="1400" dirty="0"/>
           </a:p>
@@ -17817,7 +17724,7 @@
                 <a:ea typeface="Trebuchet MS" pitchFamily="34" charset="-122"/>
                 <a:cs typeface="Trebuchet MS" pitchFamily="34" charset="-120"/>
               </a:rPr>
-              <a:t>enclosure</a:t>
+              <a:t>foreclosure</a:t>
             </a:r>
             <a:endParaRPr lang="en-US" sz="1400" dirty="0"/>
           </a:p>
@@ -18287,7 +18194,7 @@
                 <a:ea typeface="Trebuchet MS" pitchFamily="34" charset="-122"/>
                 <a:cs typeface="Trebuchet MS" pitchFamily="34" charset="-120"/>
               </a:rPr>
-              <a:t>disclosure</a:t>
+              <a:t>enclosure</a:t>
             </a:r>
             <a:endParaRPr lang="en-US" sz="2800" dirty="0"/>
           </a:p>
@@ -19114,7 +19021,7 @@
                 <a:ea typeface="Trebuchet MS" pitchFamily="34" charset="-122"/>
                 <a:cs typeface="Trebuchet MS" pitchFamily="34" charset="-120"/>
               </a:rPr>
-              <a:t>disclosure</a:t>
+              <a:t>enclosure</a:t>
             </a:r>
             <a:endParaRPr lang="en-US" sz="2800" dirty="0"/>
           </a:p>
@@ -19253,7 +19160,7 @@
                 <a:ea typeface="Trebuchet MS" pitchFamily="34" charset="-122"/>
                 <a:cs typeface="Trebuchet MS" pitchFamily="34" charset="-120"/>
               </a:rPr>
-              <a:t>dis</a:t>
+              <a:t>en</a:t>
             </a:r>
             <a:endParaRPr lang="en-US" sz="1300" dirty="0"/>
           </a:p>
@@ -19292,7 +19199,7 @@
                 <a:ea typeface="Calibri" pitchFamily="34" charset="-122"/>
                 <a:cs typeface="Calibri" pitchFamily="34" charset="-120"/>
               </a:rPr>
-              <a:t>away, apart, reveal</a:t>
+              <a:t>in, into, within</a:t>
             </a:r>
             <a:endParaRPr lang="en-US" sz="850" dirty="0"/>
           </a:p>
@@ -19516,7 +19423,7 @@
                 <a:ea typeface="Calibri" pitchFamily="34" charset="-122"/>
                 <a:cs typeface="Calibri" pitchFamily="34" charset="-120"/>
               </a:rPr>
-              <a:t>result or process of</a:t>
+              <a:t>act or result of</a:t>
             </a:r>
             <a:endParaRPr lang="en-US" sz="850" dirty="0"/>
           </a:p>
@@ -19524,7 +19431,46 @@
       </p:sp>
       <p:sp>
         <p:nvSpPr>
-          <p:cNvPr id="25" name="Shape 23"/>
+          <p:cNvPr id="25" name="Text 23"/>
+          <p:cNvSpPr/>
+          <p:nvPr/>
+        </p:nvSpPr>
+        <p:spPr>
+          <a:xfrm>
+            <a:off x="6519672" y="2752344"/>
+            <a:ext cx="1828800" cy="182880"/>
+          </a:xfrm>
+          <a:prstGeom prst="rect">
+            <a:avLst/>
+          </a:prstGeom>
+          <a:noFill/>
+          <a:ln/>
+        </p:spPr>
+        <p:txBody>
+          <a:bodyPr wrap="square" lIns="0" tIns="0" rIns="0" bIns="0" rtlCol="0" anchor="t"/>
+          <a:lstStyle/>
+          <a:p>
+            <a:pPr algn="ctr" indent="0" marL="0">
+              <a:buNone/>
+            </a:pPr>
+            <a:r>
+              <a:rPr lang="en-US" sz="700" i="1" dirty="0">
+                <a:solidFill>
+                  <a:srgbClr val="94A3B8"/>
+                </a:solidFill>
+                <a:latin typeface="Calibri" pitchFamily="34" charset="0"/>
+                <a:ea typeface="Calibri" pitchFamily="34" charset="-122"/>
+                <a:cs typeface="Calibri" pitchFamily="34" charset="-120"/>
+              </a:rPr>
+              <a:t>'e' dropped before vowel suffix</a:t>
+            </a:r>
+            <a:endParaRPr lang="en-US" sz="700" dirty="0"/>
+          </a:p>
+        </p:txBody>
+      </p:sp>
+      <p:sp>
+        <p:nvSpPr>
+          <p:cNvPr id="26" name="Shape 24"/>
           <p:cNvSpPr/>
           <p:nvPr/>
         </p:nvSpPr>
@@ -19551,7 +19497,7 @@
       </p:sp>
       <p:sp>
         <p:nvSpPr>
-          <p:cNvPr id="26" name="Text 24"/>
+          <p:cNvPr id="27" name="Text 25"/>
           <p:cNvSpPr/>
           <p:nvPr/>
         </p:nvSpPr>
@@ -19590,7 +19536,7 @@
       </p:sp>
       <p:sp>
         <p:nvSpPr>
-          <p:cNvPr id="27" name="Shape 25"/>
+          <p:cNvPr id="28" name="Shape 26"/>
           <p:cNvSpPr/>
           <p:nvPr/>
         </p:nvSpPr>
@@ -19617,7 +19563,7 @@
       </p:sp>
       <p:sp>
         <p:nvSpPr>
-          <p:cNvPr id="28" name="Text 26"/>
+          <p:cNvPr id="29" name="Text 27"/>
           <p:cNvSpPr/>
           <p:nvPr/>
         </p:nvSpPr>
@@ -19656,7 +19602,7 @@
       </p:sp>
       <p:sp>
         <p:nvSpPr>
-          <p:cNvPr id="29" name="Shape 27"/>
+          <p:cNvPr id="30" name="Shape 28"/>
           <p:cNvSpPr/>
           <p:nvPr/>
         </p:nvSpPr>
@@ -19683,7 +19629,7 @@
       </p:sp>
       <p:sp>
         <p:nvSpPr>
-          <p:cNvPr id="30" name="Text 28"/>
+          <p:cNvPr id="31" name="Text 29"/>
           <p:cNvSpPr/>
           <p:nvPr/>
         </p:nvSpPr>
@@ -19722,7 +19668,7 @@
       </p:sp>
       <p:sp>
         <p:nvSpPr>
-          <p:cNvPr id="31" name="Shape 29"/>
+          <p:cNvPr id="32" name="Shape 30"/>
           <p:cNvSpPr/>
           <p:nvPr/>
         </p:nvSpPr>
@@ -19749,7 +19695,7 @@
       </p:sp>
       <p:sp>
         <p:nvSpPr>
-          <p:cNvPr id="32" name="Text 30"/>
+          <p:cNvPr id="33" name="Text 31"/>
           <p:cNvSpPr/>
           <p:nvPr/>
         </p:nvSpPr>
@@ -20211,7 +20157,7 @@
                 <a:ea typeface="Trebuchet MS" pitchFamily="34" charset="-122"/>
                 <a:cs typeface="Trebuchet MS" pitchFamily="34" charset="-120"/>
               </a:rPr>
-              <a:t>disclosure</a:t>
+              <a:t>enclosure</a:t>
             </a:r>
             <a:endParaRPr lang="en-US" sz="2800" dirty="0"/>
           </a:p>
@@ -20350,7 +20296,7 @@
                 <a:ea typeface="Trebuchet MS" pitchFamily="34" charset="-122"/>
                 <a:cs typeface="Trebuchet MS" pitchFamily="34" charset="-120"/>
               </a:rPr>
-              <a:t>dis</a:t>
+              <a:t>en</a:t>
             </a:r>
             <a:endParaRPr lang="en-US" sz="1300" dirty="0"/>
           </a:p>
@@ -20389,7 +20335,7 @@
                 <a:ea typeface="Calibri" pitchFamily="34" charset="-122"/>
                 <a:cs typeface="Calibri" pitchFamily="34" charset="-120"/>
               </a:rPr>
-              <a:t>away, apart, reveal</a:t>
+              <a:t>in, into, within</a:t>
             </a:r>
             <a:endParaRPr lang="en-US" sz="850" dirty="0"/>
           </a:p>
@@ -20613,7 +20559,7 @@
                 <a:ea typeface="Calibri" pitchFamily="34" charset="-122"/>
                 <a:cs typeface="Calibri" pitchFamily="34" charset="-120"/>
               </a:rPr>
-              <a:t>result or process of</a:t>
+              <a:t>act or result of</a:t>
             </a:r>
             <a:endParaRPr lang="en-US" sz="850" dirty="0"/>
           </a:p>
@@ -20621,7 +20567,46 @@
       </p:sp>
       <p:sp>
         <p:nvSpPr>
-          <p:cNvPr id="25" name="Shape 23"/>
+          <p:cNvPr id="25" name="Text 23"/>
+          <p:cNvSpPr/>
+          <p:nvPr/>
+        </p:nvSpPr>
+        <p:spPr>
+          <a:xfrm>
+            <a:off x="6519672" y="2752344"/>
+            <a:ext cx="1828800" cy="182880"/>
+          </a:xfrm>
+          <a:prstGeom prst="rect">
+            <a:avLst/>
+          </a:prstGeom>
+          <a:noFill/>
+          <a:ln/>
+        </p:spPr>
+        <p:txBody>
+          <a:bodyPr wrap="square" lIns="0" tIns="0" rIns="0" bIns="0" rtlCol="0" anchor="t"/>
+          <a:lstStyle/>
+          <a:p>
+            <a:pPr algn="ctr" indent="0" marL="0">
+              <a:buNone/>
+            </a:pPr>
+            <a:r>
+              <a:rPr lang="en-US" sz="700" i="1" dirty="0">
+                <a:solidFill>
+                  <a:srgbClr val="94A3B8"/>
+                </a:solidFill>
+                <a:latin typeface="Calibri" pitchFamily="34" charset="0"/>
+                <a:ea typeface="Calibri" pitchFamily="34" charset="-122"/>
+                <a:cs typeface="Calibri" pitchFamily="34" charset="-120"/>
+              </a:rPr>
+              <a:t>'e' dropped before vowel suffix</a:t>
+            </a:r>
+            <a:endParaRPr lang="en-US" sz="700" dirty="0"/>
+          </a:p>
+        </p:txBody>
+      </p:sp>
+      <p:sp>
+        <p:nvSpPr>
+          <p:cNvPr id="26" name="Shape 24"/>
           <p:cNvSpPr/>
           <p:nvPr/>
         </p:nvSpPr>
@@ -20648,7 +20633,7 @@
       </p:sp>
       <p:sp>
         <p:nvSpPr>
-          <p:cNvPr id="26" name="Text 24"/>
+          <p:cNvPr id="27" name="Text 25"/>
           <p:cNvSpPr/>
           <p:nvPr/>
         </p:nvSpPr>
@@ -20687,7 +20672,7 @@
       </p:sp>
       <p:sp>
         <p:nvSpPr>
-          <p:cNvPr id="27" name="Shape 25"/>
+          <p:cNvPr id="28" name="Shape 26"/>
           <p:cNvSpPr/>
           <p:nvPr/>
         </p:nvSpPr>
@@ -20714,7 +20699,7 @@
       </p:sp>
       <p:sp>
         <p:nvSpPr>
-          <p:cNvPr id="28" name="Shape 26"/>
+          <p:cNvPr id="29" name="Shape 27"/>
           <p:cNvSpPr/>
           <p:nvPr/>
         </p:nvSpPr>
@@ -20741,7 +20726,7 @@
       </p:sp>
       <p:sp>
         <p:nvSpPr>
-          <p:cNvPr id="29" name="Text 27"/>
+          <p:cNvPr id="30" name="Text 28"/>
           <p:cNvSpPr/>
           <p:nvPr/>
         </p:nvSpPr>
@@ -20772,7 +20757,7 @@
                 <a:ea typeface="Trebuchet MS" pitchFamily="34" charset="-122"/>
                 <a:cs typeface="Trebuchet MS" pitchFamily="34" charset="-120"/>
               </a:rPr>
-              <a:t>dis</a:t>
+              <a:t>en</a:t>
             </a:r>
             <a:endParaRPr lang="en-US" sz="1400" dirty="0"/>
           </a:p>
@@ -20780,7 +20765,7 @@
       </p:sp>
       <p:sp>
         <p:nvSpPr>
-          <p:cNvPr id="30" name="Text 28"/>
+          <p:cNvPr id="31" name="Text 29"/>
           <p:cNvSpPr/>
           <p:nvPr/>
         </p:nvSpPr>
@@ -20819,7 +20804,7 @@
       </p:sp>
       <p:sp>
         <p:nvSpPr>
-          <p:cNvPr id="31" name="Shape 29"/>
+          <p:cNvPr id="32" name="Shape 30"/>
           <p:cNvSpPr/>
           <p:nvPr/>
         </p:nvSpPr>
@@ -20846,7 +20831,7 @@
       </p:sp>
       <p:sp>
         <p:nvSpPr>
-          <p:cNvPr id="32" name="Text 30"/>
+          <p:cNvPr id="33" name="Text 31"/>
           <p:cNvSpPr/>
           <p:nvPr/>
         </p:nvSpPr>
@@ -20885,7 +20870,7 @@
       </p:sp>
       <p:sp>
         <p:nvSpPr>
-          <p:cNvPr id="33" name="Text 31"/>
+          <p:cNvPr id="34" name="Text 32"/>
           <p:cNvSpPr/>
           <p:nvPr/>
         </p:nvSpPr>
@@ -20924,7 +20909,7 @@
       </p:sp>
       <p:sp>
         <p:nvSpPr>
-          <p:cNvPr id="34" name="Shape 32"/>
+          <p:cNvPr id="35" name="Shape 33"/>
           <p:cNvSpPr/>
           <p:nvPr/>
         </p:nvSpPr>
@@ -20951,7 +20936,7 @@
       </p:sp>
       <p:sp>
         <p:nvSpPr>
-          <p:cNvPr id="35" name="Text 33"/>
+          <p:cNvPr id="36" name="Text 34"/>
           <p:cNvSpPr/>
           <p:nvPr/>
         </p:nvSpPr>
@@ -20990,7 +20975,7 @@
       </p:sp>
       <p:sp>
         <p:nvSpPr>
-          <p:cNvPr id="36" name="Shape 34"/>
+          <p:cNvPr id="37" name="Shape 35"/>
           <p:cNvSpPr/>
           <p:nvPr/>
         </p:nvSpPr>
@@ -21017,7 +21002,7 @@
       </p:sp>
       <p:sp>
         <p:nvSpPr>
-          <p:cNvPr id="37" name="Text 35"/>
+          <p:cNvPr id="38" name="Text 36"/>
           <p:cNvSpPr/>
           <p:nvPr/>
         </p:nvSpPr>
@@ -21056,7 +21041,7 @@
       </p:sp>
       <p:sp>
         <p:nvSpPr>
-          <p:cNvPr id="38" name="Shape 36"/>
+          <p:cNvPr id="39" name="Shape 37"/>
           <p:cNvSpPr/>
           <p:nvPr/>
         </p:nvSpPr>
@@ -21083,7 +21068,7 @@
       </p:sp>
       <p:sp>
         <p:nvSpPr>
-          <p:cNvPr id="39" name="Text 37"/>
+          <p:cNvPr id="40" name="Text 38"/>
           <p:cNvSpPr/>
           <p:nvPr/>
         </p:nvSpPr>
@@ -21545,7 +21530,7 @@
                 <a:ea typeface="Trebuchet MS" pitchFamily="34" charset="-122"/>
                 <a:cs typeface="Trebuchet MS" pitchFamily="34" charset="-120"/>
               </a:rPr>
-              <a:t>disclosure</a:t>
+              <a:t>enclosure</a:t>
             </a:r>
             <a:endParaRPr lang="en-US" sz="2800" dirty="0"/>
           </a:p>
@@ -21684,7 +21669,7 @@
                 <a:ea typeface="Trebuchet MS" pitchFamily="34" charset="-122"/>
                 <a:cs typeface="Trebuchet MS" pitchFamily="34" charset="-120"/>
               </a:rPr>
-              <a:t>dis</a:t>
+              <a:t>en</a:t>
             </a:r>
             <a:endParaRPr lang="en-US" sz="1300" dirty="0"/>
           </a:p>
@@ -21723,7 +21708,7 @@
                 <a:ea typeface="Calibri" pitchFamily="34" charset="-122"/>
                 <a:cs typeface="Calibri" pitchFamily="34" charset="-120"/>
               </a:rPr>
-              <a:t>away, apart, reveal</a:t>
+              <a:t>in, into, within</a:t>
             </a:r>
             <a:endParaRPr lang="en-US" sz="850" dirty="0"/>
           </a:p>
@@ -21947,7 +21932,7 @@
                 <a:ea typeface="Calibri" pitchFamily="34" charset="-122"/>
                 <a:cs typeface="Calibri" pitchFamily="34" charset="-120"/>
               </a:rPr>
-              <a:t>result or process of</a:t>
+              <a:t>act or result of</a:t>
             </a:r>
             <a:endParaRPr lang="en-US" sz="850" dirty="0"/>
           </a:p>
@@ -21955,7 +21940,46 @@
       </p:sp>
       <p:sp>
         <p:nvSpPr>
-          <p:cNvPr id="25" name="Shape 23"/>
+          <p:cNvPr id="25" name="Text 23"/>
+          <p:cNvSpPr/>
+          <p:nvPr/>
+        </p:nvSpPr>
+        <p:spPr>
+          <a:xfrm>
+            <a:off x="6519672" y="2752344"/>
+            <a:ext cx="1828800" cy="182880"/>
+          </a:xfrm>
+          <a:prstGeom prst="rect">
+            <a:avLst/>
+          </a:prstGeom>
+          <a:noFill/>
+          <a:ln/>
+        </p:spPr>
+        <p:txBody>
+          <a:bodyPr wrap="square" lIns="0" tIns="0" rIns="0" bIns="0" rtlCol="0" anchor="t"/>
+          <a:lstStyle/>
+          <a:p>
+            <a:pPr algn="ctr" indent="0" marL="0">
+              <a:buNone/>
+            </a:pPr>
+            <a:r>
+              <a:rPr lang="en-US" sz="700" i="1" dirty="0">
+                <a:solidFill>
+                  <a:srgbClr val="94A3B8"/>
+                </a:solidFill>
+                <a:latin typeface="Calibri" pitchFamily="34" charset="0"/>
+                <a:ea typeface="Calibri" pitchFamily="34" charset="-122"/>
+                <a:cs typeface="Calibri" pitchFamily="34" charset="-120"/>
+              </a:rPr>
+              <a:t>'e' dropped before vowel suffix</a:t>
+            </a:r>
+            <a:endParaRPr lang="en-US" sz="700" dirty="0"/>
+          </a:p>
+        </p:txBody>
+      </p:sp>
+      <p:sp>
+        <p:nvSpPr>
+          <p:cNvPr id="26" name="Shape 24"/>
           <p:cNvSpPr/>
           <p:nvPr/>
         </p:nvSpPr>
@@ -21982,7 +22006,7 @@
       </p:sp>
       <p:sp>
         <p:nvSpPr>
-          <p:cNvPr id="26" name="Text 24"/>
+          <p:cNvPr id="27" name="Text 25"/>
           <p:cNvSpPr/>
           <p:nvPr/>
         </p:nvSpPr>
@@ -22021,7 +22045,7 @@
       </p:sp>
       <p:sp>
         <p:nvSpPr>
-          <p:cNvPr id="27" name="Shape 25"/>
+          <p:cNvPr id="28" name="Shape 26"/>
           <p:cNvSpPr/>
           <p:nvPr/>
         </p:nvSpPr>
@@ -22048,7 +22072,7 @@
       </p:sp>
       <p:sp>
         <p:nvSpPr>
-          <p:cNvPr id="28" name="Shape 26"/>
+          <p:cNvPr id="29" name="Shape 27"/>
           <p:cNvSpPr/>
           <p:nvPr/>
         </p:nvSpPr>
@@ -22075,7 +22099,7 @@
       </p:sp>
       <p:sp>
         <p:nvSpPr>
-          <p:cNvPr id="29" name="Text 27"/>
+          <p:cNvPr id="30" name="Text 28"/>
           <p:cNvSpPr/>
           <p:nvPr/>
         </p:nvSpPr>
@@ -22106,7 +22130,7 @@
                 <a:ea typeface="Trebuchet MS" pitchFamily="34" charset="-122"/>
                 <a:cs typeface="Trebuchet MS" pitchFamily="34" charset="-120"/>
               </a:rPr>
-              <a:t>dis</a:t>
+              <a:t>en</a:t>
             </a:r>
             <a:endParaRPr lang="en-US" sz="1400" dirty="0"/>
           </a:p>
@@ -22114,7 +22138,7 @@
       </p:sp>
       <p:sp>
         <p:nvSpPr>
-          <p:cNvPr id="30" name="Text 28"/>
+          <p:cNvPr id="31" name="Text 29"/>
           <p:cNvSpPr/>
           <p:nvPr/>
         </p:nvSpPr>
@@ -22153,7 +22177,7 @@
       </p:sp>
       <p:sp>
         <p:nvSpPr>
-          <p:cNvPr id="31" name="Shape 29"/>
+          <p:cNvPr id="32" name="Shape 30"/>
           <p:cNvSpPr/>
           <p:nvPr/>
         </p:nvSpPr>
@@ -22180,7 +22204,7 @@
       </p:sp>
       <p:sp>
         <p:nvSpPr>
-          <p:cNvPr id="32" name="Text 30"/>
+          <p:cNvPr id="33" name="Text 31"/>
           <p:cNvSpPr/>
           <p:nvPr/>
         </p:nvSpPr>
@@ -22219,7 +22243,7 @@
       </p:sp>
       <p:sp>
         <p:nvSpPr>
-          <p:cNvPr id="33" name="Text 31"/>
+          <p:cNvPr id="34" name="Text 32"/>
           <p:cNvSpPr/>
           <p:nvPr/>
         </p:nvSpPr>
@@ -22258,7 +22282,7 @@
       </p:sp>
       <p:sp>
         <p:nvSpPr>
-          <p:cNvPr id="34" name="Shape 32"/>
+          <p:cNvPr id="35" name="Shape 33"/>
           <p:cNvSpPr/>
           <p:nvPr/>
         </p:nvSpPr>
@@ -22285,7 +22309,7 @@
       </p:sp>
       <p:sp>
         <p:nvSpPr>
-          <p:cNvPr id="35" name="Text 33"/>
+          <p:cNvPr id="36" name="Text 34"/>
           <p:cNvSpPr/>
           <p:nvPr/>
         </p:nvSpPr>
@@ -22324,7 +22348,7 @@
       </p:sp>
       <p:sp>
         <p:nvSpPr>
-          <p:cNvPr id="36" name="Shape 34"/>
+          <p:cNvPr id="37" name="Shape 35"/>
           <p:cNvSpPr/>
           <p:nvPr/>
         </p:nvSpPr>
@@ -22351,7 +22375,7 @@
       </p:sp>
       <p:sp>
         <p:nvSpPr>
-          <p:cNvPr id="37" name="Text 35"/>
+          <p:cNvPr id="38" name="Text 36"/>
           <p:cNvSpPr/>
           <p:nvPr/>
         </p:nvSpPr>
@@ -22390,7 +22414,7 @@
       </p:sp>
       <p:sp>
         <p:nvSpPr>
-          <p:cNvPr id="38" name="Shape 36"/>
+          <p:cNvPr id="39" name="Shape 37"/>
           <p:cNvSpPr/>
           <p:nvPr/>
         </p:nvSpPr>
@@ -22417,13 +22441,13 @@
       </p:sp>
       <p:sp>
         <p:nvSpPr>
-          <p:cNvPr id="39" name="Shape 37"/>
-          <p:cNvSpPr/>
-          <p:nvPr/>
-        </p:nvSpPr>
-        <p:spPr>
-          <a:xfrm>
-            <a:off x="2124837" y="4169664"/>
+          <p:cNvPr id="40" name="Shape 38"/>
+          <p:cNvSpPr/>
+          <p:nvPr/>
+        </p:nvSpPr>
+        <p:spPr>
+          <a:xfrm>
+            <a:off x="2254649" y="4169664"/>
             <a:ext cx="685800" cy="384048"/>
           </a:xfrm>
           <a:prstGeom prst="rect">
@@ -22444,13 +22468,13 @@
       </p:sp>
       <p:sp>
         <p:nvSpPr>
-          <p:cNvPr id="40" name="Text 38"/>
-          <p:cNvSpPr/>
-          <p:nvPr/>
-        </p:nvSpPr>
-        <p:spPr>
-          <a:xfrm>
-            <a:off x="2124837" y="4169664"/>
+          <p:cNvPr id="41" name="Text 39"/>
+          <p:cNvSpPr/>
+          <p:nvPr/>
+        </p:nvSpPr>
+        <p:spPr>
+          <a:xfrm>
+            <a:off x="2254649" y="4169664"/>
             <a:ext cx="685800" cy="384048"/>
           </a:xfrm>
           <a:prstGeom prst="rect">
@@ -22475,7 +22499,7 @@
                 <a:ea typeface="Trebuchet MS" pitchFamily="34" charset="-122"/>
                 <a:cs typeface="Trebuchet MS" pitchFamily="34" charset="-120"/>
               </a:rPr>
-              <a:t>d</a:t>
+              <a:t>e</a:t>
             </a:r>
             <a:endParaRPr lang="en-US" sz="900" dirty="0"/>
           </a:p>
@@ -22483,13 +22507,13 @@
       </p:sp>
       <p:sp>
         <p:nvSpPr>
-          <p:cNvPr id="41" name="Shape 39"/>
-          <p:cNvSpPr/>
-          <p:nvPr/>
-        </p:nvSpPr>
-        <p:spPr>
-          <a:xfrm>
-            <a:off x="3033522" y="4169664"/>
+          <p:cNvPr id="42" name="Shape 40"/>
+          <p:cNvSpPr/>
+          <p:nvPr/>
+        </p:nvSpPr>
+        <p:spPr>
+          <a:xfrm>
+            <a:off x="3293146" y="4169664"/>
             <a:ext cx="685800" cy="384048"/>
           </a:xfrm>
           <a:prstGeom prst="rect">
@@ -22510,13 +22534,13 @@
       </p:sp>
       <p:sp>
         <p:nvSpPr>
-          <p:cNvPr id="42" name="Text 40"/>
-          <p:cNvSpPr/>
-          <p:nvPr/>
-        </p:nvSpPr>
-        <p:spPr>
-          <a:xfrm>
-            <a:off x="3033522" y="4169664"/>
+          <p:cNvPr id="43" name="Text 41"/>
+          <p:cNvSpPr/>
+          <p:nvPr/>
+        </p:nvSpPr>
+        <p:spPr>
+          <a:xfrm>
+            <a:off x="3293146" y="4169664"/>
             <a:ext cx="685800" cy="384048"/>
           </a:xfrm>
           <a:prstGeom prst="rect">
@@ -22541,7 +22565,7 @@
                 <a:ea typeface="Trebuchet MS" pitchFamily="34" charset="-122"/>
                 <a:cs typeface="Trebuchet MS" pitchFamily="34" charset="-120"/>
               </a:rPr>
-              <a:t>i</a:t>
+              <a:t>n</a:t>
             </a:r>
             <a:endParaRPr lang="en-US" sz="900" dirty="0"/>
           </a:p>
@@ -22549,13 +22573,13 @@
       </p:sp>
       <p:sp>
         <p:nvSpPr>
-          <p:cNvPr id="43" name="Shape 41"/>
-          <p:cNvSpPr/>
-          <p:nvPr/>
-        </p:nvSpPr>
-        <p:spPr>
-          <a:xfrm>
-            <a:off x="3942207" y="4169664"/>
+          <p:cNvPr id="44" name="Shape 42"/>
+          <p:cNvSpPr/>
+          <p:nvPr/>
+        </p:nvSpPr>
+        <p:spPr>
+          <a:xfrm>
+            <a:off x="4331643" y="4169664"/>
             <a:ext cx="685800" cy="384048"/>
           </a:xfrm>
           <a:prstGeom prst="rect">
@@ -22576,13 +22600,13 @@
       </p:sp>
       <p:sp>
         <p:nvSpPr>
-          <p:cNvPr id="44" name="Text 42"/>
-          <p:cNvSpPr/>
-          <p:nvPr/>
-        </p:nvSpPr>
-        <p:spPr>
-          <a:xfrm>
-            <a:off x="3942207" y="4169664"/>
+          <p:cNvPr id="45" name="Text 43"/>
+          <p:cNvSpPr/>
+          <p:nvPr/>
+        </p:nvSpPr>
+        <p:spPr>
+          <a:xfrm>
+            <a:off x="4331643" y="4169664"/>
             <a:ext cx="685800" cy="384048"/>
           </a:xfrm>
           <a:prstGeom prst="rect">
@@ -22607,7 +22631,7 @@
                 <a:ea typeface="Trebuchet MS" pitchFamily="34" charset="-122"/>
                 <a:cs typeface="Trebuchet MS" pitchFamily="34" charset="-120"/>
               </a:rPr>
-              <a:t>s</a:t>
+              <a:t>cl</a:t>
             </a:r>
             <a:endParaRPr lang="en-US" sz="900" dirty="0"/>
           </a:p>
@@ -22615,13 +22639,13 @@
       </p:sp>
       <p:sp>
         <p:nvSpPr>
-          <p:cNvPr id="45" name="Shape 43"/>
-          <p:cNvSpPr/>
-          <p:nvPr/>
-        </p:nvSpPr>
-        <p:spPr>
-          <a:xfrm>
-            <a:off x="4850892" y="4169664"/>
+          <p:cNvPr id="46" name="Shape 44"/>
+          <p:cNvSpPr/>
+          <p:nvPr/>
+        </p:nvSpPr>
+        <p:spPr>
+          <a:xfrm>
+            <a:off x="5370141" y="4169664"/>
             <a:ext cx="685800" cy="384048"/>
           </a:xfrm>
           <a:prstGeom prst="rect">
@@ -22642,13 +22666,13 @@
       </p:sp>
       <p:sp>
         <p:nvSpPr>
-          <p:cNvPr id="46" name="Text 44"/>
-          <p:cNvSpPr/>
-          <p:nvPr/>
-        </p:nvSpPr>
-        <p:spPr>
-          <a:xfrm>
-            <a:off x="4850892" y="4169664"/>
+          <p:cNvPr id="47" name="Text 45"/>
+          <p:cNvSpPr/>
+          <p:nvPr/>
+        </p:nvSpPr>
+        <p:spPr>
+          <a:xfrm>
+            <a:off x="5370141" y="4169664"/>
             <a:ext cx="685800" cy="384048"/>
           </a:xfrm>
           <a:prstGeom prst="rect">
@@ -22673,7 +22697,7 @@
                 <a:ea typeface="Trebuchet MS" pitchFamily="34" charset="-122"/>
                 <a:cs typeface="Trebuchet MS" pitchFamily="34" charset="-120"/>
               </a:rPr>
-              <a:t>cl</a:t>
+              <a:t>o</a:t>
             </a:r>
             <a:endParaRPr lang="en-US" sz="900" dirty="0"/>
           </a:p>
@@ -22681,13 +22705,13 @@
       </p:sp>
       <p:sp>
         <p:nvSpPr>
-          <p:cNvPr id="47" name="Shape 45"/>
-          <p:cNvSpPr/>
-          <p:nvPr/>
-        </p:nvSpPr>
-        <p:spPr>
-          <a:xfrm>
-            <a:off x="5759577" y="4169664"/>
+          <p:cNvPr id="48" name="Shape 46"/>
+          <p:cNvSpPr/>
+          <p:nvPr/>
+        </p:nvSpPr>
+        <p:spPr>
+          <a:xfrm>
+            <a:off x="6408638" y="4169664"/>
             <a:ext cx="685800" cy="384048"/>
           </a:xfrm>
           <a:prstGeom prst="rect">
@@ -22708,13 +22732,13 @@
       </p:sp>
       <p:sp>
         <p:nvSpPr>
-          <p:cNvPr id="48" name="Text 46"/>
-          <p:cNvSpPr/>
-          <p:nvPr/>
-        </p:nvSpPr>
-        <p:spPr>
-          <a:xfrm>
-            <a:off x="5759577" y="4169664"/>
+          <p:cNvPr id="49" name="Text 47"/>
+          <p:cNvSpPr/>
+          <p:nvPr/>
+        </p:nvSpPr>
+        <p:spPr>
+          <a:xfrm>
+            <a:off x="6408638" y="4169664"/>
             <a:ext cx="685800" cy="384048"/>
           </a:xfrm>
           <a:prstGeom prst="rect">
@@ -22739,7 +22763,7 @@
                 <a:ea typeface="Trebuchet MS" pitchFamily="34" charset="-122"/>
                 <a:cs typeface="Trebuchet MS" pitchFamily="34" charset="-120"/>
               </a:rPr>
-              <a:t>o</a:t>
+              <a:t>s</a:t>
             </a:r>
             <a:endParaRPr lang="en-US" sz="900" dirty="0"/>
           </a:p>
@@ -22747,13 +22771,52 @@
       </p:sp>
       <p:sp>
         <p:nvSpPr>
-          <p:cNvPr id="49" name="Shape 47"/>
-          <p:cNvSpPr/>
-          <p:nvPr/>
-        </p:nvSpPr>
-        <p:spPr>
-          <a:xfrm>
-            <a:off x="6668262" y="4169664"/>
+          <p:cNvPr id="50" name="Text 48"/>
+          <p:cNvSpPr/>
+          <p:nvPr/>
+        </p:nvSpPr>
+        <p:spPr>
+          <a:xfrm>
+            <a:off x="6408638" y="4572000"/>
+            <a:ext cx="685800" cy="219456"/>
+          </a:xfrm>
+          <a:prstGeom prst="rect">
+            <a:avLst/>
+          </a:prstGeom>
+          <a:noFill/>
+          <a:ln/>
+        </p:spPr>
+        <p:txBody>
+          <a:bodyPr wrap="square" lIns="0" tIns="0" rIns="0" bIns="0" rtlCol="0" anchor="t"/>
+          <a:lstStyle/>
+          <a:p>
+            <a:pPr algn="ctr" indent="0" marL="0">
+              <a:buNone/>
+            </a:pPr>
+            <a:r>
+              <a:rPr lang="en-US" sz="750" i="1" dirty="0">
+                <a:solidFill>
+                  <a:srgbClr val="94A3B8"/>
+                </a:solidFill>
+                <a:latin typeface="Calibri" pitchFamily="34" charset="0"/>
+                <a:ea typeface="Calibri" pitchFamily="34" charset="-122"/>
+                <a:cs typeface="Calibri" pitchFamily="34" charset="-120"/>
+              </a:rPr>
+              <a:t>/zh/</a:t>
+            </a:r>
+            <a:endParaRPr lang="en-US" sz="750" dirty="0"/>
+          </a:p>
+        </p:txBody>
+      </p:sp>
+      <p:sp>
+        <p:nvSpPr>
+          <p:cNvPr id="51" name="Shape 49"/>
+          <p:cNvSpPr/>
+          <p:nvPr/>
+        </p:nvSpPr>
+        <p:spPr>
+          <a:xfrm>
+            <a:off x="7447135" y="4169664"/>
             <a:ext cx="685800" cy="384048"/>
           </a:xfrm>
           <a:prstGeom prst="rect">
@@ -22774,118 +22837,13 @@
       </p:sp>
       <p:sp>
         <p:nvSpPr>
-          <p:cNvPr id="50" name="Text 48"/>
-          <p:cNvSpPr/>
-          <p:nvPr/>
-        </p:nvSpPr>
-        <p:spPr>
-          <a:xfrm>
-            <a:off x="6668262" y="4169664"/>
-            <a:ext cx="685800" cy="384048"/>
-          </a:xfrm>
-          <a:prstGeom prst="rect">
-            <a:avLst/>
-          </a:prstGeom>
-          <a:noFill/>
-          <a:ln/>
-        </p:spPr>
-        <p:txBody>
-          <a:bodyPr wrap="square" lIns="0" tIns="0" rIns="0" bIns="0" rtlCol="0" anchor="ctr"/>
-          <a:lstStyle/>
-          <a:p>
-            <a:pPr algn="ctr" indent="0" marL="0">
-              <a:buNone/>
-            </a:pPr>
-            <a:r>
-              <a:rPr lang="en-US" sz="900" b="1" dirty="0">
-                <a:solidFill>
-                  <a:srgbClr val="9D174D"/>
-                </a:solidFill>
-                <a:latin typeface="Trebuchet MS" pitchFamily="34" charset="0"/>
-                <a:ea typeface="Trebuchet MS" pitchFamily="34" charset="-122"/>
-                <a:cs typeface="Trebuchet MS" pitchFamily="34" charset="-120"/>
-              </a:rPr>
-              <a:t>s</a:t>
-            </a:r>
-            <a:endParaRPr lang="en-US" sz="900" dirty="0"/>
-          </a:p>
-        </p:txBody>
-      </p:sp>
-      <p:sp>
-        <p:nvSpPr>
-          <p:cNvPr id="51" name="Text 49"/>
-          <p:cNvSpPr/>
-          <p:nvPr/>
-        </p:nvSpPr>
-        <p:spPr>
-          <a:xfrm>
-            <a:off x="6668262" y="4572000"/>
-            <a:ext cx="685800" cy="219456"/>
-          </a:xfrm>
-          <a:prstGeom prst="rect">
-            <a:avLst/>
-          </a:prstGeom>
-          <a:noFill/>
-          <a:ln/>
-        </p:spPr>
-        <p:txBody>
-          <a:bodyPr wrap="square" lIns="0" tIns="0" rIns="0" bIns="0" rtlCol="0" anchor="t"/>
-          <a:lstStyle/>
-          <a:p>
-            <a:pPr algn="ctr" indent="0" marL="0">
-              <a:buNone/>
-            </a:pPr>
-            <a:r>
-              <a:rPr lang="en-US" sz="750" i="1" dirty="0">
-                <a:solidFill>
-                  <a:srgbClr val="94A3B8"/>
-                </a:solidFill>
-                <a:latin typeface="Calibri" pitchFamily="34" charset="0"/>
-                <a:ea typeface="Calibri" pitchFamily="34" charset="-122"/>
-                <a:cs typeface="Calibri" pitchFamily="34" charset="-120"/>
-              </a:rPr>
-              <a:t>/zh/</a:t>
-            </a:r>
-            <a:endParaRPr lang="en-US" sz="750" dirty="0"/>
-          </a:p>
-        </p:txBody>
-      </p:sp>
-      <p:sp>
-        <p:nvSpPr>
-          <p:cNvPr id="52" name="Shape 50"/>
-          <p:cNvSpPr/>
-          <p:nvPr/>
-        </p:nvSpPr>
-        <p:spPr>
-          <a:xfrm>
-            <a:off x="7576947" y="4169664"/>
-            <a:ext cx="685800" cy="384048"/>
-          </a:xfrm>
-          <a:prstGeom prst="rect">
-            <a:avLst>
-              <a:gd name="adj" fmla="val 9524"/>
-            </a:avLst>
-          </a:prstGeom>
-          <a:solidFill>
-            <a:srgbClr val="FFFFFF"/>
-          </a:solidFill>
-          <a:ln w="12700">
-            <a:solidFill>
-              <a:srgbClr val="DB2777"/>
-            </a:solidFill>
-            <a:prstDash val="solid"/>
-          </a:ln>
-        </p:spPr>
-      </p:sp>
-      <p:sp>
-        <p:nvSpPr>
-          <p:cNvPr id="53" name="Text 51"/>
-          <p:cNvSpPr/>
-          <p:nvPr/>
-        </p:nvSpPr>
-        <p:spPr>
-          <a:xfrm>
-            <a:off x="7576947" y="4169664"/>
+          <p:cNvPr id="52" name="Text 50"/>
+          <p:cNvSpPr/>
+          <p:nvPr/>
+        </p:nvSpPr>
+        <p:spPr>
+          <a:xfrm>
+            <a:off x="7447135" y="4169664"/>
             <a:ext cx="685800" cy="384048"/>
           </a:xfrm>
           <a:prstGeom prst="rect">
@@ -23341,7 +23299,7 @@
                 <a:ea typeface="Trebuchet MS" pitchFamily="34" charset="-122"/>
                 <a:cs typeface="Trebuchet MS" pitchFamily="34" charset="-120"/>
               </a:rPr>
-              <a:t>closure</a:t>
+              <a:t>enclosed</a:t>
             </a:r>
             <a:endParaRPr lang="en-US" sz="2800" dirty="0"/>
           </a:p>
@@ -24168,7 +24126,7 @@
                 <a:ea typeface="Trebuchet MS" pitchFamily="34" charset="-122"/>
                 <a:cs typeface="Trebuchet MS" pitchFamily="34" charset="-120"/>
               </a:rPr>
-              <a:t>closure</a:t>
+              <a:t>enclosed</a:t>
             </a:r>
             <a:endParaRPr lang="en-US" sz="2800" dirty="0"/>
           </a:p>
@@ -24248,7 +24206,7 @@
         </p:nvSpPr>
         <p:spPr>
           <a:xfrm>
-            <a:off x="2938272" y="2258568"/>
+            <a:off x="2221992" y="2258568"/>
             <a:ext cx="1828800" cy="292608"/>
           </a:xfrm>
           <a:prstGeom prst="rect">
@@ -24257,11 +24215,11 @@
             </a:avLst>
           </a:prstGeom>
           <a:solidFill>
-            <a:srgbClr val="CCFBF1"/>
+            <a:srgbClr val="DDD6FE"/>
           </a:solidFill>
           <a:ln w="19050">
             <a:solidFill>
-              <a:srgbClr val="0D9488"/>
+              <a:srgbClr val="7C3AED"/>
             </a:solidFill>
             <a:prstDash val="solid"/>
           </a:ln>
@@ -24282,7 +24240,7 @@
         </p:nvSpPr>
         <p:spPr>
           <a:xfrm>
-            <a:off x="2938272" y="2258568"/>
+            <a:off x="2221992" y="2258568"/>
             <a:ext cx="1828800" cy="292608"/>
           </a:xfrm>
           <a:prstGeom prst="rect">
@@ -24301,13 +24259,13 @@
             <a:r>
               <a:rPr lang="en-US" sz="1300" b="1" dirty="0">
                 <a:solidFill>
-                  <a:srgbClr val="0F766E"/>
+                  <a:srgbClr val="4C1D95"/>
                 </a:solidFill>
                 <a:latin typeface="Trebuchet MS" pitchFamily="34" charset="0"/>
                 <a:ea typeface="Trebuchet MS" pitchFamily="34" charset="-122"/>
                 <a:cs typeface="Trebuchet MS" pitchFamily="34" charset="-120"/>
               </a:rPr>
-              <a:t>clos</a:t>
+              <a:t>en</a:t>
             </a:r>
             <a:endParaRPr lang="en-US" sz="1300" dirty="0"/>
           </a:p>
@@ -24321,7 +24279,7 @@
         </p:nvSpPr>
         <p:spPr>
           <a:xfrm>
-            <a:off x="2938272" y="2569464"/>
+            <a:off x="2221992" y="2569464"/>
             <a:ext cx="1828800" cy="201168"/>
           </a:xfrm>
           <a:prstGeom prst="rect">
@@ -24346,7 +24304,7 @@
                 <a:ea typeface="Calibri" pitchFamily="34" charset="-122"/>
                 <a:cs typeface="Calibri" pitchFamily="34" charset="-120"/>
               </a:rPr>
-              <a:t>shut, close</a:t>
+              <a:t>in, into, within</a:t>
             </a:r>
             <a:endParaRPr lang="en-US" sz="850" dirty="0"/>
           </a:p>
@@ -24360,7 +24318,7 @@
         </p:nvSpPr>
         <p:spPr>
           <a:xfrm>
-            <a:off x="5803392" y="2258568"/>
+            <a:off x="4370832" y="2258568"/>
             <a:ext cx="1828800" cy="292608"/>
           </a:xfrm>
           <a:prstGeom prst="rect">
@@ -24369,11 +24327,11 @@
             </a:avLst>
           </a:prstGeom>
           <a:solidFill>
-            <a:srgbClr val="FCE7F3"/>
+            <a:srgbClr val="CCFBF1"/>
           </a:solidFill>
           <a:ln w="19050">
             <a:solidFill>
-              <a:srgbClr val="DB2777"/>
+              <a:srgbClr val="0D9488"/>
             </a:solidFill>
             <a:prstDash val="solid"/>
           </a:ln>
@@ -24394,7 +24352,7 @@
         </p:nvSpPr>
         <p:spPr>
           <a:xfrm>
-            <a:off x="5803392" y="2258568"/>
+            <a:off x="4370832" y="2258568"/>
             <a:ext cx="1828800" cy="292608"/>
           </a:xfrm>
           <a:prstGeom prst="rect">
@@ -24413,13 +24371,13 @@
             <a:r>
               <a:rPr lang="en-US" sz="1300" b="1" dirty="0">
                 <a:solidFill>
-                  <a:srgbClr val="9D174D"/>
+                  <a:srgbClr val="0F766E"/>
                 </a:solidFill>
                 <a:latin typeface="Trebuchet MS" pitchFamily="34" charset="0"/>
                 <a:ea typeface="Trebuchet MS" pitchFamily="34" charset="-122"/>
                 <a:cs typeface="Trebuchet MS" pitchFamily="34" charset="-120"/>
               </a:rPr>
-              <a:t>ure</a:t>
+              <a:t>clos</a:t>
             </a:r>
             <a:endParaRPr lang="en-US" sz="1300" dirty="0"/>
           </a:p>
@@ -24433,7 +24391,7 @@
         </p:nvSpPr>
         <p:spPr>
           <a:xfrm>
-            <a:off x="5803392" y="2569464"/>
+            <a:off x="4370832" y="2569464"/>
             <a:ext cx="1828800" cy="201168"/>
           </a:xfrm>
           <a:prstGeom prst="rect">
@@ -24458,7 +24416,7 @@
                 <a:ea typeface="Calibri" pitchFamily="34" charset="-122"/>
                 <a:cs typeface="Calibri" pitchFamily="34" charset="-120"/>
               </a:rPr>
-              <a:t>result or process of</a:t>
+              <a:t>shut, close</a:t>
             </a:r>
             <a:endParaRPr lang="en-US" sz="850" dirty="0"/>
           </a:p>
@@ -24467,6 +24425,118 @@
       <p:sp>
         <p:nvSpPr>
           <p:cNvPr id="22" name="Shape 20"/>
+          <p:cNvSpPr/>
+          <p:nvPr/>
+        </p:nvSpPr>
+        <p:spPr>
+          <a:xfrm>
+            <a:off x="6519672" y="2258568"/>
+            <a:ext cx="1828800" cy="292608"/>
+          </a:xfrm>
+          <a:prstGeom prst="rect">
+            <a:avLst>
+              <a:gd name="adj" fmla="val 25000"/>
+            </a:avLst>
+          </a:prstGeom>
+          <a:solidFill>
+            <a:srgbClr val="FCE7F3"/>
+          </a:solidFill>
+          <a:ln w="19050">
+            <a:solidFill>
+              <a:srgbClr val="DB2777"/>
+            </a:solidFill>
+            <a:prstDash val="solid"/>
+          </a:ln>
+          <a:effectLst>
+            <a:outerShdw sx="100000" sy="100000" kx="0" ky="0" algn="bl" rotWithShape="0" blurRad="101600" dist="38100" dir="8100000">
+              <a:srgbClr val="000000">
+                <a:alpha val="12000"/>
+              </a:srgbClr>
+            </a:outerShdw>
+          </a:effectLst>
+        </p:spPr>
+      </p:sp>
+      <p:sp>
+        <p:nvSpPr>
+          <p:cNvPr id="23" name="Text 21"/>
+          <p:cNvSpPr/>
+          <p:nvPr/>
+        </p:nvSpPr>
+        <p:spPr>
+          <a:xfrm>
+            <a:off x="6519672" y="2258568"/>
+            <a:ext cx="1828800" cy="292608"/>
+          </a:xfrm>
+          <a:prstGeom prst="rect">
+            <a:avLst/>
+          </a:prstGeom>
+          <a:noFill/>
+          <a:ln/>
+        </p:spPr>
+        <p:txBody>
+          <a:bodyPr wrap="square" lIns="0" tIns="0" rIns="0" bIns="0" rtlCol="0" anchor="ctr"/>
+          <a:lstStyle/>
+          <a:p>
+            <a:pPr algn="ctr" indent="0" marL="0">
+              <a:buNone/>
+            </a:pPr>
+            <a:r>
+              <a:rPr lang="en-US" sz="1300" b="1" dirty="0">
+                <a:solidFill>
+                  <a:srgbClr val="9D174D"/>
+                </a:solidFill>
+                <a:latin typeface="Trebuchet MS" pitchFamily="34" charset="0"/>
+                <a:ea typeface="Trebuchet MS" pitchFamily="34" charset="-122"/>
+                <a:cs typeface="Trebuchet MS" pitchFamily="34" charset="-120"/>
+              </a:rPr>
+              <a:t>ed</a:t>
+            </a:r>
+            <a:endParaRPr lang="en-US" sz="1300" dirty="0"/>
+          </a:p>
+        </p:txBody>
+      </p:sp>
+      <p:sp>
+        <p:nvSpPr>
+          <p:cNvPr id="24" name="Text 22"/>
+          <p:cNvSpPr/>
+          <p:nvPr/>
+        </p:nvSpPr>
+        <p:spPr>
+          <a:xfrm>
+            <a:off x="6519672" y="2569464"/>
+            <a:ext cx="1828800" cy="201168"/>
+          </a:xfrm>
+          <a:prstGeom prst="rect">
+            <a:avLst/>
+          </a:prstGeom>
+          <a:noFill/>
+          <a:ln/>
+        </p:spPr>
+        <p:txBody>
+          <a:bodyPr wrap="square" lIns="0" tIns="0" rIns="0" bIns="0" rtlCol="0" anchor="t"/>
+          <a:lstStyle/>
+          <a:p>
+            <a:pPr algn="ctr" indent="0" marL="0">
+              <a:buNone/>
+            </a:pPr>
+            <a:r>
+              <a:rPr lang="en-US" sz="850" dirty="0">
+                <a:solidFill>
+                  <a:srgbClr val="475569"/>
+                </a:solidFill>
+                <a:latin typeface="Calibri" pitchFamily="34" charset="0"/>
+                <a:ea typeface="Calibri" pitchFamily="34" charset="-122"/>
+                <a:cs typeface="Calibri" pitchFamily="34" charset="-120"/>
+              </a:rPr>
+              <a:t>past tense</a:t>
+            </a:r>
+            <a:endParaRPr lang="en-US" sz="850" dirty="0"/>
+          </a:p>
+        </p:txBody>
+      </p:sp>
+      <p:sp>
+        <p:nvSpPr>
+          <p:cNvPr id="25" name="Shape 23"/>
           <p:cNvSpPr/>
           <p:nvPr/>
         </p:nvSpPr>
@@ -24493,7 +24563,7 @@
       </p:sp>
       <p:sp>
         <p:nvSpPr>
-          <p:cNvPr id="23" name="Text 21"/>
+          <p:cNvPr id="26" name="Text 24"/>
           <p:cNvSpPr/>
           <p:nvPr/>
         </p:nvSpPr>
@@ -24532,7 +24602,7 @@
       </p:sp>
       <p:sp>
         <p:nvSpPr>
-          <p:cNvPr id="24" name="Shape 22"/>
+          <p:cNvPr id="27" name="Shape 25"/>
           <p:cNvSpPr/>
           <p:nvPr/>
         </p:nvSpPr>
@@ -24559,7 +24629,7 @@
       </p:sp>
       <p:sp>
         <p:nvSpPr>
-          <p:cNvPr id="25" name="Text 23"/>
+          <p:cNvPr id="28" name="Text 26"/>
           <p:cNvSpPr/>
           <p:nvPr/>
         </p:nvSpPr>
@@ -24598,7 +24668,7 @@
       </p:sp>
       <p:sp>
         <p:nvSpPr>
-          <p:cNvPr id="26" name="Shape 24"/>
+          <p:cNvPr id="29" name="Shape 27"/>
           <p:cNvSpPr/>
           <p:nvPr/>
         </p:nvSpPr>
@@ -24625,7 +24695,7 @@
       </p:sp>
       <p:sp>
         <p:nvSpPr>
-          <p:cNvPr id="27" name="Text 25"/>
+          <p:cNvPr id="30" name="Text 28"/>
           <p:cNvSpPr/>
           <p:nvPr/>
         </p:nvSpPr>
@@ -24664,7 +24734,7 @@
       </p:sp>
       <p:sp>
         <p:nvSpPr>
-          <p:cNvPr id="28" name="Shape 26"/>
+          <p:cNvPr id="31" name="Shape 29"/>
           <p:cNvSpPr/>
           <p:nvPr/>
         </p:nvSpPr>
@@ -24691,7 +24761,7 @@
       </p:sp>
       <p:sp>
         <p:nvSpPr>
-          <p:cNvPr id="29" name="Text 27"/>
+          <p:cNvPr id="32" name="Text 30"/>
           <p:cNvSpPr/>
           <p:nvPr/>
         </p:nvSpPr>
@@ -25872,7 +25942,7 @@
                 <a:ea typeface="Trebuchet MS" pitchFamily="34" charset="-122"/>
                 <a:cs typeface="Trebuchet MS" pitchFamily="34" charset="-120"/>
               </a:rPr>
-              <a:t>closure</a:t>
+              <a:t>enclosed</a:t>
             </a:r>
             <a:endParaRPr lang="en-US" sz="2800" dirty="0"/>
           </a:p>
@@ -25952,7 +26022,7 @@
         </p:nvSpPr>
         <p:spPr>
           <a:xfrm>
-            <a:off x="2938272" y="2258568"/>
+            <a:off x="2221992" y="2258568"/>
             <a:ext cx="1828800" cy="292608"/>
           </a:xfrm>
           <a:prstGeom prst="rect">
@@ -25961,11 +26031,11 @@
             </a:avLst>
           </a:prstGeom>
           <a:solidFill>
-            <a:srgbClr val="CCFBF1"/>
+            <a:srgbClr val="DDD6FE"/>
           </a:solidFill>
           <a:ln w="19050">
             <a:solidFill>
-              <a:srgbClr val="0D9488"/>
+              <a:srgbClr val="7C3AED"/>
             </a:solidFill>
             <a:prstDash val="solid"/>
           </a:ln>
@@ -25986,7 +26056,7 @@
         </p:nvSpPr>
         <p:spPr>
           <a:xfrm>
-            <a:off x="2938272" y="2258568"/>
+            <a:off x="2221992" y="2258568"/>
             <a:ext cx="1828800" cy="292608"/>
           </a:xfrm>
           <a:prstGeom prst="rect">
@@ -26005,13 +26075,13 @@
             <a:r>
               <a:rPr lang="en-US" sz="1300" b="1" dirty="0">
                 <a:solidFill>
-                  <a:srgbClr val="0F766E"/>
+                  <a:srgbClr val="4C1D95"/>
                 </a:solidFill>
                 <a:latin typeface="Trebuchet MS" pitchFamily="34" charset="0"/>
                 <a:ea typeface="Trebuchet MS" pitchFamily="34" charset="-122"/>
                 <a:cs typeface="Trebuchet MS" pitchFamily="34" charset="-120"/>
               </a:rPr>
-              <a:t>clos</a:t>
+              <a:t>en</a:t>
             </a:r>
             <a:endParaRPr lang="en-US" sz="1300" dirty="0"/>
           </a:p>
@@ -26025,7 +26095,7 @@
         </p:nvSpPr>
         <p:spPr>
           <a:xfrm>
-            <a:off x="2938272" y="2569464"/>
+            <a:off x="2221992" y="2569464"/>
             <a:ext cx="1828800" cy="201168"/>
           </a:xfrm>
           <a:prstGeom prst="rect">
@@ -26050,7 +26120,7 @@
                 <a:ea typeface="Calibri" pitchFamily="34" charset="-122"/>
                 <a:cs typeface="Calibri" pitchFamily="34" charset="-120"/>
               </a:rPr>
-              <a:t>shut, close</a:t>
+              <a:t>in, into, within</a:t>
             </a:r>
             <a:endParaRPr lang="en-US" sz="850" dirty="0"/>
           </a:p>
@@ -26064,7 +26134,7 @@
         </p:nvSpPr>
         <p:spPr>
           <a:xfrm>
-            <a:off x="5803392" y="2258568"/>
+            <a:off x="4370832" y="2258568"/>
             <a:ext cx="1828800" cy="292608"/>
           </a:xfrm>
           <a:prstGeom prst="rect">
@@ -26073,11 +26143,11 @@
             </a:avLst>
           </a:prstGeom>
           <a:solidFill>
-            <a:srgbClr val="FCE7F3"/>
+            <a:srgbClr val="CCFBF1"/>
           </a:solidFill>
           <a:ln w="19050">
             <a:solidFill>
-              <a:srgbClr val="DB2777"/>
+              <a:srgbClr val="0D9488"/>
             </a:solidFill>
             <a:prstDash val="solid"/>
           </a:ln>
@@ -26098,7 +26168,7 @@
         </p:nvSpPr>
         <p:spPr>
           <a:xfrm>
-            <a:off x="5803392" y="2258568"/>
+            <a:off x="4370832" y="2258568"/>
             <a:ext cx="1828800" cy="292608"/>
           </a:xfrm>
           <a:prstGeom prst="rect">
@@ -26117,13 +26187,13 @@
             <a:r>
               <a:rPr lang="en-US" sz="1300" b="1" dirty="0">
                 <a:solidFill>
-                  <a:srgbClr val="9D174D"/>
+                  <a:srgbClr val="0F766E"/>
                 </a:solidFill>
                 <a:latin typeface="Trebuchet MS" pitchFamily="34" charset="0"/>
                 <a:ea typeface="Trebuchet MS" pitchFamily="34" charset="-122"/>
                 <a:cs typeface="Trebuchet MS" pitchFamily="34" charset="-120"/>
               </a:rPr>
-              <a:t>ure</a:t>
+              <a:t>clos</a:t>
             </a:r>
             <a:endParaRPr lang="en-US" sz="1300" dirty="0"/>
           </a:p>
@@ -26137,7 +26207,7 @@
         </p:nvSpPr>
         <p:spPr>
           <a:xfrm>
-            <a:off x="5803392" y="2569464"/>
+            <a:off x="4370832" y="2569464"/>
             <a:ext cx="1828800" cy="201168"/>
           </a:xfrm>
           <a:prstGeom prst="rect">
@@ -26162,7 +26232,7 @@
                 <a:ea typeface="Calibri" pitchFamily="34" charset="-122"/>
                 <a:cs typeface="Calibri" pitchFamily="34" charset="-120"/>
               </a:rPr>
-              <a:t>result or process of</a:t>
+              <a:t>shut, close</a:t>
             </a:r>
             <a:endParaRPr lang="en-US" sz="850" dirty="0"/>
           </a:p>
@@ -26171,6 +26241,118 @@
       <p:sp>
         <p:nvSpPr>
           <p:cNvPr id="22" name="Shape 20"/>
+          <p:cNvSpPr/>
+          <p:nvPr/>
+        </p:nvSpPr>
+        <p:spPr>
+          <a:xfrm>
+            <a:off x="6519672" y="2258568"/>
+            <a:ext cx="1828800" cy="292608"/>
+          </a:xfrm>
+          <a:prstGeom prst="rect">
+            <a:avLst>
+              <a:gd name="adj" fmla="val 25000"/>
+            </a:avLst>
+          </a:prstGeom>
+          <a:solidFill>
+            <a:srgbClr val="FCE7F3"/>
+          </a:solidFill>
+          <a:ln w="19050">
+            <a:solidFill>
+              <a:srgbClr val="DB2777"/>
+            </a:solidFill>
+            <a:prstDash val="solid"/>
+          </a:ln>
+          <a:effectLst>
+            <a:outerShdw sx="100000" sy="100000" kx="0" ky="0" algn="bl" rotWithShape="0" blurRad="101600" dist="38100" dir="8100000">
+              <a:srgbClr val="000000">
+                <a:alpha val="12000"/>
+              </a:srgbClr>
+            </a:outerShdw>
+          </a:effectLst>
+        </p:spPr>
+      </p:sp>
+      <p:sp>
+        <p:nvSpPr>
+          <p:cNvPr id="23" name="Text 21"/>
+          <p:cNvSpPr/>
+          <p:nvPr/>
+        </p:nvSpPr>
+        <p:spPr>
+          <a:xfrm>
+            <a:off x="6519672" y="2258568"/>
+            <a:ext cx="1828800" cy="292608"/>
+          </a:xfrm>
+          <a:prstGeom prst="rect">
+            <a:avLst/>
+          </a:prstGeom>
+          <a:noFill/>
+          <a:ln/>
+        </p:spPr>
+        <p:txBody>
+          <a:bodyPr wrap="square" lIns="0" tIns="0" rIns="0" bIns="0" rtlCol="0" anchor="ctr"/>
+          <a:lstStyle/>
+          <a:p>
+            <a:pPr algn="ctr" indent="0" marL="0">
+              <a:buNone/>
+            </a:pPr>
+            <a:r>
+              <a:rPr lang="en-US" sz="1300" b="1" dirty="0">
+                <a:solidFill>
+                  <a:srgbClr val="9D174D"/>
+                </a:solidFill>
+                <a:latin typeface="Trebuchet MS" pitchFamily="34" charset="0"/>
+                <a:ea typeface="Trebuchet MS" pitchFamily="34" charset="-122"/>
+                <a:cs typeface="Trebuchet MS" pitchFamily="34" charset="-120"/>
+              </a:rPr>
+              <a:t>ed</a:t>
+            </a:r>
+            <a:endParaRPr lang="en-US" sz="1300" dirty="0"/>
+          </a:p>
+        </p:txBody>
+      </p:sp>
+      <p:sp>
+        <p:nvSpPr>
+          <p:cNvPr id="24" name="Text 22"/>
+          <p:cNvSpPr/>
+          <p:nvPr/>
+        </p:nvSpPr>
+        <p:spPr>
+          <a:xfrm>
+            <a:off x="6519672" y="2569464"/>
+            <a:ext cx="1828800" cy="201168"/>
+          </a:xfrm>
+          <a:prstGeom prst="rect">
+            <a:avLst/>
+          </a:prstGeom>
+          <a:noFill/>
+          <a:ln/>
+        </p:spPr>
+        <p:txBody>
+          <a:bodyPr wrap="square" lIns="0" tIns="0" rIns="0" bIns="0" rtlCol="0" anchor="t"/>
+          <a:lstStyle/>
+          <a:p>
+            <a:pPr algn="ctr" indent="0" marL="0">
+              <a:buNone/>
+            </a:pPr>
+            <a:r>
+              <a:rPr lang="en-US" sz="850" dirty="0">
+                <a:solidFill>
+                  <a:srgbClr val="475569"/>
+                </a:solidFill>
+                <a:latin typeface="Calibri" pitchFamily="34" charset="0"/>
+                <a:ea typeface="Calibri" pitchFamily="34" charset="-122"/>
+                <a:cs typeface="Calibri" pitchFamily="34" charset="-120"/>
+              </a:rPr>
+              <a:t>past tense</a:t>
+            </a:r>
+            <a:endParaRPr lang="en-US" sz="850" dirty="0"/>
+          </a:p>
+        </p:txBody>
+      </p:sp>
+      <p:sp>
+        <p:nvSpPr>
+          <p:cNvPr id="25" name="Shape 23"/>
           <p:cNvSpPr/>
           <p:nvPr/>
         </p:nvSpPr>
@@ -26197,7 +26379,7 @@
       </p:sp>
       <p:sp>
         <p:nvSpPr>
-          <p:cNvPr id="23" name="Text 21"/>
+          <p:cNvPr id="26" name="Text 24"/>
           <p:cNvSpPr/>
           <p:nvPr/>
         </p:nvSpPr>
@@ -26236,7 +26418,7 @@
       </p:sp>
       <p:sp>
         <p:nvSpPr>
-          <p:cNvPr id="24" name="Shape 22"/>
+          <p:cNvPr id="27" name="Shape 25"/>
           <p:cNvSpPr/>
           <p:nvPr/>
         </p:nvSpPr>
@@ -26263,7 +26445,7 @@
       </p:sp>
       <p:sp>
         <p:nvSpPr>
-          <p:cNvPr id="25" name="Shape 23"/>
+          <p:cNvPr id="28" name="Shape 26"/>
           <p:cNvSpPr/>
           <p:nvPr/>
         </p:nvSpPr>
@@ -26290,7 +26472,7 @@
       </p:sp>
       <p:sp>
         <p:nvSpPr>
-          <p:cNvPr id="26" name="Text 24"/>
+          <p:cNvPr id="29" name="Text 27"/>
           <p:cNvSpPr/>
           <p:nvPr/>
         </p:nvSpPr>
@@ -26321,7 +26503,7 @@
                 <a:ea typeface="Trebuchet MS" pitchFamily="34" charset="-122"/>
                 <a:cs typeface="Trebuchet MS" pitchFamily="34" charset="-120"/>
               </a:rPr>
-              <a:t>clo</a:t>
+              <a:t>en</a:t>
             </a:r>
             <a:endParaRPr lang="en-US" sz="1400" dirty="0"/>
           </a:p>
@@ -26329,7 +26511,7 @@
       </p:sp>
       <p:sp>
         <p:nvSpPr>
-          <p:cNvPr id="27" name="Text 25"/>
+          <p:cNvPr id="30" name="Text 28"/>
           <p:cNvSpPr/>
           <p:nvPr/>
         </p:nvSpPr>
@@ -26368,7 +26550,7 @@
       </p:sp>
       <p:sp>
         <p:nvSpPr>
-          <p:cNvPr id="28" name="Shape 26"/>
+          <p:cNvPr id="31" name="Shape 29"/>
           <p:cNvSpPr/>
           <p:nvPr/>
         </p:nvSpPr>
@@ -26395,7 +26577,7 @@
       </p:sp>
       <p:sp>
         <p:nvSpPr>
-          <p:cNvPr id="29" name="Text 27"/>
+          <p:cNvPr id="32" name="Text 30"/>
           <p:cNvSpPr/>
           <p:nvPr/>
         </p:nvSpPr>
@@ -26426,7 +26608,7 @@
                 <a:ea typeface="Trebuchet MS" pitchFamily="34" charset="-122"/>
                 <a:cs typeface="Trebuchet MS" pitchFamily="34" charset="-120"/>
               </a:rPr>
-              <a:t>sure</a:t>
+              <a:t>closed</a:t>
             </a:r>
             <a:endParaRPr lang="en-US" sz="1400" dirty="0"/>
           </a:p>
@@ -26434,7 +26616,7 @@
       </p:sp>
       <p:sp>
         <p:nvSpPr>
-          <p:cNvPr id="30" name="Shape 28"/>
+          <p:cNvPr id="33" name="Shape 31"/>
           <p:cNvSpPr/>
           <p:nvPr/>
         </p:nvSpPr>
@@ -26461,7 +26643,7 @@
       </p:sp>
       <p:sp>
         <p:nvSpPr>
-          <p:cNvPr id="31" name="Text 29"/>
+          <p:cNvPr id="34" name="Text 32"/>
           <p:cNvSpPr/>
           <p:nvPr/>
         </p:nvSpPr>
@@ -26500,7 +26682,7 @@
       </p:sp>
       <p:sp>
         <p:nvSpPr>
-          <p:cNvPr id="32" name="Shape 30"/>
+          <p:cNvPr id="35" name="Shape 33"/>
           <p:cNvSpPr/>
           <p:nvPr/>
         </p:nvSpPr>
@@ -26527,7 +26709,7 @@
       </p:sp>
       <p:sp>
         <p:nvSpPr>
-          <p:cNvPr id="33" name="Text 31"/>
+          <p:cNvPr id="36" name="Text 34"/>
           <p:cNvSpPr/>
           <p:nvPr/>
         </p:nvSpPr>
@@ -26989,7 +27171,7 @@
                 <a:ea typeface="Trebuchet MS" pitchFamily="34" charset="-122"/>
                 <a:cs typeface="Trebuchet MS" pitchFamily="34" charset="-120"/>
               </a:rPr>
-              <a:t>closure</a:t>
+              <a:t>enclosed</a:t>
             </a:r>
             <a:endParaRPr lang="en-US" sz="2800" dirty="0"/>
           </a:p>
@@ -27069,7 +27251,7 @@
         </p:nvSpPr>
         <p:spPr>
           <a:xfrm>
-            <a:off x="2938272" y="2258568"/>
+            <a:off x="2221992" y="2258568"/>
             <a:ext cx="1828800" cy="292608"/>
           </a:xfrm>
           <a:prstGeom prst="rect">
@@ -27078,11 +27260,11 @@
             </a:avLst>
           </a:prstGeom>
           <a:solidFill>
-            <a:srgbClr val="CCFBF1"/>
+            <a:srgbClr val="DDD6FE"/>
           </a:solidFill>
           <a:ln w="19050">
             <a:solidFill>
-              <a:srgbClr val="0D9488"/>
+              <a:srgbClr val="7C3AED"/>
             </a:solidFill>
             <a:prstDash val="solid"/>
           </a:ln>
@@ -27103,7 +27285,7 @@
         </p:nvSpPr>
         <p:spPr>
           <a:xfrm>
-            <a:off x="2938272" y="2258568"/>
+            <a:off x="2221992" y="2258568"/>
             <a:ext cx="1828800" cy="292608"/>
           </a:xfrm>
           <a:prstGeom prst="rect">
@@ -27122,13 +27304,13 @@
             <a:r>
               <a:rPr lang="en-US" sz="1300" b="1" dirty="0">
                 <a:solidFill>
-                  <a:srgbClr val="0F766E"/>
+                  <a:srgbClr val="4C1D95"/>
                 </a:solidFill>
                 <a:latin typeface="Trebuchet MS" pitchFamily="34" charset="0"/>
                 <a:ea typeface="Trebuchet MS" pitchFamily="34" charset="-122"/>
                 <a:cs typeface="Trebuchet MS" pitchFamily="34" charset="-120"/>
               </a:rPr>
-              <a:t>clos</a:t>
+              <a:t>en</a:t>
             </a:r>
             <a:endParaRPr lang="en-US" sz="1300" dirty="0"/>
           </a:p>
@@ -27142,7 +27324,7 @@
         </p:nvSpPr>
         <p:spPr>
           <a:xfrm>
-            <a:off x="2938272" y="2569464"/>
+            <a:off x="2221992" y="2569464"/>
             <a:ext cx="1828800" cy="201168"/>
           </a:xfrm>
           <a:prstGeom prst="rect">
@@ -27167,7 +27349,7 @@
                 <a:ea typeface="Calibri" pitchFamily="34" charset="-122"/>
                 <a:cs typeface="Calibri" pitchFamily="34" charset="-120"/>
               </a:rPr>
-              <a:t>shut, close</a:t>
+              <a:t>in, into, within</a:t>
             </a:r>
             <a:endParaRPr lang="en-US" sz="850" dirty="0"/>
           </a:p>
@@ -27181,7 +27363,7 @@
         </p:nvSpPr>
         <p:spPr>
           <a:xfrm>
-            <a:off x="5803392" y="2258568"/>
+            <a:off x="4370832" y="2258568"/>
             <a:ext cx="1828800" cy="292608"/>
           </a:xfrm>
           <a:prstGeom prst="rect">
@@ -27190,11 +27372,11 @@
             </a:avLst>
           </a:prstGeom>
           <a:solidFill>
-            <a:srgbClr val="FCE7F3"/>
+            <a:srgbClr val="CCFBF1"/>
           </a:solidFill>
           <a:ln w="19050">
             <a:solidFill>
-              <a:srgbClr val="DB2777"/>
+              <a:srgbClr val="0D9488"/>
             </a:solidFill>
             <a:prstDash val="solid"/>
           </a:ln>
@@ -27215,7 +27397,7 @@
         </p:nvSpPr>
         <p:spPr>
           <a:xfrm>
-            <a:off x="5803392" y="2258568"/>
+            <a:off x="4370832" y="2258568"/>
             <a:ext cx="1828800" cy="292608"/>
           </a:xfrm>
           <a:prstGeom prst="rect">
@@ -27234,13 +27416,13 @@
             <a:r>
               <a:rPr lang="en-US" sz="1300" b="1" dirty="0">
                 <a:solidFill>
-                  <a:srgbClr val="9D174D"/>
+                  <a:srgbClr val="0F766E"/>
                 </a:solidFill>
                 <a:latin typeface="Trebuchet MS" pitchFamily="34" charset="0"/>
                 <a:ea typeface="Trebuchet MS" pitchFamily="34" charset="-122"/>
                 <a:cs typeface="Trebuchet MS" pitchFamily="34" charset="-120"/>
               </a:rPr>
-              <a:t>ure</a:t>
+              <a:t>clos</a:t>
             </a:r>
             <a:endParaRPr lang="en-US" sz="1300" dirty="0"/>
           </a:p>
@@ -27254,7 +27436,7 @@
         </p:nvSpPr>
         <p:spPr>
           <a:xfrm>
-            <a:off x="5803392" y="2569464"/>
+            <a:off x="4370832" y="2569464"/>
             <a:ext cx="1828800" cy="201168"/>
           </a:xfrm>
           <a:prstGeom prst="rect">
@@ -27279,7 +27461,7 @@
                 <a:ea typeface="Calibri" pitchFamily="34" charset="-122"/>
                 <a:cs typeface="Calibri" pitchFamily="34" charset="-120"/>
               </a:rPr>
-              <a:t>result or process of</a:t>
+              <a:t>shut, close</a:t>
             </a:r>
             <a:endParaRPr lang="en-US" sz="850" dirty="0"/>
           </a:p>
@@ -27288,6 +27470,118 @@
       <p:sp>
         <p:nvSpPr>
           <p:cNvPr id="22" name="Shape 20"/>
+          <p:cNvSpPr/>
+          <p:nvPr/>
+        </p:nvSpPr>
+        <p:spPr>
+          <a:xfrm>
+            <a:off x="6519672" y="2258568"/>
+            <a:ext cx="1828800" cy="292608"/>
+          </a:xfrm>
+          <a:prstGeom prst="rect">
+            <a:avLst>
+              <a:gd name="adj" fmla="val 25000"/>
+            </a:avLst>
+          </a:prstGeom>
+          <a:solidFill>
+            <a:srgbClr val="FCE7F3"/>
+          </a:solidFill>
+          <a:ln w="19050">
+            <a:solidFill>
+              <a:srgbClr val="DB2777"/>
+            </a:solidFill>
+            <a:prstDash val="solid"/>
+          </a:ln>
+          <a:effectLst>
+            <a:outerShdw sx="100000" sy="100000" kx="0" ky="0" algn="bl" rotWithShape="0" blurRad="101600" dist="38100" dir="8100000">
+              <a:srgbClr val="000000">
+                <a:alpha val="12000"/>
+              </a:srgbClr>
+            </a:outerShdw>
+          </a:effectLst>
+        </p:spPr>
+      </p:sp>
+      <p:sp>
+        <p:nvSpPr>
+          <p:cNvPr id="23" name="Text 21"/>
+          <p:cNvSpPr/>
+          <p:nvPr/>
+        </p:nvSpPr>
+        <p:spPr>
+          <a:xfrm>
+            <a:off x="6519672" y="2258568"/>
+            <a:ext cx="1828800" cy="292608"/>
+          </a:xfrm>
+          <a:prstGeom prst="rect">
+            <a:avLst/>
+          </a:prstGeom>
+          <a:noFill/>
+          <a:ln/>
+        </p:spPr>
+        <p:txBody>
+          <a:bodyPr wrap="square" lIns="0" tIns="0" rIns="0" bIns="0" rtlCol="0" anchor="ctr"/>
+          <a:lstStyle/>
+          <a:p>
+            <a:pPr algn="ctr" indent="0" marL="0">
+              <a:buNone/>
+            </a:pPr>
+            <a:r>
+              <a:rPr lang="en-US" sz="1300" b="1" dirty="0">
+                <a:solidFill>
+                  <a:srgbClr val="9D174D"/>
+                </a:solidFill>
+                <a:latin typeface="Trebuchet MS" pitchFamily="34" charset="0"/>
+                <a:ea typeface="Trebuchet MS" pitchFamily="34" charset="-122"/>
+                <a:cs typeface="Trebuchet MS" pitchFamily="34" charset="-120"/>
+              </a:rPr>
+              <a:t>ed</a:t>
+            </a:r>
+            <a:endParaRPr lang="en-US" sz="1300" dirty="0"/>
+          </a:p>
+        </p:txBody>
+      </p:sp>
+      <p:sp>
+        <p:nvSpPr>
+          <p:cNvPr id="24" name="Text 22"/>
+          <p:cNvSpPr/>
+          <p:nvPr/>
+        </p:nvSpPr>
+        <p:spPr>
+          <a:xfrm>
+            <a:off x="6519672" y="2569464"/>
+            <a:ext cx="1828800" cy="201168"/>
+          </a:xfrm>
+          <a:prstGeom prst="rect">
+            <a:avLst/>
+          </a:prstGeom>
+          <a:noFill/>
+          <a:ln/>
+        </p:spPr>
+        <p:txBody>
+          <a:bodyPr wrap="square" lIns="0" tIns="0" rIns="0" bIns="0" rtlCol="0" anchor="t"/>
+          <a:lstStyle/>
+          <a:p>
+            <a:pPr algn="ctr" indent="0" marL="0">
+              <a:buNone/>
+            </a:pPr>
+            <a:r>
+              <a:rPr lang="en-US" sz="850" dirty="0">
+                <a:solidFill>
+                  <a:srgbClr val="475569"/>
+                </a:solidFill>
+                <a:latin typeface="Calibri" pitchFamily="34" charset="0"/>
+                <a:ea typeface="Calibri" pitchFamily="34" charset="-122"/>
+                <a:cs typeface="Calibri" pitchFamily="34" charset="-120"/>
+              </a:rPr>
+              <a:t>past tense</a:t>
+            </a:r>
+            <a:endParaRPr lang="en-US" sz="850" dirty="0"/>
+          </a:p>
+        </p:txBody>
+      </p:sp>
+      <p:sp>
+        <p:nvSpPr>
+          <p:cNvPr id="25" name="Shape 23"/>
           <p:cNvSpPr/>
           <p:nvPr/>
         </p:nvSpPr>
@@ -27314,7 +27608,7 @@
       </p:sp>
       <p:sp>
         <p:nvSpPr>
-          <p:cNvPr id="23" name="Text 21"/>
+          <p:cNvPr id="26" name="Text 24"/>
           <p:cNvSpPr/>
           <p:nvPr/>
         </p:nvSpPr>
@@ -27353,7 +27647,7 @@
       </p:sp>
       <p:sp>
         <p:nvSpPr>
-          <p:cNvPr id="24" name="Shape 22"/>
+          <p:cNvPr id="27" name="Shape 25"/>
           <p:cNvSpPr/>
           <p:nvPr/>
         </p:nvSpPr>
@@ -27380,7 +27674,7 @@
       </p:sp>
       <p:sp>
         <p:nvSpPr>
-          <p:cNvPr id="25" name="Shape 23"/>
+          <p:cNvPr id="28" name="Shape 26"/>
           <p:cNvSpPr/>
           <p:nvPr/>
         </p:nvSpPr>
@@ -27407,7 +27701,7 @@
       </p:sp>
       <p:sp>
         <p:nvSpPr>
-          <p:cNvPr id="26" name="Text 24"/>
+          <p:cNvPr id="29" name="Text 27"/>
           <p:cNvSpPr/>
           <p:nvPr/>
         </p:nvSpPr>
@@ -27438,7 +27732,7 @@
                 <a:ea typeface="Trebuchet MS" pitchFamily="34" charset="-122"/>
                 <a:cs typeface="Trebuchet MS" pitchFamily="34" charset="-120"/>
               </a:rPr>
-              <a:t>clo</a:t>
+              <a:t>en</a:t>
             </a:r>
             <a:endParaRPr lang="en-US" sz="1400" dirty="0"/>
           </a:p>
@@ -27446,7 +27740,7 @@
       </p:sp>
       <p:sp>
         <p:nvSpPr>
-          <p:cNvPr id="27" name="Text 25"/>
+          <p:cNvPr id="30" name="Text 28"/>
           <p:cNvSpPr/>
           <p:nvPr/>
         </p:nvSpPr>
@@ -27485,7 +27779,7 @@
       </p:sp>
       <p:sp>
         <p:nvSpPr>
-          <p:cNvPr id="28" name="Shape 26"/>
+          <p:cNvPr id="31" name="Shape 29"/>
           <p:cNvSpPr/>
           <p:nvPr/>
         </p:nvSpPr>
@@ -27512,7 +27806,7 @@
       </p:sp>
       <p:sp>
         <p:nvSpPr>
-          <p:cNvPr id="29" name="Text 27"/>
+          <p:cNvPr id="32" name="Text 30"/>
           <p:cNvSpPr/>
           <p:nvPr/>
         </p:nvSpPr>
@@ -27543,7 +27837,7 @@
                 <a:ea typeface="Trebuchet MS" pitchFamily="34" charset="-122"/>
                 <a:cs typeface="Trebuchet MS" pitchFamily="34" charset="-120"/>
               </a:rPr>
-              <a:t>sure</a:t>
+              <a:t>closed</a:t>
             </a:r>
             <a:endParaRPr lang="en-US" sz="1400" dirty="0"/>
           </a:p>
@@ -27551,7 +27845,7 @@
       </p:sp>
       <p:sp>
         <p:nvSpPr>
-          <p:cNvPr id="30" name="Shape 28"/>
+          <p:cNvPr id="33" name="Shape 31"/>
           <p:cNvSpPr/>
           <p:nvPr/>
         </p:nvSpPr>
@@ -27578,7 +27872,7 @@
       </p:sp>
       <p:sp>
         <p:nvSpPr>
-          <p:cNvPr id="31" name="Text 29"/>
+          <p:cNvPr id="34" name="Text 32"/>
           <p:cNvSpPr/>
           <p:nvPr/>
         </p:nvSpPr>
@@ -27617,7 +27911,7 @@
       </p:sp>
       <p:sp>
         <p:nvSpPr>
-          <p:cNvPr id="32" name="Shape 30"/>
+          <p:cNvPr id="35" name="Shape 33"/>
           <p:cNvSpPr/>
           <p:nvPr/>
         </p:nvSpPr>
@@ -27644,13 +27938,13 @@
       </p:sp>
       <p:sp>
         <p:nvSpPr>
-          <p:cNvPr id="33" name="Shape 31"/>
-          <p:cNvSpPr/>
-          <p:nvPr/>
-        </p:nvSpPr>
-        <p:spPr>
-          <a:xfrm>
-            <a:off x="2670048" y="4169664"/>
+          <p:cNvPr id="36" name="Shape 34"/>
+          <p:cNvSpPr/>
+          <p:nvPr/>
+        </p:nvSpPr>
+        <p:spPr>
+          <a:xfrm>
+            <a:off x="2254649" y="4169664"/>
             <a:ext cx="685800" cy="384048"/>
           </a:xfrm>
           <a:prstGeom prst="rect">
@@ -27671,13 +27965,13 @@
       </p:sp>
       <p:sp>
         <p:nvSpPr>
-          <p:cNvPr id="34" name="Text 32"/>
-          <p:cNvSpPr/>
-          <p:nvPr/>
-        </p:nvSpPr>
-        <p:spPr>
-          <a:xfrm>
-            <a:off x="2670048" y="4169664"/>
+          <p:cNvPr id="37" name="Text 35"/>
+          <p:cNvSpPr/>
+          <p:nvPr/>
+        </p:nvSpPr>
+        <p:spPr>
+          <a:xfrm>
+            <a:off x="2254649" y="4169664"/>
             <a:ext cx="685800" cy="384048"/>
           </a:xfrm>
           <a:prstGeom prst="rect">
@@ -27702,7 +27996,7 @@
                 <a:ea typeface="Trebuchet MS" pitchFamily="34" charset="-122"/>
                 <a:cs typeface="Trebuchet MS" pitchFamily="34" charset="-120"/>
               </a:rPr>
-              <a:t>cl</a:t>
+              <a:t>e</a:t>
             </a:r>
             <a:endParaRPr lang="en-US" sz="900" dirty="0"/>
           </a:p>
@@ -27710,13 +28004,13 @@
       </p:sp>
       <p:sp>
         <p:nvSpPr>
-          <p:cNvPr id="35" name="Shape 33"/>
-          <p:cNvSpPr/>
-          <p:nvPr/>
-        </p:nvSpPr>
-        <p:spPr>
-          <a:xfrm>
-            <a:off x="4123944" y="4169664"/>
+          <p:cNvPr id="38" name="Shape 36"/>
+          <p:cNvSpPr/>
+          <p:nvPr/>
+        </p:nvSpPr>
+        <p:spPr>
+          <a:xfrm>
+            <a:off x="3293146" y="4169664"/>
             <a:ext cx="685800" cy="384048"/>
           </a:xfrm>
           <a:prstGeom prst="rect">
@@ -27737,13 +28031,13 @@
       </p:sp>
       <p:sp>
         <p:nvSpPr>
-          <p:cNvPr id="36" name="Text 34"/>
-          <p:cNvSpPr/>
-          <p:nvPr/>
-        </p:nvSpPr>
-        <p:spPr>
-          <a:xfrm>
-            <a:off x="4123944" y="4169664"/>
+          <p:cNvPr id="39" name="Text 37"/>
+          <p:cNvSpPr/>
+          <p:nvPr/>
+        </p:nvSpPr>
+        <p:spPr>
+          <a:xfrm>
+            <a:off x="3293146" y="4169664"/>
             <a:ext cx="685800" cy="384048"/>
           </a:xfrm>
           <a:prstGeom prst="rect">
@@ -27768,7 +28062,7 @@
                 <a:ea typeface="Trebuchet MS" pitchFamily="34" charset="-122"/>
                 <a:cs typeface="Trebuchet MS" pitchFamily="34" charset="-120"/>
               </a:rPr>
-              <a:t>o</a:t>
+              <a:t>n</a:t>
             </a:r>
             <a:endParaRPr lang="en-US" sz="900" dirty="0"/>
           </a:p>
@@ -27776,13 +28070,13 @@
       </p:sp>
       <p:sp>
         <p:nvSpPr>
-          <p:cNvPr id="37" name="Shape 35"/>
-          <p:cNvSpPr/>
-          <p:nvPr/>
-        </p:nvSpPr>
-        <p:spPr>
-          <a:xfrm>
-            <a:off x="5577840" y="4169664"/>
+          <p:cNvPr id="40" name="Shape 38"/>
+          <p:cNvSpPr/>
+          <p:nvPr/>
+        </p:nvSpPr>
+        <p:spPr>
+          <a:xfrm>
+            <a:off x="4331643" y="4169664"/>
             <a:ext cx="685800" cy="384048"/>
           </a:xfrm>
           <a:prstGeom prst="rect">
@@ -27803,13 +28097,13 @@
       </p:sp>
       <p:sp>
         <p:nvSpPr>
-          <p:cNvPr id="38" name="Text 36"/>
-          <p:cNvSpPr/>
-          <p:nvPr/>
-        </p:nvSpPr>
-        <p:spPr>
-          <a:xfrm>
-            <a:off x="5577840" y="4169664"/>
+          <p:cNvPr id="41" name="Text 39"/>
+          <p:cNvSpPr/>
+          <p:nvPr/>
+        </p:nvSpPr>
+        <p:spPr>
+          <a:xfrm>
+            <a:off x="4331643" y="4169664"/>
             <a:ext cx="685800" cy="384048"/>
           </a:xfrm>
           <a:prstGeom prst="rect">
@@ -27834,6 +28128,138 @@
                 <a:ea typeface="Trebuchet MS" pitchFamily="34" charset="-122"/>
                 <a:cs typeface="Trebuchet MS" pitchFamily="34" charset="-120"/>
               </a:rPr>
+              <a:t>cl</a:t>
+            </a:r>
+            <a:endParaRPr lang="en-US" sz="900" dirty="0"/>
+          </a:p>
+        </p:txBody>
+      </p:sp>
+      <p:sp>
+        <p:nvSpPr>
+          <p:cNvPr id="42" name="Shape 40"/>
+          <p:cNvSpPr/>
+          <p:nvPr/>
+        </p:nvSpPr>
+        <p:spPr>
+          <a:xfrm>
+            <a:off x="5370141" y="4169664"/>
+            <a:ext cx="685800" cy="384048"/>
+          </a:xfrm>
+          <a:prstGeom prst="rect">
+            <a:avLst>
+              <a:gd name="adj" fmla="val 9524"/>
+            </a:avLst>
+          </a:prstGeom>
+          <a:solidFill>
+            <a:srgbClr val="FFFFFF"/>
+          </a:solidFill>
+          <a:ln w="12700">
+            <a:solidFill>
+              <a:srgbClr val="DB2777"/>
+            </a:solidFill>
+            <a:prstDash val="solid"/>
+          </a:ln>
+        </p:spPr>
+      </p:sp>
+      <p:sp>
+        <p:nvSpPr>
+          <p:cNvPr id="43" name="Text 41"/>
+          <p:cNvSpPr/>
+          <p:nvPr/>
+        </p:nvSpPr>
+        <p:spPr>
+          <a:xfrm>
+            <a:off x="5370141" y="4169664"/>
+            <a:ext cx="685800" cy="384048"/>
+          </a:xfrm>
+          <a:prstGeom prst="rect">
+            <a:avLst/>
+          </a:prstGeom>
+          <a:noFill/>
+          <a:ln/>
+        </p:spPr>
+        <p:txBody>
+          <a:bodyPr wrap="square" lIns="0" tIns="0" rIns="0" bIns="0" rtlCol="0" anchor="ctr"/>
+          <a:lstStyle/>
+          <a:p>
+            <a:pPr algn="ctr" indent="0" marL="0">
+              <a:buNone/>
+            </a:pPr>
+            <a:r>
+              <a:rPr lang="en-US" sz="900" b="1" dirty="0">
+                <a:solidFill>
+                  <a:srgbClr val="9D174D"/>
+                </a:solidFill>
+                <a:latin typeface="Trebuchet MS" pitchFamily="34" charset="0"/>
+                <a:ea typeface="Trebuchet MS" pitchFamily="34" charset="-122"/>
+                <a:cs typeface="Trebuchet MS" pitchFamily="34" charset="-120"/>
+              </a:rPr>
+              <a:t>o</a:t>
+            </a:r>
+            <a:endParaRPr lang="en-US" sz="900" dirty="0"/>
+          </a:p>
+        </p:txBody>
+      </p:sp>
+      <p:sp>
+        <p:nvSpPr>
+          <p:cNvPr id="44" name="Shape 42"/>
+          <p:cNvSpPr/>
+          <p:nvPr/>
+        </p:nvSpPr>
+        <p:spPr>
+          <a:xfrm>
+            <a:off x="6408638" y="4169664"/>
+            <a:ext cx="685800" cy="384048"/>
+          </a:xfrm>
+          <a:prstGeom prst="rect">
+            <a:avLst>
+              <a:gd name="adj" fmla="val 9524"/>
+            </a:avLst>
+          </a:prstGeom>
+          <a:solidFill>
+            <a:srgbClr val="FFFFFF"/>
+          </a:solidFill>
+          <a:ln w="12700">
+            <a:solidFill>
+              <a:srgbClr val="DB2777"/>
+            </a:solidFill>
+            <a:prstDash val="solid"/>
+          </a:ln>
+        </p:spPr>
+      </p:sp>
+      <p:sp>
+        <p:nvSpPr>
+          <p:cNvPr id="45" name="Text 43"/>
+          <p:cNvSpPr/>
+          <p:nvPr/>
+        </p:nvSpPr>
+        <p:spPr>
+          <a:xfrm>
+            <a:off x="6408638" y="4169664"/>
+            <a:ext cx="685800" cy="384048"/>
+          </a:xfrm>
+          <a:prstGeom prst="rect">
+            <a:avLst/>
+          </a:prstGeom>
+          <a:noFill/>
+          <a:ln/>
+        </p:spPr>
+        <p:txBody>
+          <a:bodyPr wrap="square" lIns="0" tIns="0" rIns="0" bIns="0" rtlCol="0" anchor="ctr"/>
+          <a:lstStyle/>
+          <a:p>
+            <a:pPr algn="ctr" indent="0" marL="0">
+              <a:buNone/>
+            </a:pPr>
+            <a:r>
+              <a:rPr lang="en-US" sz="900" b="1" dirty="0">
+                <a:solidFill>
+                  <a:srgbClr val="9D174D"/>
+                </a:solidFill>
+                <a:latin typeface="Trebuchet MS" pitchFamily="34" charset="0"/>
+                <a:ea typeface="Trebuchet MS" pitchFamily="34" charset="-122"/>
+                <a:cs typeface="Trebuchet MS" pitchFamily="34" charset="-120"/>
+              </a:rPr>
               <a:t>s</a:t>
             </a:r>
             <a:endParaRPr lang="en-US" sz="900" dirty="0"/>
@@ -27842,13 +28268,79 @@
       </p:sp>
       <p:sp>
         <p:nvSpPr>
-          <p:cNvPr id="39" name="Text 37"/>
-          <p:cNvSpPr/>
-          <p:nvPr/>
-        </p:nvSpPr>
-        <p:spPr>
-          <a:xfrm>
-            <a:off x="5577840" y="4572000"/>
+          <p:cNvPr id="46" name="Shape 44"/>
+          <p:cNvSpPr/>
+          <p:nvPr/>
+        </p:nvSpPr>
+        <p:spPr>
+          <a:xfrm>
+            <a:off x="7447135" y="4169664"/>
+            <a:ext cx="685800" cy="384048"/>
+          </a:xfrm>
+          <a:prstGeom prst="rect">
+            <a:avLst>
+              <a:gd name="adj" fmla="val 9524"/>
+            </a:avLst>
+          </a:prstGeom>
+          <a:solidFill>
+            <a:srgbClr val="FFFFFF"/>
+          </a:solidFill>
+          <a:ln w="12700">
+            <a:solidFill>
+              <a:srgbClr val="DB2777"/>
+            </a:solidFill>
+            <a:prstDash val="solid"/>
+          </a:ln>
+        </p:spPr>
+      </p:sp>
+      <p:sp>
+        <p:nvSpPr>
+          <p:cNvPr id="47" name="Text 45"/>
+          <p:cNvSpPr/>
+          <p:nvPr/>
+        </p:nvSpPr>
+        <p:spPr>
+          <a:xfrm>
+            <a:off x="7447135" y="4169664"/>
+            <a:ext cx="685800" cy="384048"/>
+          </a:xfrm>
+          <a:prstGeom prst="rect">
+            <a:avLst/>
+          </a:prstGeom>
+          <a:noFill/>
+          <a:ln/>
+        </p:spPr>
+        <p:txBody>
+          <a:bodyPr wrap="square" lIns="0" tIns="0" rIns="0" bIns="0" rtlCol="0" anchor="ctr"/>
+          <a:lstStyle/>
+          <a:p>
+            <a:pPr algn="ctr" indent="0" marL="0">
+              <a:buNone/>
+            </a:pPr>
+            <a:r>
+              <a:rPr lang="en-US" sz="900" b="1" dirty="0">
+                <a:solidFill>
+                  <a:srgbClr val="9D174D"/>
+                </a:solidFill>
+                <a:latin typeface="Trebuchet MS" pitchFamily="34" charset="0"/>
+                <a:ea typeface="Trebuchet MS" pitchFamily="34" charset="-122"/>
+                <a:cs typeface="Trebuchet MS" pitchFamily="34" charset="-120"/>
+              </a:rPr>
+              <a:t>ed</a:t>
+            </a:r>
+            <a:endParaRPr lang="en-US" sz="900" dirty="0"/>
+          </a:p>
+        </p:txBody>
+      </p:sp>
+      <p:sp>
+        <p:nvSpPr>
+          <p:cNvPr id="48" name="Text 46"/>
+          <p:cNvSpPr/>
+          <p:nvPr/>
+        </p:nvSpPr>
+        <p:spPr>
+          <a:xfrm>
+            <a:off x="7447135" y="4572000"/>
             <a:ext cx="685800" cy="219456"/>
           </a:xfrm>
           <a:prstGeom prst="rect">
@@ -27873,75 +28365,9 @@
                 <a:ea typeface="Calibri" pitchFamily="34" charset="-122"/>
                 <a:cs typeface="Calibri" pitchFamily="34" charset="-120"/>
               </a:rPr>
-              <a:t>/zh/</a:t>
+              <a:t>/d/</a:t>
             </a:r>
             <a:endParaRPr lang="en-US" sz="750" dirty="0"/>
-          </a:p>
-        </p:txBody>
-      </p:sp>
-      <p:sp>
-        <p:nvSpPr>
-          <p:cNvPr id="40" name="Shape 38"/>
-          <p:cNvSpPr/>
-          <p:nvPr/>
-        </p:nvSpPr>
-        <p:spPr>
-          <a:xfrm>
-            <a:off x="7031736" y="4169664"/>
-            <a:ext cx="685800" cy="384048"/>
-          </a:xfrm>
-          <a:prstGeom prst="rect">
-            <a:avLst>
-              <a:gd name="adj" fmla="val 9524"/>
-            </a:avLst>
-          </a:prstGeom>
-          <a:solidFill>
-            <a:srgbClr val="FFFFFF"/>
-          </a:solidFill>
-          <a:ln w="12700">
-            <a:solidFill>
-              <a:srgbClr val="DB2777"/>
-            </a:solidFill>
-            <a:prstDash val="solid"/>
-          </a:ln>
-        </p:spPr>
-      </p:sp>
-      <p:sp>
-        <p:nvSpPr>
-          <p:cNvPr id="41" name="Text 39"/>
-          <p:cNvSpPr/>
-          <p:nvPr/>
-        </p:nvSpPr>
-        <p:spPr>
-          <a:xfrm>
-            <a:off x="7031736" y="4169664"/>
-            <a:ext cx="685800" cy="384048"/>
-          </a:xfrm>
-          <a:prstGeom prst="rect">
-            <a:avLst/>
-          </a:prstGeom>
-          <a:noFill/>
-          <a:ln/>
-        </p:spPr>
-        <p:txBody>
-          <a:bodyPr wrap="square" lIns="0" tIns="0" rIns="0" bIns="0" rtlCol="0" anchor="ctr"/>
-          <a:lstStyle/>
-          <a:p>
-            <a:pPr algn="ctr" indent="0" marL="0">
-              <a:buNone/>
-            </a:pPr>
-            <a:r>
-              <a:rPr lang="en-US" sz="900" b="1" dirty="0">
-                <a:solidFill>
-                  <a:srgbClr val="9D174D"/>
-                </a:solidFill>
-                <a:latin typeface="Trebuchet MS" pitchFamily="34" charset="0"/>
-                <a:ea typeface="Trebuchet MS" pitchFamily="34" charset="-122"/>
-                <a:cs typeface="Trebuchet MS" pitchFamily="34" charset="-120"/>
-              </a:rPr>
-              <a:t>ure</a:t>
-            </a:r>
-            <a:endParaRPr lang="en-US" sz="900" dirty="0"/>
           </a:p>
         </p:txBody>
       </p:sp>
@@ -28370,7 +28796,7 @@
                 <a:ea typeface="Trebuchet MS" pitchFamily="34" charset="-122"/>
                 <a:cs typeface="Trebuchet MS" pitchFamily="34" charset="-120"/>
               </a:rPr>
-              <a:t>enclosure</a:t>
+              <a:t>foreclosure</a:t>
             </a:r>
             <a:endParaRPr lang="en-US" sz="2800" dirty="0"/>
           </a:p>
@@ -29197,7 +29623,7 @@
                 <a:ea typeface="Trebuchet MS" pitchFamily="34" charset="-122"/>
                 <a:cs typeface="Trebuchet MS" pitchFamily="34" charset="-120"/>
               </a:rPr>
-              <a:t>enclosure</a:t>
+              <a:t>foreclosure</a:t>
             </a:r>
             <a:endParaRPr lang="en-US" sz="2800" dirty="0"/>
           </a:p>
@@ -29336,7 +29762,7 @@
                 <a:ea typeface="Trebuchet MS" pitchFamily="34" charset="-122"/>
                 <a:cs typeface="Trebuchet MS" pitchFamily="34" charset="-120"/>
               </a:rPr>
-              <a:t>en</a:t>
+              <a:t>fore</a:t>
             </a:r>
             <a:endParaRPr lang="en-US" sz="1300" dirty="0"/>
           </a:p>
@@ -29375,7 +29801,7 @@
                 <a:ea typeface="Calibri" pitchFamily="34" charset="-122"/>
                 <a:cs typeface="Calibri" pitchFamily="34" charset="-120"/>
               </a:rPr>
-              <a:t>put into or surround</a:t>
+              <a:t>before, in front of</a:t>
             </a:r>
             <a:endParaRPr lang="en-US" sz="850" dirty="0"/>
           </a:p>
@@ -29599,7 +30025,7 @@
                 <a:ea typeface="Calibri" pitchFamily="34" charset="-122"/>
                 <a:cs typeface="Calibri" pitchFamily="34" charset="-120"/>
               </a:rPr>
-              <a:t>result or process of</a:t>
+              <a:t>act or result of</a:t>
             </a:r>
             <a:endParaRPr lang="en-US" sz="850" dirty="0"/>
           </a:p>
@@ -29607,7 +30033,46 @@
       </p:sp>
       <p:sp>
         <p:nvSpPr>
-          <p:cNvPr id="25" name="Shape 23"/>
+          <p:cNvPr id="25" name="Text 23"/>
+          <p:cNvSpPr/>
+          <p:nvPr/>
+        </p:nvSpPr>
+        <p:spPr>
+          <a:xfrm>
+            <a:off x="6519672" y="2752344"/>
+            <a:ext cx="1828800" cy="182880"/>
+          </a:xfrm>
+          <a:prstGeom prst="rect">
+            <a:avLst/>
+          </a:prstGeom>
+          <a:noFill/>
+          <a:ln/>
+        </p:spPr>
+        <p:txBody>
+          <a:bodyPr wrap="square" lIns="0" tIns="0" rIns="0" bIns="0" rtlCol="0" anchor="t"/>
+          <a:lstStyle/>
+          <a:p>
+            <a:pPr algn="ctr" indent="0" marL="0">
+              <a:buNone/>
+            </a:pPr>
+            <a:r>
+              <a:rPr lang="en-US" sz="700" i="1" dirty="0">
+                <a:solidFill>
+                  <a:srgbClr val="94A3B8"/>
+                </a:solidFill>
+                <a:latin typeface="Calibri" pitchFamily="34" charset="0"/>
+                <a:ea typeface="Calibri" pitchFamily="34" charset="-122"/>
+                <a:cs typeface="Calibri" pitchFamily="34" charset="-120"/>
+              </a:rPr>
+              <a:t>'e' dropped before vowel suffix</a:t>
+            </a:r>
+            <a:endParaRPr lang="en-US" sz="700" dirty="0"/>
+          </a:p>
+        </p:txBody>
+      </p:sp>
+      <p:sp>
+        <p:nvSpPr>
+          <p:cNvPr id="26" name="Shape 24"/>
           <p:cNvSpPr/>
           <p:nvPr/>
         </p:nvSpPr>
@@ -29634,7 +30099,7 @@
       </p:sp>
       <p:sp>
         <p:nvSpPr>
-          <p:cNvPr id="26" name="Text 24"/>
+          <p:cNvPr id="27" name="Text 25"/>
           <p:cNvSpPr/>
           <p:nvPr/>
         </p:nvSpPr>
@@ -29673,7 +30138,7 @@
       </p:sp>
       <p:sp>
         <p:nvSpPr>
-          <p:cNvPr id="27" name="Shape 25"/>
+          <p:cNvPr id="28" name="Shape 26"/>
           <p:cNvSpPr/>
           <p:nvPr/>
         </p:nvSpPr>
@@ -29700,7 +30165,7 @@
       </p:sp>
       <p:sp>
         <p:nvSpPr>
-          <p:cNvPr id="28" name="Text 26"/>
+          <p:cNvPr id="29" name="Text 27"/>
           <p:cNvSpPr/>
           <p:nvPr/>
         </p:nvSpPr>
@@ -29739,7 +30204,7 @@
       </p:sp>
       <p:sp>
         <p:nvSpPr>
-          <p:cNvPr id="29" name="Shape 27"/>
+          <p:cNvPr id="30" name="Shape 28"/>
           <p:cNvSpPr/>
           <p:nvPr/>
         </p:nvSpPr>
@@ -29766,7 +30231,7 @@
       </p:sp>
       <p:sp>
         <p:nvSpPr>
-          <p:cNvPr id="30" name="Text 28"/>
+          <p:cNvPr id="31" name="Text 29"/>
           <p:cNvSpPr/>
           <p:nvPr/>
         </p:nvSpPr>
@@ -29805,7 +30270,7 @@
       </p:sp>
       <p:sp>
         <p:nvSpPr>
-          <p:cNvPr id="31" name="Shape 29"/>
+          <p:cNvPr id="32" name="Shape 30"/>
           <p:cNvSpPr/>
           <p:nvPr/>
         </p:nvSpPr>
@@ -29832,7 +30297,7 @@
       </p:sp>
       <p:sp>
         <p:nvSpPr>
-          <p:cNvPr id="32" name="Text 30"/>
+          <p:cNvPr id="33" name="Text 31"/>
           <p:cNvSpPr/>
           <p:nvPr/>
         </p:nvSpPr>
@@ -30294,7 +30759,7 @@
                 <a:ea typeface="Trebuchet MS" pitchFamily="34" charset="-122"/>
                 <a:cs typeface="Trebuchet MS" pitchFamily="34" charset="-120"/>
               </a:rPr>
-              <a:t>enclosure</a:t>
+              <a:t>foreclosure</a:t>
             </a:r>
             <a:endParaRPr lang="en-US" sz="2800" dirty="0"/>
           </a:p>
@@ -30433,7 +30898,7 @@
                 <a:ea typeface="Trebuchet MS" pitchFamily="34" charset="-122"/>
                 <a:cs typeface="Trebuchet MS" pitchFamily="34" charset="-120"/>
               </a:rPr>
-              <a:t>en</a:t>
+              <a:t>fore</a:t>
             </a:r>
             <a:endParaRPr lang="en-US" sz="1300" dirty="0"/>
           </a:p>
@@ -30472,7 +30937,7 @@
                 <a:ea typeface="Calibri" pitchFamily="34" charset="-122"/>
                 <a:cs typeface="Calibri" pitchFamily="34" charset="-120"/>
               </a:rPr>
-              <a:t>put into or surround</a:t>
+              <a:t>before, in front of</a:t>
             </a:r>
             <a:endParaRPr lang="en-US" sz="850" dirty="0"/>
           </a:p>
@@ -30696,7 +31161,7 @@
                 <a:ea typeface="Calibri" pitchFamily="34" charset="-122"/>
                 <a:cs typeface="Calibri" pitchFamily="34" charset="-120"/>
               </a:rPr>
-              <a:t>result or process of</a:t>
+              <a:t>act or result of</a:t>
             </a:r>
             <a:endParaRPr lang="en-US" sz="850" dirty="0"/>
           </a:p>
@@ -30704,7 +31169,46 @@
       </p:sp>
       <p:sp>
         <p:nvSpPr>
-          <p:cNvPr id="25" name="Shape 23"/>
+          <p:cNvPr id="25" name="Text 23"/>
+          <p:cNvSpPr/>
+          <p:nvPr/>
+        </p:nvSpPr>
+        <p:spPr>
+          <a:xfrm>
+            <a:off x="6519672" y="2752344"/>
+            <a:ext cx="1828800" cy="182880"/>
+          </a:xfrm>
+          <a:prstGeom prst="rect">
+            <a:avLst/>
+          </a:prstGeom>
+          <a:noFill/>
+          <a:ln/>
+        </p:spPr>
+        <p:txBody>
+          <a:bodyPr wrap="square" lIns="0" tIns="0" rIns="0" bIns="0" rtlCol="0" anchor="t"/>
+          <a:lstStyle/>
+          <a:p>
+            <a:pPr algn="ctr" indent="0" marL="0">
+              <a:buNone/>
+            </a:pPr>
+            <a:r>
+              <a:rPr lang="en-US" sz="700" i="1" dirty="0">
+                <a:solidFill>
+                  <a:srgbClr val="94A3B8"/>
+                </a:solidFill>
+                <a:latin typeface="Calibri" pitchFamily="34" charset="0"/>
+                <a:ea typeface="Calibri" pitchFamily="34" charset="-122"/>
+                <a:cs typeface="Calibri" pitchFamily="34" charset="-120"/>
+              </a:rPr>
+              <a:t>'e' dropped before vowel suffix</a:t>
+            </a:r>
+            <a:endParaRPr lang="en-US" sz="700" dirty="0"/>
+          </a:p>
+        </p:txBody>
+      </p:sp>
+      <p:sp>
+        <p:nvSpPr>
+          <p:cNvPr id="26" name="Shape 24"/>
           <p:cNvSpPr/>
           <p:nvPr/>
         </p:nvSpPr>
@@ -30731,7 +31235,7 @@
       </p:sp>
       <p:sp>
         <p:nvSpPr>
-          <p:cNvPr id="26" name="Text 24"/>
+          <p:cNvPr id="27" name="Text 25"/>
           <p:cNvSpPr/>
           <p:nvPr/>
         </p:nvSpPr>
@@ -30770,7 +31274,7 @@
       </p:sp>
       <p:sp>
         <p:nvSpPr>
-          <p:cNvPr id="27" name="Shape 25"/>
+          <p:cNvPr id="28" name="Shape 26"/>
           <p:cNvSpPr/>
           <p:nvPr/>
         </p:nvSpPr>
@@ -30797,7 +31301,7 @@
       </p:sp>
       <p:sp>
         <p:nvSpPr>
-          <p:cNvPr id="28" name="Shape 26"/>
+          <p:cNvPr id="29" name="Shape 27"/>
           <p:cNvSpPr/>
           <p:nvPr/>
         </p:nvSpPr>
@@ -30824,7 +31328,7 @@
       </p:sp>
       <p:sp>
         <p:nvSpPr>
-          <p:cNvPr id="29" name="Text 27"/>
+          <p:cNvPr id="30" name="Text 28"/>
           <p:cNvSpPr/>
           <p:nvPr/>
         </p:nvSpPr>
@@ -30855,7 +31359,7 @@
                 <a:ea typeface="Trebuchet MS" pitchFamily="34" charset="-122"/>
                 <a:cs typeface="Trebuchet MS" pitchFamily="34" charset="-120"/>
               </a:rPr>
-              <a:t>en</a:t>
+              <a:t>fore</a:t>
             </a:r>
             <a:endParaRPr lang="en-US" sz="1400" dirty="0"/>
           </a:p>
@@ -30863,7 +31367,7 @@
       </p:sp>
       <p:sp>
         <p:nvSpPr>
-          <p:cNvPr id="30" name="Text 28"/>
+          <p:cNvPr id="31" name="Text 29"/>
           <p:cNvSpPr/>
           <p:nvPr/>
         </p:nvSpPr>
@@ -30902,7 +31406,7 @@
       </p:sp>
       <p:sp>
         <p:nvSpPr>
-          <p:cNvPr id="31" name="Shape 29"/>
+          <p:cNvPr id="32" name="Shape 30"/>
           <p:cNvSpPr/>
           <p:nvPr/>
         </p:nvSpPr>
@@ -30929,7 +31433,7 @@
       </p:sp>
       <p:sp>
         <p:nvSpPr>
-          <p:cNvPr id="32" name="Text 30"/>
+          <p:cNvPr id="33" name="Text 31"/>
           <p:cNvSpPr/>
           <p:nvPr/>
         </p:nvSpPr>
@@ -30968,7 +31472,7 @@
       </p:sp>
       <p:sp>
         <p:nvSpPr>
-          <p:cNvPr id="33" name="Text 31"/>
+          <p:cNvPr id="34" name="Text 32"/>
           <p:cNvSpPr/>
           <p:nvPr/>
         </p:nvSpPr>
@@ -31007,7 +31511,7 @@
       </p:sp>
       <p:sp>
         <p:nvSpPr>
-          <p:cNvPr id="34" name="Shape 32"/>
+          <p:cNvPr id="35" name="Shape 33"/>
           <p:cNvSpPr/>
           <p:nvPr/>
         </p:nvSpPr>
@@ -31034,7 +31538,7 @@
       </p:sp>
       <p:sp>
         <p:nvSpPr>
-          <p:cNvPr id="35" name="Text 33"/>
+          <p:cNvPr id="36" name="Text 34"/>
           <p:cNvSpPr/>
           <p:nvPr/>
         </p:nvSpPr>
@@ -31073,7 +31577,7 @@
       </p:sp>
       <p:sp>
         <p:nvSpPr>
-          <p:cNvPr id="36" name="Shape 34"/>
+          <p:cNvPr id="37" name="Shape 35"/>
           <p:cNvSpPr/>
           <p:nvPr/>
         </p:nvSpPr>
@@ -31100,7 +31604,7 @@
       </p:sp>
       <p:sp>
         <p:nvSpPr>
-          <p:cNvPr id="37" name="Text 35"/>
+          <p:cNvPr id="38" name="Text 36"/>
           <p:cNvSpPr/>
           <p:nvPr/>
         </p:nvSpPr>
@@ -31139,7 +31643,7 @@
       </p:sp>
       <p:sp>
         <p:nvSpPr>
-          <p:cNvPr id="38" name="Shape 36"/>
+          <p:cNvPr id="39" name="Shape 37"/>
           <p:cNvSpPr/>
           <p:nvPr/>
         </p:nvSpPr>
@@ -31166,7 +31670,7 @@
       </p:sp>
       <p:sp>
         <p:nvSpPr>
-          <p:cNvPr id="39" name="Text 37"/>
+          <p:cNvPr id="40" name="Text 38"/>
           <p:cNvSpPr/>
           <p:nvPr/>
         </p:nvSpPr>
@@ -31628,7 +32132,7 @@
                 <a:ea typeface="Trebuchet MS" pitchFamily="34" charset="-122"/>
                 <a:cs typeface="Trebuchet MS" pitchFamily="34" charset="-120"/>
               </a:rPr>
-              <a:t>enclosure</a:t>
+              <a:t>foreclosure</a:t>
             </a:r>
             <a:endParaRPr lang="en-US" sz="2800" dirty="0"/>
           </a:p>
@@ -31767,7 +32271,7 @@
                 <a:ea typeface="Trebuchet MS" pitchFamily="34" charset="-122"/>
                 <a:cs typeface="Trebuchet MS" pitchFamily="34" charset="-120"/>
               </a:rPr>
-              <a:t>en</a:t>
+              <a:t>fore</a:t>
             </a:r>
             <a:endParaRPr lang="en-US" sz="1300" dirty="0"/>
           </a:p>
@@ -31806,7 +32310,7 @@
                 <a:ea typeface="Calibri" pitchFamily="34" charset="-122"/>
                 <a:cs typeface="Calibri" pitchFamily="34" charset="-120"/>
               </a:rPr>
-              <a:t>put into or surround</a:t>
+              <a:t>before, in front of</a:t>
             </a:r>
             <a:endParaRPr lang="en-US" sz="850" dirty="0"/>
           </a:p>
@@ -32030,7 +32534,7 @@
                 <a:ea typeface="Calibri" pitchFamily="34" charset="-122"/>
                 <a:cs typeface="Calibri" pitchFamily="34" charset="-120"/>
               </a:rPr>
-              <a:t>result or process of</a:t>
+              <a:t>act or result of</a:t>
             </a:r>
             <a:endParaRPr lang="en-US" sz="850" dirty="0"/>
           </a:p>
@@ -32038,7 +32542,46 @@
       </p:sp>
       <p:sp>
         <p:nvSpPr>
-          <p:cNvPr id="25" name="Shape 23"/>
+          <p:cNvPr id="25" name="Text 23"/>
+          <p:cNvSpPr/>
+          <p:nvPr/>
+        </p:nvSpPr>
+        <p:spPr>
+          <a:xfrm>
+            <a:off x="6519672" y="2752344"/>
+            <a:ext cx="1828800" cy="182880"/>
+          </a:xfrm>
+          <a:prstGeom prst="rect">
+            <a:avLst/>
+          </a:prstGeom>
+          <a:noFill/>
+          <a:ln/>
+        </p:spPr>
+        <p:txBody>
+          <a:bodyPr wrap="square" lIns="0" tIns="0" rIns="0" bIns="0" rtlCol="0" anchor="t"/>
+          <a:lstStyle/>
+          <a:p>
+            <a:pPr algn="ctr" indent="0" marL="0">
+              <a:buNone/>
+            </a:pPr>
+            <a:r>
+              <a:rPr lang="en-US" sz="700" i="1" dirty="0">
+                <a:solidFill>
+                  <a:srgbClr val="94A3B8"/>
+                </a:solidFill>
+                <a:latin typeface="Calibri" pitchFamily="34" charset="0"/>
+                <a:ea typeface="Calibri" pitchFamily="34" charset="-122"/>
+                <a:cs typeface="Calibri" pitchFamily="34" charset="-120"/>
+              </a:rPr>
+              <a:t>'e' dropped before vowel suffix</a:t>
+            </a:r>
+            <a:endParaRPr lang="en-US" sz="700" dirty="0"/>
+          </a:p>
+        </p:txBody>
+      </p:sp>
+      <p:sp>
+        <p:nvSpPr>
+          <p:cNvPr id="26" name="Shape 24"/>
           <p:cNvSpPr/>
           <p:nvPr/>
         </p:nvSpPr>
@@ -32065,7 +32608,7 @@
       </p:sp>
       <p:sp>
         <p:nvSpPr>
-          <p:cNvPr id="26" name="Text 24"/>
+          <p:cNvPr id="27" name="Text 25"/>
           <p:cNvSpPr/>
           <p:nvPr/>
         </p:nvSpPr>
@@ -32104,7 +32647,7 @@
       </p:sp>
       <p:sp>
         <p:nvSpPr>
-          <p:cNvPr id="27" name="Shape 25"/>
+          <p:cNvPr id="28" name="Shape 26"/>
           <p:cNvSpPr/>
           <p:nvPr/>
         </p:nvSpPr>
@@ -32131,7 +32674,7 @@
       </p:sp>
       <p:sp>
         <p:nvSpPr>
-          <p:cNvPr id="28" name="Shape 26"/>
+          <p:cNvPr id="29" name="Shape 27"/>
           <p:cNvSpPr/>
           <p:nvPr/>
         </p:nvSpPr>
@@ -32158,7 +32701,7 @@
       </p:sp>
       <p:sp>
         <p:nvSpPr>
-          <p:cNvPr id="29" name="Text 27"/>
+          <p:cNvPr id="30" name="Text 28"/>
           <p:cNvSpPr/>
           <p:nvPr/>
         </p:nvSpPr>
@@ -32189,7 +32732,7 @@
                 <a:ea typeface="Trebuchet MS" pitchFamily="34" charset="-122"/>
                 <a:cs typeface="Trebuchet MS" pitchFamily="34" charset="-120"/>
               </a:rPr>
-              <a:t>en</a:t>
+              <a:t>fore</a:t>
             </a:r>
             <a:endParaRPr lang="en-US" sz="1400" dirty="0"/>
           </a:p>
@@ -32197,7 +32740,7 @@
       </p:sp>
       <p:sp>
         <p:nvSpPr>
-          <p:cNvPr id="30" name="Text 28"/>
+          <p:cNvPr id="31" name="Text 29"/>
           <p:cNvSpPr/>
           <p:nvPr/>
         </p:nvSpPr>
@@ -32236,7 +32779,7 @@
       </p:sp>
       <p:sp>
         <p:nvSpPr>
-          <p:cNvPr id="31" name="Shape 29"/>
+          <p:cNvPr id="32" name="Shape 30"/>
           <p:cNvSpPr/>
           <p:nvPr/>
         </p:nvSpPr>
@@ -32263,7 +32806,7 @@
       </p:sp>
       <p:sp>
         <p:nvSpPr>
-          <p:cNvPr id="32" name="Text 30"/>
+          <p:cNvPr id="33" name="Text 31"/>
           <p:cNvSpPr/>
           <p:nvPr/>
         </p:nvSpPr>
@@ -32302,7 +32845,7 @@
       </p:sp>
       <p:sp>
         <p:nvSpPr>
-          <p:cNvPr id="33" name="Text 31"/>
+          <p:cNvPr id="34" name="Text 32"/>
           <p:cNvSpPr/>
           <p:nvPr/>
         </p:nvSpPr>
@@ -32341,7 +32884,7 @@
       </p:sp>
       <p:sp>
         <p:nvSpPr>
-          <p:cNvPr id="34" name="Shape 32"/>
+          <p:cNvPr id="35" name="Shape 33"/>
           <p:cNvSpPr/>
           <p:nvPr/>
         </p:nvSpPr>
@@ -32368,7 +32911,7 @@
       </p:sp>
       <p:sp>
         <p:nvSpPr>
-          <p:cNvPr id="35" name="Text 33"/>
+          <p:cNvPr id="36" name="Text 34"/>
           <p:cNvSpPr/>
           <p:nvPr/>
         </p:nvSpPr>
@@ -32407,7 +32950,7 @@
       </p:sp>
       <p:sp>
         <p:nvSpPr>
-          <p:cNvPr id="36" name="Shape 34"/>
+          <p:cNvPr id="37" name="Shape 35"/>
           <p:cNvSpPr/>
           <p:nvPr/>
         </p:nvSpPr>
@@ -32434,7 +32977,7 @@
       </p:sp>
       <p:sp>
         <p:nvSpPr>
-          <p:cNvPr id="37" name="Text 35"/>
+          <p:cNvPr id="38" name="Text 36"/>
           <p:cNvSpPr/>
           <p:nvPr/>
         </p:nvSpPr>
@@ -32473,7 +33016,7 @@
       </p:sp>
       <p:sp>
         <p:nvSpPr>
-          <p:cNvPr id="38" name="Shape 36"/>
+          <p:cNvPr id="39" name="Shape 37"/>
           <p:cNvSpPr/>
           <p:nvPr/>
         </p:nvSpPr>
@@ -32500,7 +33043,7 @@
       </p:sp>
       <p:sp>
         <p:nvSpPr>
-          <p:cNvPr id="39" name="Shape 37"/>
+          <p:cNvPr id="40" name="Shape 38"/>
           <p:cNvSpPr/>
           <p:nvPr/>
         </p:nvSpPr>
@@ -32527,7 +33070,7 @@
       </p:sp>
       <p:sp>
         <p:nvSpPr>
-          <p:cNvPr id="40" name="Text 38"/>
+          <p:cNvPr id="41" name="Text 39"/>
           <p:cNvSpPr/>
           <p:nvPr/>
         </p:nvSpPr>
@@ -32558,7 +33101,7 @@
                 <a:ea typeface="Trebuchet MS" pitchFamily="34" charset="-122"/>
                 <a:cs typeface="Trebuchet MS" pitchFamily="34" charset="-120"/>
               </a:rPr>
-              <a:t>e</a:t>
+              <a:t>f</a:t>
             </a:r>
             <a:endParaRPr lang="en-US" sz="900" dirty="0"/>
           </a:p>
@@ -32566,7 +33109,7 @@
       </p:sp>
       <p:sp>
         <p:nvSpPr>
-          <p:cNvPr id="41" name="Shape 39"/>
+          <p:cNvPr id="42" name="Shape 40"/>
           <p:cNvSpPr/>
           <p:nvPr/>
         </p:nvSpPr>
@@ -32593,7 +33136,7 @@
       </p:sp>
       <p:sp>
         <p:nvSpPr>
-          <p:cNvPr id="42" name="Text 40"/>
+          <p:cNvPr id="43" name="Text 41"/>
           <p:cNvSpPr/>
           <p:nvPr/>
         </p:nvSpPr>
@@ -32624,7 +33167,7 @@
                 <a:ea typeface="Trebuchet MS" pitchFamily="34" charset="-122"/>
                 <a:cs typeface="Trebuchet MS" pitchFamily="34" charset="-120"/>
               </a:rPr>
-              <a:t>n</a:t>
+              <a:t>or</a:t>
             </a:r>
             <a:endParaRPr lang="en-US" sz="900" dirty="0"/>
           </a:p>
@@ -32632,7 +33175,7 @@
       </p:sp>
       <p:sp>
         <p:nvSpPr>
-          <p:cNvPr id="43" name="Shape 41"/>
+          <p:cNvPr id="44" name="Shape 42"/>
           <p:cNvSpPr/>
           <p:nvPr/>
         </p:nvSpPr>
@@ -32659,7 +33202,7 @@
       </p:sp>
       <p:sp>
         <p:nvSpPr>
-          <p:cNvPr id="44" name="Text 42"/>
+          <p:cNvPr id="45" name="Text 43"/>
           <p:cNvSpPr/>
           <p:nvPr/>
         </p:nvSpPr>
@@ -32698,7 +33241,7 @@
       </p:sp>
       <p:sp>
         <p:nvSpPr>
-          <p:cNvPr id="45" name="Shape 43"/>
+          <p:cNvPr id="46" name="Shape 44"/>
           <p:cNvSpPr/>
           <p:nvPr/>
         </p:nvSpPr>
@@ -32725,7 +33268,7 @@
       </p:sp>
       <p:sp>
         <p:nvSpPr>
-          <p:cNvPr id="46" name="Text 44"/>
+          <p:cNvPr id="47" name="Text 45"/>
           <p:cNvSpPr/>
           <p:nvPr/>
         </p:nvSpPr>
@@ -32764,7 +33307,7 @@
       </p:sp>
       <p:sp>
         <p:nvSpPr>
-          <p:cNvPr id="47" name="Shape 45"/>
+          <p:cNvPr id="48" name="Shape 46"/>
           <p:cNvSpPr/>
           <p:nvPr/>
         </p:nvSpPr>
@@ -32791,7 +33334,7 @@
       </p:sp>
       <p:sp>
         <p:nvSpPr>
-          <p:cNvPr id="48" name="Text 46"/>
+          <p:cNvPr id="49" name="Text 47"/>
           <p:cNvSpPr/>
           <p:nvPr/>
         </p:nvSpPr>
@@ -32830,7 +33373,7 @@
       </p:sp>
       <p:sp>
         <p:nvSpPr>
-          <p:cNvPr id="49" name="Text 47"/>
+          <p:cNvPr id="50" name="Text 48"/>
           <p:cNvSpPr/>
           <p:nvPr/>
         </p:nvSpPr>
@@ -32869,7 +33412,7 @@
       </p:sp>
       <p:sp>
         <p:nvSpPr>
-          <p:cNvPr id="50" name="Shape 48"/>
+          <p:cNvPr id="51" name="Shape 49"/>
           <p:cNvSpPr/>
           <p:nvPr/>
         </p:nvSpPr>
@@ -32896,7 +33439,7 @@
       </p:sp>
       <p:sp>
         <p:nvSpPr>
-          <p:cNvPr id="51" name="Text 49"/>
+          <p:cNvPr id="52" name="Text 50"/>
           <p:cNvSpPr/>
           <p:nvPr/>
         </p:nvSpPr>
@@ -34881,7 +35424,7 @@
                 <a:ea typeface="Trebuchet MS" pitchFamily="34" charset="-122"/>
                 <a:cs typeface="Trebuchet MS" pitchFamily="34" charset="-120"/>
               </a:rPr>
-              <a:t>in-</a:t>
+              <a:t>dis-</a:t>
             </a:r>
             <a:endParaRPr lang="en-US" sz="1300" dirty="0"/>
           </a:p>
@@ -35034,7 +35577,7 @@
                 <a:ea typeface="Trebuchet MS" pitchFamily="34" charset="-122"/>
                 <a:cs typeface="Trebuchet MS" pitchFamily="34" charset="-120"/>
               </a:rPr>
-              <a:t>dis-</a:t>
+              <a:t>fore-</a:t>
             </a:r>
             <a:endParaRPr lang="en-US" sz="1300" dirty="0"/>
           </a:p>
@@ -35187,7 +35730,7 @@
                 <a:ea typeface="Trebuchet MS" pitchFamily="34" charset="-122"/>
                 <a:cs typeface="Trebuchet MS" pitchFamily="34" charset="-120"/>
               </a:rPr>
-              <a:t>fore-</a:t>
+              <a:t>in-</a:t>
             </a:r>
             <a:endParaRPr lang="en-US" sz="1300" dirty="0"/>
           </a:p>
@@ -35534,7 +36077,7 @@
                 <a:ea typeface="Trebuchet MS" pitchFamily="34" charset="-122"/>
                 <a:cs typeface="Trebuchet MS" pitchFamily="34" charset="-120"/>
               </a:rPr>
-              <a:t>close</a:t>
+              <a:t>closure</a:t>
             </a:r>
             <a:endParaRPr lang="en-US" sz="1200" dirty="0"/>
           </a:p>
@@ -35600,7 +36143,7 @@
                 <a:ea typeface="Trebuchet MS" pitchFamily="34" charset="-122"/>
                 <a:cs typeface="Trebuchet MS" pitchFamily="34" charset="-120"/>
               </a:rPr>
-              <a:t>closed</a:t>
+              <a:t>enclose</a:t>
             </a:r>
             <a:endParaRPr lang="en-US" sz="1200" dirty="0"/>
           </a:p>
@@ -35666,7 +36209,7 @@
                 <a:ea typeface="Trebuchet MS" pitchFamily="34" charset="-122"/>
                 <a:cs typeface="Trebuchet MS" pitchFamily="34" charset="-120"/>
               </a:rPr>
-              <a:t>closure</a:t>
+              <a:t>disclose</a:t>
             </a:r>
             <a:endParaRPr lang="en-US" sz="1200" dirty="0"/>
           </a:p>
@@ -35732,7 +36275,7 @@
                 <a:ea typeface="Trebuchet MS" pitchFamily="34" charset="-122"/>
                 <a:cs typeface="Trebuchet MS" pitchFamily="34" charset="-120"/>
               </a:rPr>
-              <a:t>enclose</a:t>
+              <a:t>enclosed</a:t>
             </a:r>
             <a:endParaRPr lang="en-US" sz="1200" dirty="0"/>
           </a:p>
@@ -35864,7 +36407,7 @@
                 <a:ea typeface="Trebuchet MS" pitchFamily="34" charset="-122"/>
                 <a:cs typeface="Trebuchet MS" pitchFamily="34" charset="-120"/>
               </a:rPr>
-              <a:t>disclose</a:t>
+              <a:t>foreclose</a:t>
             </a:r>
             <a:endParaRPr lang="en-US" sz="1200" dirty="0"/>
           </a:p>
@@ -35930,7 +36473,7 @@
                 <a:ea typeface="Trebuchet MS" pitchFamily="34" charset="-122"/>
                 <a:cs typeface="Trebuchet MS" pitchFamily="34" charset="-120"/>
               </a:rPr>
-              <a:t>foreclose</a:t>
+              <a:t>recluse</a:t>
             </a:r>
             <a:endParaRPr lang="en-US" sz="1200" dirty="0"/>
           </a:p>
@@ -37184,7 +37727,7 @@
                 <a:ea typeface="Calibri" pitchFamily="34" charset="-122"/>
                 <a:cs typeface="Calibri" pitchFamily="34" charset="-120"/>
               </a:rPr>
-              <a:t>1.  The root 'clos' comes from a Latin word meaning to shut.</a:t>
+              <a:t>1.  The prefix 'en-' in 'enclose' means to take something apart.</a:t>
             </a:r>
             <a:endParaRPr lang="en-US" sz="1300" dirty="0"/>
           </a:p>
@@ -37207,11 +37750,11 @@
             </a:avLst>
           </a:prstGeom>
           <a:solidFill>
-            <a:srgbClr val="DCFCE7"/>
-          </a:solidFill>
-          <a:ln w="12700">
-            <a:solidFill>
-              <a:srgbClr val="16A34A"/>
+            <a:srgbClr val="FEE2E2"/>
+          </a:solidFill>
+          <a:ln w="12700">
+            <a:solidFill>
+              <a:srgbClr val="DC2626"/>
             </a:solidFill>
             <a:prstDash val="solid"/>
           </a:ln>
@@ -37244,13 +37787,13 @@
             <a:r>
               <a:rPr lang="en-US" sz="1100" b="1" dirty="0">
                 <a:solidFill>
-                  <a:srgbClr val="16A34A"/>
+                  <a:srgbClr val="DC2626"/>
                 </a:solidFill>
                 <a:latin typeface="Trebuchet MS" pitchFamily="34" charset="0"/>
                 <a:ea typeface="Trebuchet MS" pitchFamily="34" charset="-122"/>
                 <a:cs typeface="Trebuchet MS" pitchFamily="34" charset="-120"/>
               </a:rPr>
-              <a:t>TRUE</a:t>
+              <a:t>FALSE</a:t>
             </a:r>
             <a:endParaRPr lang="en-US" sz="1100" dirty="0"/>
           </a:p>
@@ -37323,7 +37866,7 @@
                 <a:ea typeface="Calibri" pitchFamily="34" charset="-122"/>
                 <a:cs typeface="Calibri" pitchFamily="34" charset="-120"/>
               </a:rPr>
-              <a:t>2.  The word 'disclose' means to hide information from others.</a:t>
+              <a:t>2.  The word 'disclose' means to hide information even more carefully.</a:t>
             </a:r>
             <a:endParaRPr lang="en-US" sz="1300" dirty="0"/>
           </a:p>
@@ -37462,7 +38005,7 @@
                 <a:ea typeface="Calibri" pitchFamily="34" charset="-122"/>
                 <a:cs typeface="Calibri" pitchFamily="34" charset="-120"/>
               </a:rPr>
-              <a:t>3.  An enclosure is a space that is surrounded or fenced in.</a:t>
+              <a:t>3.  The suffix '-ure' can be added to 'clos' to make the word 'closure'.</a:t>
             </a:r>
             <a:endParaRPr lang="en-US" sz="1300" dirty="0"/>
           </a:p>
@@ -37601,7 +38144,7 @@
                 <a:ea typeface="Calibri" pitchFamily="34" charset="-122"/>
                 <a:cs typeface="Calibri" pitchFamily="34" charset="-120"/>
               </a:rPr>
-              <a:t>4.  The root 'clos' can be found in the word 'closure'.</a:t>
+              <a:t>4.  The root 'clos' comes from a Latin word meaning to shut.</a:t>
             </a:r>
             <a:endParaRPr lang="en-US" sz="1300" dirty="0"/>
           </a:p>
@@ -37740,7 +38283,7 @@
                 <a:ea typeface="Calibri" pitchFamily="34" charset="-122"/>
                 <a:cs typeface="Calibri" pitchFamily="34" charset="-120"/>
               </a:rPr>
-              <a:t>5.  The prefix 'en' in 'enclose' means against or opposite.</a:t>
+              <a:t>5.  An enclosure is a space that is shut in or fenced off.</a:t>
             </a:r>
             <a:endParaRPr lang="en-US" sz="1300" dirty="0"/>
           </a:p>
@@ -37763,11 +38306,11 @@
             </a:avLst>
           </a:prstGeom>
           <a:solidFill>
-            <a:srgbClr val="FEE2E2"/>
-          </a:solidFill>
-          <a:ln w="12700">
-            <a:solidFill>
-              <a:srgbClr val="DC2626"/>
+            <a:srgbClr val="DCFCE7"/>
+          </a:solidFill>
+          <a:ln w="12700">
+            <a:solidFill>
+              <a:srgbClr val="16A34A"/>
             </a:solidFill>
             <a:prstDash val="solid"/>
           </a:ln>
@@ -37800,13 +38343,13 @@
             <a:r>
               <a:rPr lang="en-US" sz="1100" b="1" dirty="0">
                 <a:solidFill>
-                  <a:srgbClr val="DC2626"/>
+                  <a:srgbClr val="16A34A"/>
                 </a:solidFill>
                 <a:latin typeface="Trebuchet MS" pitchFamily="34" charset="0"/>
                 <a:ea typeface="Trebuchet MS" pitchFamily="34" charset="-122"/>
                 <a:cs typeface="Trebuchet MS" pitchFamily="34" charset="-120"/>
               </a:rPr>
-              <a:t>FALSE</a:t>
+              <a:t>TRUE</a:t>
             </a:r>
             <a:endParaRPr lang="en-US" sz="1100" dirty="0"/>
           </a:p>
@@ -38379,7 +38922,7 @@
                 <a:ea typeface="Trebuchet MS" pitchFamily="34" charset="-122"/>
                 <a:cs typeface="Trebuchet MS" pitchFamily="34" charset="-120"/>
               </a:rPr>
-              <a:t>close</a:t>
+              <a:t>closure</a:t>
             </a:r>
             <a:endParaRPr lang="en-US" sz="1300" dirty="0"/>
           </a:p>
@@ -38445,7 +38988,7 @@
                 <a:ea typeface="Trebuchet MS" pitchFamily="34" charset="-122"/>
                 <a:cs typeface="Trebuchet MS" pitchFamily="34" charset="-120"/>
               </a:rPr>
-              <a:t>closed</a:t>
+              <a:t>enclose</a:t>
             </a:r>
             <a:endParaRPr lang="en-US" sz="1300" dirty="0"/>
           </a:p>
@@ -38511,7 +39054,7 @@
                 <a:ea typeface="Trebuchet MS" pitchFamily="34" charset="-122"/>
                 <a:cs typeface="Trebuchet MS" pitchFamily="34" charset="-120"/>
               </a:rPr>
-              <a:t>closure</a:t>
+              <a:t>disclose</a:t>
             </a:r>
             <a:endParaRPr lang="en-US" sz="1300" dirty="0"/>
           </a:p>
@@ -38577,7 +39120,7 @@
                 <a:ea typeface="Trebuchet MS" pitchFamily="34" charset="-122"/>
                 <a:cs typeface="Trebuchet MS" pitchFamily="34" charset="-120"/>
               </a:rPr>
-              <a:t>enclose</a:t>
+              <a:t>enclosed</a:t>
             </a:r>
             <a:endParaRPr lang="en-US" sz="1300" dirty="0"/>
           </a:p>
@@ -38709,7 +39252,7 @@
                 <a:ea typeface="Trebuchet MS" pitchFamily="34" charset="-122"/>
                 <a:cs typeface="Trebuchet MS" pitchFamily="34" charset="-120"/>
               </a:rPr>
-              <a:t>disclose</a:t>
+              <a:t>foreclose</a:t>
             </a:r>
             <a:endParaRPr lang="en-US" sz="1300" dirty="0"/>
           </a:p>
@@ -38775,7 +39318,7 @@
                 <a:ea typeface="Trebuchet MS" pitchFamily="34" charset="-122"/>
                 <a:cs typeface="Trebuchet MS" pitchFamily="34" charset="-120"/>
               </a:rPr>
-              <a:t>foreclose</a:t>
+              <a:t>recluse</a:t>
             </a:r>
             <a:endParaRPr lang="en-US" sz="1300" dirty="0"/>
           </a:p>
@@ -39560,7 +40103,7 @@
                 <a:ea typeface="Trebuchet MS" pitchFamily="34" charset="-122"/>
                 <a:cs typeface="Trebuchet MS" pitchFamily="34" charset="-120"/>
               </a:rPr>
-              <a:t>in-</a:t>
+              <a:t>dis-</a:t>
             </a:r>
             <a:endParaRPr lang="en-US" sz="1300" dirty="0"/>
           </a:p>
@@ -39713,7 +40256,7 @@
                 <a:ea typeface="Trebuchet MS" pitchFamily="34" charset="-122"/>
                 <a:cs typeface="Trebuchet MS" pitchFamily="34" charset="-120"/>
               </a:rPr>
-              <a:t>dis-</a:t>
+              <a:t>fore-</a:t>
             </a:r>
             <a:endParaRPr lang="en-US" sz="1300" dirty="0"/>
           </a:p>
@@ -39866,7 +40409,7 @@
                 <a:ea typeface="Trebuchet MS" pitchFamily="34" charset="-122"/>
                 <a:cs typeface="Trebuchet MS" pitchFamily="34" charset="-120"/>
               </a:rPr>
-              <a:t>fore-</a:t>
+              <a:t>in-</a:t>
             </a:r>
             <a:endParaRPr lang="en-US" sz="1300" dirty="0"/>
           </a:p>
@@ -40549,7 +41092,7 @@
                 <a:ea typeface="Trebuchet MS" pitchFamily="34" charset="-122"/>
                 <a:cs typeface="Trebuchet MS" pitchFamily="34" charset="-120"/>
               </a:rPr>
-              <a:t>close</a:t>
+              <a:t>closure</a:t>
             </a:r>
             <a:endParaRPr lang="en-US" sz="1400" dirty="0"/>
           </a:p>
@@ -40953,7 +41496,7 @@
                 <a:ea typeface="Trebuchet MS" pitchFamily="34" charset="-122"/>
                 <a:cs typeface="Trebuchet MS" pitchFamily="34" charset="-120"/>
               </a:rPr>
-              <a:t>close</a:t>
+              <a:t>closure</a:t>
             </a:r>
             <a:endParaRPr lang="en-US" sz="1200" dirty="0"/>
           </a:p>
@@ -41019,7 +41562,7 @@
                 <a:ea typeface="Calibri" pitchFamily="34" charset="-122"/>
                 <a:cs typeface="Calibri" pitchFamily="34" charset="-120"/>
               </a:rPr>
-              <a:t>To take back a property when someone cannot pay their loan.</a:t>
+              <a:t>A person who shuts themselves away from others and lives alone.</a:t>
             </a:r>
             <a:endParaRPr lang="en-US" sz="1200" dirty="0"/>
           </a:p>
@@ -41092,7 +41635,7 @@
                 <a:ea typeface="Trebuchet MS" pitchFamily="34" charset="-122"/>
                 <a:cs typeface="Trebuchet MS" pitchFamily="34" charset="-120"/>
               </a:rPr>
-              <a:t>closed</a:t>
+              <a:t>enclose</a:t>
             </a:r>
             <a:endParaRPr lang="en-US" sz="1200" dirty="0"/>
           </a:p>
@@ -41158,7 +41701,7 @@
                 <a:ea typeface="Calibri" pitchFamily="34" charset="-122"/>
                 <a:cs typeface="Calibri" pitchFamily="34" charset="-120"/>
               </a:rPr>
-              <a:t>To surround something completely or put something inside an envelope or fence.</a:t>
+              <a:t>Describes something that has been shut in or surrounded on all sides, like a yard with a fence.</a:t>
             </a:r>
             <a:endParaRPr lang="en-US" sz="1200" dirty="0"/>
           </a:p>
@@ -41231,7 +41774,7 @@
                 <a:ea typeface="Trebuchet MS" pitchFamily="34" charset="-122"/>
                 <a:cs typeface="Trebuchet MS" pitchFamily="34" charset="-120"/>
               </a:rPr>
-              <a:t>closure</a:t>
+              <a:t>disclose</a:t>
             </a:r>
             <a:endParaRPr lang="en-US" sz="1200" dirty="0"/>
           </a:p>
@@ -41297,7 +41840,7 @@
                 <a:ea typeface="Calibri" pitchFamily="34" charset="-122"/>
                 <a:cs typeface="Calibri" pitchFamily="34" charset="-120"/>
               </a:rPr>
-              <a:t>To reveal or share information that was previously secret or hidden.</a:t>
+              <a:t>When a bank takes back a property because the owner could not make their payments.</a:t>
             </a:r>
             <a:endParaRPr lang="en-US" sz="1200" dirty="0"/>
           </a:p>
@@ -41370,7 +41913,7 @@
                 <a:ea typeface="Trebuchet MS" pitchFamily="34" charset="-122"/>
                 <a:cs typeface="Trebuchet MS" pitchFamily="34" charset="-120"/>
               </a:rPr>
-              <a:t>enclose</a:t>
+              <a:t>enclosed</a:t>
             </a:r>
             <a:endParaRPr lang="en-US" sz="1200" dirty="0"/>
           </a:p>
@@ -41436,7 +41979,7 @@
                 <a:ea typeface="Calibri" pitchFamily="34" charset="-122"/>
                 <a:cs typeface="Calibri" pitchFamily="34" charset="-120"/>
               </a:rPr>
-              <a:t>A space that is fenced or walled in, like an animal pen at a zoo.</a:t>
+              <a:t>A space that is shut in or fenced off, like an animal pen at a zoo.</a:t>
             </a:r>
             <a:endParaRPr lang="en-US" sz="1200" dirty="0"/>
           </a:p>
@@ -41575,7 +42118,7 @@
                 <a:ea typeface="Calibri" pitchFamily="34" charset="-122"/>
                 <a:cs typeface="Calibri" pitchFamily="34" charset="-120"/>
               </a:rPr>
-              <a:t>To shut something, like a door or a book.</a:t>
+              <a:t>The act of shutting something down or bringing it to an end, like when a shop closes for good.</a:t>
             </a:r>
             <a:endParaRPr lang="en-US" sz="1200" dirty="0"/>
           </a:p>
@@ -41648,7 +42191,7 @@
                 <a:ea typeface="Trebuchet MS" pitchFamily="34" charset="-122"/>
                 <a:cs typeface="Trebuchet MS" pitchFamily="34" charset="-120"/>
               </a:rPr>
-              <a:t>disclose</a:t>
+              <a:t>foreclose</a:t>
             </a:r>
             <a:endParaRPr lang="en-US" sz="1200" dirty="0"/>
           </a:p>
@@ -41714,7 +42257,7 @@
                 <a:ea typeface="Calibri" pitchFamily="34" charset="-122"/>
                 <a:cs typeface="Calibri" pitchFamily="34" charset="-120"/>
               </a:rPr>
-              <a:t>The act of shutting something down or bringing something to an end.</a:t>
+              <a:t>To reveal or share information that was previously hidden or secret.</a:t>
             </a:r>
             <a:endParaRPr lang="en-US" sz="1200" dirty="0"/>
           </a:p>
@@ -41787,7 +42330,7 @@
                 <a:ea typeface="Trebuchet MS" pitchFamily="34" charset="-122"/>
                 <a:cs typeface="Trebuchet MS" pitchFamily="34" charset="-120"/>
               </a:rPr>
-              <a:t>foreclose</a:t>
+              <a:t>recluse</a:t>
             </a:r>
             <a:endParaRPr lang="en-US" sz="1200" dirty="0"/>
           </a:p>
@@ -41853,7 +42396,7 @@
                 <a:ea typeface="Calibri" pitchFamily="34" charset="-122"/>
                 <a:cs typeface="Calibri" pitchFamily="34" charset="-120"/>
               </a:rPr>
-              <a:t>Something that has been shut and is not open.</a:t>
+              <a:t>To shut something inside or surround it, like putting a letter inside an envelope.</a:t>
             </a:r>
             <a:endParaRPr lang="en-US" sz="1200" dirty="0"/>
           </a:p>
@@ -42348,7 +42891,7 @@
                 <a:ea typeface="Calibri" pitchFamily="34" charset="-122"/>
                 <a:cs typeface="Calibri" pitchFamily="34" charset="-120"/>
               </a:rPr>
-              <a:t>The zookeeper checked that the enclosure gate was properly closed before leaving for the night.</a:t>
+              <a:t>The zoo built a new enclosure to keep the lion safe and give it more space to roam.</a:t>
             </a:r>
             <a:endParaRPr lang="en-US" sz="1500" dirty="0"/>
           </a:p>
@@ -42512,7 +43055,7 @@
                 <a:ea typeface="Calibri" pitchFamily="34" charset="-122"/>
                 <a:cs typeface="Calibri" pitchFamily="34" charset="-120"/>
               </a:rPr>
-              <a:t>The principal made a special announcement about the closure of the school library for renovations.</a:t>
+              <a:t>The principal had to disclose the new school rules to all students at assembly.</a:t>
             </a:r>
             <a:endParaRPr lang="en-US" sz="1500" dirty="0"/>
           </a:p>
@@ -42676,7 +43219,7 @@
                 <a:ea typeface="Calibri" pitchFamily="34" charset="-122"/>
                 <a:cs typeface="Calibri" pitchFamily="34" charset="-120"/>
               </a:rPr>
-              <a:t>She decided to disclose her secret talent for painting at the school art show.</a:t>
+              <a:t>After the bakery's closure, the neighbourhood missed the smell of fresh bread every morning.</a:t>
             </a:r>
             <a:endParaRPr lang="en-US" sz="1500" dirty="0"/>
           </a:p>

--- a/output/wordlabs-clos-3day.pptx
+++ b/output/wordlabs-clos-3day.pptx
@@ -33023,11 +33023,11 @@
         <p:spPr>
           <a:xfrm>
             <a:off x="1874520" y="4096512"/>
-            <a:ext cx="6903720" cy="804672"/>
+            <a:ext cx="6903720" cy="658368"/>
           </a:xfrm>
           <a:prstGeom prst="rect">
             <a:avLst>
-              <a:gd name="adj" fmla="val 6818"/>
+              <a:gd name="adj" fmla="val 8333"/>
             </a:avLst>
           </a:prstGeom>
           <a:solidFill>
@@ -33049,12 +33049,12 @@
         </p:nvSpPr>
         <p:spPr>
           <a:xfrm>
-            <a:off x="2254649" y="4169664"/>
-            <a:ext cx="685800" cy="384048"/>
+            <a:off x="2023872" y="4169664"/>
+            <a:ext cx="685800" cy="475488"/>
           </a:xfrm>
           <a:prstGeom prst="rect">
             <a:avLst>
-              <a:gd name="adj" fmla="val 9524"/>
+              <a:gd name="adj" fmla="val 7692"/>
             </a:avLst>
           </a:prstGeom>
           <a:solidFill>
@@ -33076,8 +33076,8 @@
         </p:nvSpPr>
         <p:spPr>
           <a:xfrm>
-            <a:off x="2254649" y="4169664"/>
-            <a:ext cx="685800" cy="384048"/>
+            <a:off x="2023872" y="4169664"/>
+            <a:ext cx="685800" cy="475488"/>
           </a:xfrm>
           <a:prstGeom prst="rect">
             <a:avLst/>
@@ -33115,12 +33115,12 @@
         </p:nvSpPr>
         <p:spPr>
           <a:xfrm>
-            <a:off x="3293146" y="4169664"/>
-            <a:ext cx="685800" cy="384048"/>
+            <a:off x="2831592" y="4169664"/>
+            <a:ext cx="685800" cy="475488"/>
           </a:xfrm>
           <a:prstGeom prst="rect">
             <a:avLst>
-              <a:gd name="adj" fmla="val 9524"/>
+              <a:gd name="adj" fmla="val 7692"/>
             </a:avLst>
           </a:prstGeom>
           <a:solidFill>
@@ -33142,8 +33142,8 @@
         </p:nvSpPr>
         <p:spPr>
           <a:xfrm>
-            <a:off x="3293146" y="4169664"/>
-            <a:ext cx="685800" cy="384048"/>
+            <a:off x="2831592" y="4169664"/>
+            <a:ext cx="685800" cy="475488"/>
           </a:xfrm>
           <a:prstGeom prst="rect">
             <a:avLst/>
@@ -33181,12 +33181,12 @@
         </p:nvSpPr>
         <p:spPr>
           <a:xfrm>
-            <a:off x="4331643" y="4169664"/>
-            <a:ext cx="685800" cy="384048"/>
+            <a:off x="3639312" y="4169664"/>
+            <a:ext cx="685800" cy="475488"/>
           </a:xfrm>
           <a:prstGeom prst="rect">
             <a:avLst>
-              <a:gd name="adj" fmla="val 9524"/>
+              <a:gd name="adj" fmla="val 7692"/>
             </a:avLst>
           </a:prstGeom>
           <a:solidFill>
@@ -33208,8 +33208,8 @@
         </p:nvSpPr>
         <p:spPr>
           <a:xfrm>
-            <a:off x="4331643" y="4169664"/>
-            <a:ext cx="685800" cy="384048"/>
+            <a:off x="3639312" y="4169664"/>
+            <a:ext cx="685800" cy="475488"/>
           </a:xfrm>
           <a:prstGeom prst="rect">
             <a:avLst/>
@@ -33233,7 +33233,7 @@
                 <a:ea typeface="Trebuchet MS" pitchFamily="34" charset="-122"/>
                 <a:cs typeface="Trebuchet MS" pitchFamily="34" charset="-120"/>
               </a:rPr>
-              <a:t>cl</a:t>
+              <a:t>e</a:t>
             </a:r>
             <a:endParaRPr lang="en-US" sz="900" dirty="0"/>
           </a:p>
@@ -33247,12 +33247,12 @@
         </p:nvSpPr>
         <p:spPr>
           <a:xfrm>
-            <a:off x="5370141" y="4169664"/>
-            <a:ext cx="685800" cy="384048"/>
+            <a:off x="4447032" y="4169664"/>
+            <a:ext cx="685800" cy="475488"/>
           </a:xfrm>
           <a:prstGeom prst="rect">
             <a:avLst>
-              <a:gd name="adj" fmla="val 9524"/>
+              <a:gd name="adj" fmla="val 7692"/>
             </a:avLst>
           </a:prstGeom>
           <a:solidFill>
@@ -33274,8 +33274,8 @@
         </p:nvSpPr>
         <p:spPr>
           <a:xfrm>
-            <a:off x="5370141" y="4169664"/>
-            <a:ext cx="685800" cy="384048"/>
+            <a:off x="4447032" y="4169664"/>
+            <a:ext cx="685800" cy="475488"/>
           </a:xfrm>
           <a:prstGeom prst="rect">
             <a:avLst/>
@@ -33299,7 +33299,7 @@
                 <a:ea typeface="Trebuchet MS" pitchFamily="34" charset="-122"/>
                 <a:cs typeface="Trebuchet MS" pitchFamily="34" charset="-120"/>
               </a:rPr>
-              <a:t>o</a:t>
+              <a:t>c</a:t>
             </a:r>
             <a:endParaRPr lang="en-US" sz="900" dirty="0"/>
           </a:p>
@@ -33313,12 +33313,12 @@
         </p:nvSpPr>
         <p:spPr>
           <a:xfrm>
-            <a:off x="6408638" y="4169664"/>
-            <a:ext cx="685800" cy="384048"/>
+            <a:off x="5254752" y="4169664"/>
+            <a:ext cx="685800" cy="475488"/>
           </a:xfrm>
           <a:prstGeom prst="rect">
             <a:avLst>
-              <a:gd name="adj" fmla="val 9524"/>
+              <a:gd name="adj" fmla="val 7692"/>
             </a:avLst>
           </a:prstGeom>
           <a:solidFill>
@@ -33340,8 +33340,8 @@
         </p:nvSpPr>
         <p:spPr>
           <a:xfrm>
-            <a:off x="6408638" y="4169664"/>
-            <a:ext cx="685800" cy="384048"/>
+            <a:off x="5254752" y="4169664"/>
+            <a:ext cx="685800" cy="475488"/>
           </a:xfrm>
           <a:prstGeom prst="rect">
             <a:avLst/>
@@ -33365,6 +33365,138 @@
                 <a:ea typeface="Trebuchet MS" pitchFamily="34" charset="-122"/>
                 <a:cs typeface="Trebuchet MS" pitchFamily="34" charset="-120"/>
               </a:rPr>
+              <a:t>l</a:t>
+            </a:r>
+            <a:endParaRPr lang="en-US" sz="900" dirty="0"/>
+          </a:p>
+        </p:txBody>
+      </p:sp>
+      <p:sp>
+        <p:nvSpPr>
+          <p:cNvPr id="50" name="Shape 48"/>
+          <p:cNvSpPr/>
+          <p:nvPr/>
+        </p:nvSpPr>
+        <p:spPr>
+          <a:xfrm>
+            <a:off x="6062472" y="4169664"/>
+            <a:ext cx="685800" cy="475488"/>
+          </a:xfrm>
+          <a:prstGeom prst="rect">
+            <a:avLst>
+              <a:gd name="adj" fmla="val 7692"/>
+            </a:avLst>
+          </a:prstGeom>
+          <a:solidFill>
+            <a:srgbClr val="FFFFFF"/>
+          </a:solidFill>
+          <a:ln w="12700">
+            <a:solidFill>
+              <a:srgbClr val="DB2777"/>
+            </a:solidFill>
+            <a:prstDash val="solid"/>
+          </a:ln>
+        </p:spPr>
+      </p:sp>
+      <p:sp>
+        <p:nvSpPr>
+          <p:cNvPr id="51" name="Text 49"/>
+          <p:cNvSpPr/>
+          <p:nvPr/>
+        </p:nvSpPr>
+        <p:spPr>
+          <a:xfrm>
+            <a:off x="6062472" y="4169664"/>
+            <a:ext cx="685800" cy="475488"/>
+          </a:xfrm>
+          <a:prstGeom prst="rect">
+            <a:avLst/>
+          </a:prstGeom>
+          <a:noFill/>
+          <a:ln/>
+        </p:spPr>
+        <p:txBody>
+          <a:bodyPr wrap="square" lIns="0" tIns="0" rIns="0" bIns="0" rtlCol="0" anchor="ctr"/>
+          <a:lstStyle/>
+          <a:p>
+            <a:pPr algn="ctr" indent="0" marL="0">
+              <a:buNone/>
+            </a:pPr>
+            <a:r>
+              <a:rPr lang="en-US" sz="900" b="1" dirty="0">
+                <a:solidFill>
+                  <a:srgbClr val="9D174D"/>
+                </a:solidFill>
+                <a:latin typeface="Trebuchet MS" pitchFamily="34" charset="0"/>
+                <a:ea typeface="Trebuchet MS" pitchFamily="34" charset="-122"/>
+                <a:cs typeface="Trebuchet MS" pitchFamily="34" charset="-120"/>
+              </a:rPr>
+              <a:t>o</a:t>
+            </a:r>
+            <a:endParaRPr lang="en-US" sz="900" dirty="0"/>
+          </a:p>
+        </p:txBody>
+      </p:sp>
+      <p:sp>
+        <p:nvSpPr>
+          <p:cNvPr id="52" name="Shape 50"/>
+          <p:cNvSpPr/>
+          <p:nvPr/>
+        </p:nvSpPr>
+        <p:spPr>
+          <a:xfrm>
+            <a:off x="6870192" y="4169664"/>
+            <a:ext cx="685800" cy="475488"/>
+          </a:xfrm>
+          <a:prstGeom prst="rect">
+            <a:avLst>
+              <a:gd name="adj" fmla="val 7692"/>
+            </a:avLst>
+          </a:prstGeom>
+          <a:solidFill>
+            <a:srgbClr val="FFFFFF"/>
+          </a:solidFill>
+          <a:ln w="12700">
+            <a:solidFill>
+              <a:srgbClr val="DB2777"/>
+            </a:solidFill>
+            <a:prstDash val="solid"/>
+          </a:ln>
+        </p:spPr>
+      </p:sp>
+      <p:sp>
+        <p:nvSpPr>
+          <p:cNvPr id="53" name="Text 51"/>
+          <p:cNvSpPr/>
+          <p:nvPr/>
+        </p:nvSpPr>
+        <p:spPr>
+          <a:xfrm>
+            <a:off x="6870192" y="4169664"/>
+            <a:ext cx="685800" cy="475488"/>
+          </a:xfrm>
+          <a:prstGeom prst="rect">
+            <a:avLst/>
+          </a:prstGeom>
+          <a:noFill/>
+          <a:ln/>
+        </p:spPr>
+        <p:txBody>
+          <a:bodyPr wrap="square" lIns="0" tIns="0" rIns="0" bIns="0" rtlCol="0" anchor="ctr"/>
+          <a:lstStyle/>
+          <a:p>
+            <a:pPr algn="ctr" indent="0" marL="0">
+              <a:buNone/>
+            </a:pPr>
+            <a:r>
+              <a:rPr lang="en-US" sz="900" b="1" dirty="0">
+                <a:solidFill>
+                  <a:srgbClr val="9D174D"/>
+                </a:solidFill>
+                <a:latin typeface="Trebuchet MS" pitchFamily="34" charset="0"/>
+                <a:ea typeface="Trebuchet MS" pitchFamily="34" charset="-122"/>
+                <a:cs typeface="Trebuchet MS" pitchFamily="34" charset="-120"/>
+              </a:rPr>
               <a:t>s</a:t>
             </a:r>
             <a:endParaRPr lang="en-US" sz="900" dirty="0"/>
@@ -33373,57 +33505,18 @@
       </p:sp>
       <p:sp>
         <p:nvSpPr>
-          <p:cNvPr id="50" name="Text 48"/>
-          <p:cNvSpPr/>
-          <p:nvPr/>
-        </p:nvSpPr>
-        <p:spPr>
-          <a:xfrm>
-            <a:off x="6408638" y="4572000"/>
-            <a:ext cx="685800" cy="219456"/>
-          </a:xfrm>
-          <a:prstGeom prst="rect">
-            <a:avLst/>
-          </a:prstGeom>
-          <a:noFill/>
-          <a:ln/>
-        </p:spPr>
-        <p:txBody>
-          <a:bodyPr wrap="square" lIns="0" tIns="0" rIns="0" bIns="0" rtlCol="0" anchor="t"/>
-          <a:lstStyle/>
-          <a:p>
-            <a:pPr algn="ctr" indent="0" marL="0">
-              <a:buNone/>
-            </a:pPr>
-            <a:r>
-              <a:rPr lang="en-US" sz="750" i="1" dirty="0">
-                <a:solidFill>
-                  <a:srgbClr val="94A3B8"/>
-                </a:solidFill>
-                <a:latin typeface="Calibri" pitchFamily="34" charset="0"/>
-                <a:ea typeface="Calibri" pitchFamily="34" charset="-122"/>
-                <a:cs typeface="Calibri" pitchFamily="34" charset="-120"/>
-              </a:rPr>
-              <a:t>/zh/</a:t>
-            </a:r>
-            <a:endParaRPr lang="en-US" sz="750" dirty="0"/>
-          </a:p>
-        </p:txBody>
-      </p:sp>
-      <p:sp>
-        <p:nvSpPr>
-          <p:cNvPr id="51" name="Shape 49"/>
-          <p:cNvSpPr/>
-          <p:nvPr/>
-        </p:nvSpPr>
-        <p:spPr>
-          <a:xfrm>
-            <a:off x="7447135" y="4169664"/>
-            <a:ext cx="685800" cy="384048"/>
+          <p:cNvPr id="54" name="Shape 52"/>
+          <p:cNvSpPr/>
+          <p:nvPr/>
+        </p:nvSpPr>
+        <p:spPr>
+          <a:xfrm>
+            <a:off x="7677912" y="4169664"/>
+            <a:ext cx="685800" cy="475488"/>
           </a:xfrm>
           <a:prstGeom prst="rect">
             <a:avLst>
-              <a:gd name="adj" fmla="val 9524"/>
+              <a:gd name="adj" fmla="val 7692"/>
             </a:avLst>
           </a:prstGeom>
           <a:solidFill>
@@ -33439,14 +33532,14 @@
       </p:sp>
       <p:sp>
         <p:nvSpPr>
-          <p:cNvPr id="52" name="Text 50"/>
-          <p:cNvSpPr/>
-          <p:nvPr/>
-        </p:nvSpPr>
-        <p:spPr>
-          <a:xfrm>
-            <a:off x="7447135" y="4169664"/>
-            <a:ext cx="685800" cy="384048"/>
+          <p:cNvPr id="55" name="Text 53"/>
+          <p:cNvSpPr/>
+          <p:nvPr/>
+        </p:nvSpPr>
+        <p:spPr>
+          <a:xfrm>
+            <a:off x="7677912" y="4169664"/>
+            <a:ext cx="685800" cy="475488"/>
           </a:xfrm>
           <a:prstGeom prst="rect">
             <a:avLst/>
@@ -37727,7 +37820,7 @@
                 <a:ea typeface="Calibri" pitchFamily="34" charset="-122"/>
                 <a:cs typeface="Calibri" pitchFamily="34" charset="-120"/>
               </a:rPr>
-              <a:t>1.  The prefix 'en-' in 'enclose' means to take something apart.</a:t>
+              <a:t>1.  The word 'disclose' means to hide information even more carefully.</a:t>
             </a:r>
             <a:endParaRPr lang="en-US" sz="1300" dirty="0"/>
           </a:p>
@@ -37866,7 +37959,7 @@
                 <a:ea typeface="Calibri" pitchFamily="34" charset="-122"/>
                 <a:cs typeface="Calibri" pitchFamily="34" charset="-120"/>
               </a:rPr>
-              <a:t>2.  The word 'disclose' means to hide information even more carefully.</a:t>
+              <a:t>2.  The suffix '-ure' can be added to 'clos' to make the word 'closure'.</a:t>
             </a:r>
             <a:endParaRPr lang="en-US" sz="1300" dirty="0"/>
           </a:p>
@@ -37889,11 +37982,11 @@
             </a:avLst>
           </a:prstGeom>
           <a:solidFill>
-            <a:srgbClr val="FEE2E2"/>
-          </a:solidFill>
-          <a:ln w="12700">
-            <a:solidFill>
-              <a:srgbClr val="DC2626"/>
+            <a:srgbClr val="DCFCE7"/>
+          </a:solidFill>
+          <a:ln w="12700">
+            <a:solidFill>
+              <a:srgbClr val="16A34A"/>
             </a:solidFill>
             <a:prstDash val="solid"/>
           </a:ln>
@@ -37926,13 +38019,13 @@
             <a:r>
               <a:rPr lang="en-US" sz="1100" b="1" dirty="0">
                 <a:solidFill>
-                  <a:srgbClr val="DC2626"/>
+                  <a:srgbClr val="16A34A"/>
                 </a:solidFill>
                 <a:latin typeface="Trebuchet MS" pitchFamily="34" charset="0"/>
                 <a:ea typeface="Trebuchet MS" pitchFamily="34" charset="-122"/>
                 <a:cs typeface="Trebuchet MS" pitchFamily="34" charset="-120"/>
               </a:rPr>
-              <a:t>FALSE</a:t>
+              <a:t>TRUE</a:t>
             </a:r>
             <a:endParaRPr lang="en-US" sz="1100" dirty="0"/>
           </a:p>
@@ -38005,7 +38098,7 @@
                 <a:ea typeface="Calibri" pitchFamily="34" charset="-122"/>
                 <a:cs typeface="Calibri" pitchFamily="34" charset="-120"/>
               </a:rPr>
-              <a:t>3.  The suffix '-ure' can be added to 'clos' to make the word 'closure'.</a:t>
+              <a:t>3.  An enclosure is a space that is shut in or fenced off.</a:t>
             </a:r>
             <a:endParaRPr lang="en-US" sz="1300" dirty="0"/>
           </a:p>
@@ -38144,7 +38237,7 @@
                 <a:ea typeface="Calibri" pitchFamily="34" charset="-122"/>
                 <a:cs typeface="Calibri" pitchFamily="34" charset="-120"/>
               </a:rPr>
-              <a:t>4.  The root 'clos' comes from a Latin word meaning to shut.</a:t>
+              <a:t>4.  The prefix 'en-' in 'enclose' means to take something apart.</a:t>
             </a:r>
             <a:endParaRPr lang="en-US" sz="1300" dirty="0"/>
           </a:p>
@@ -38167,11 +38260,11 @@
             </a:avLst>
           </a:prstGeom>
           <a:solidFill>
-            <a:srgbClr val="DCFCE7"/>
-          </a:solidFill>
-          <a:ln w="12700">
-            <a:solidFill>
-              <a:srgbClr val="16A34A"/>
+            <a:srgbClr val="FEE2E2"/>
+          </a:solidFill>
+          <a:ln w="12700">
+            <a:solidFill>
+              <a:srgbClr val="DC2626"/>
             </a:solidFill>
             <a:prstDash val="solid"/>
           </a:ln>
@@ -38204,13 +38297,13 @@
             <a:r>
               <a:rPr lang="en-US" sz="1100" b="1" dirty="0">
                 <a:solidFill>
-                  <a:srgbClr val="16A34A"/>
+                  <a:srgbClr val="DC2626"/>
                 </a:solidFill>
                 <a:latin typeface="Trebuchet MS" pitchFamily="34" charset="0"/>
                 <a:ea typeface="Trebuchet MS" pitchFamily="34" charset="-122"/>
                 <a:cs typeface="Trebuchet MS" pitchFamily="34" charset="-120"/>
               </a:rPr>
-              <a:t>TRUE</a:t>
+              <a:t>FALSE</a:t>
             </a:r>
             <a:endParaRPr lang="en-US" sz="1100" dirty="0"/>
           </a:p>
@@ -38283,7 +38376,7 @@
                 <a:ea typeface="Calibri" pitchFamily="34" charset="-122"/>
                 <a:cs typeface="Calibri" pitchFamily="34" charset="-120"/>
               </a:rPr>
-              <a:t>5.  An enclosure is a space that is shut in or fenced off.</a:t>
+              <a:t>5.  The root 'clos' comes from a Latin word meaning to shut.</a:t>
             </a:r>
             <a:endParaRPr lang="en-US" sz="1300" dirty="0"/>
           </a:p>
